--- a/chapter5/ASE_5_Team_and_Process.pptx
+++ b/chapter5/ASE_5_Team_and_Process.pptx
@@ -5,61 +5,64 @@
     <p:sldMasterId id="2147483684" r:id="rId4"/>
   </p:sldMasterIdLst>
   <p:notesMasterIdLst>
-    <p:notesMasterId r:id="rId57"/>
+    <p:notesMasterId r:id="rId60"/>
   </p:notesMasterIdLst>
   <p:sldIdLst>
     <p:sldId id="256" r:id="rId5"/>
-    <p:sldId id="282" r:id="rId6"/>
-    <p:sldId id="266" r:id="rId7"/>
-    <p:sldId id="283" r:id="rId8"/>
-    <p:sldId id="269" r:id="rId9"/>
-    <p:sldId id="286" r:id="rId10"/>
-    <p:sldId id="263" r:id="rId11"/>
-    <p:sldId id="271" r:id="rId12"/>
-    <p:sldId id="270" r:id="rId13"/>
-    <p:sldId id="276" r:id="rId14"/>
-    <p:sldId id="284" r:id="rId15"/>
-    <p:sldId id="277" r:id="rId16"/>
-    <p:sldId id="285" r:id="rId17"/>
-    <p:sldId id="288" r:id="rId18"/>
-    <p:sldId id="264" r:id="rId19"/>
-    <p:sldId id="280" r:id="rId20"/>
-    <p:sldId id="265" r:id="rId21"/>
-    <p:sldId id="274" r:id="rId22"/>
-    <p:sldId id="278" r:id="rId23"/>
-    <p:sldId id="289" r:id="rId24"/>
-    <p:sldId id="267" r:id="rId25"/>
-    <p:sldId id="279" r:id="rId26"/>
-    <p:sldId id="268" r:id="rId27"/>
-    <p:sldId id="272" r:id="rId28"/>
-    <p:sldId id="324" r:id="rId29"/>
-    <p:sldId id="325" r:id="rId30"/>
-    <p:sldId id="326" r:id="rId31"/>
-    <p:sldId id="327" r:id="rId32"/>
-    <p:sldId id="328" r:id="rId33"/>
-    <p:sldId id="329" r:id="rId34"/>
-    <p:sldId id="332" r:id="rId35"/>
-    <p:sldId id="333" r:id="rId36"/>
-    <p:sldId id="334" r:id="rId37"/>
-    <p:sldId id="330" r:id="rId38"/>
-    <p:sldId id="331" r:id="rId39"/>
-    <p:sldId id="344" r:id="rId40"/>
-    <p:sldId id="345" r:id="rId41"/>
-    <p:sldId id="346" r:id="rId42"/>
-    <p:sldId id="347" r:id="rId43"/>
-    <p:sldId id="348" r:id="rId44"/>
-    <p:sldId id="349" r:id="rId45"/>
-    <p:sldId id="335" r:id="rId46"/>
-    <p:sldId id="350" r:id="rId47"/>
-    <p:sldId id="351" r:id="rId48"/>
-    <p:sldId id="323" r:id="rId49"/>
-    <p:sldId id="337" r:id="rId50"/>
-    <p:sldId id="343" r:id="rId51"/>
-    <p:sldId id="287" r:id="rId52"/>
-    <p:sldId id="275" r:id="rId53"/>
-    <p:sldId id="336" r:id="rId54"/>
-    <p:sldId id="281" r:id="rId55"/>
-    <p:sldId id="374" r:id="rId56"/>
+    <p:sldId id="427" r:id="rId6"/>
+    <p:sldId id="437" r:id="rId7"/>
+    <p:sldId id="282" r:id="rId8"/>
+    <p:sldId id="266" r:id="rId9"/>
+    <p:sldId id="283" r:id="rId10"/>
+    <p:sldId id="269" r:id="rId11"/>
+    <p:sldId id="286" r:id="rId12"/>
+    <p:sldId id="263" r:id="rId13"/>
+    <p:sldId id="271" r:id="rId14"/>
+    <p:sldId id="438" r:id="rId15"/>
+    <p:sldId id="270" r:id="rId16"/>
+    <p:sldId id="276" r:id="rId17"/>
+    <p:sldId id="284" r:id="rId18"/>
+    <p:sldId id="277" r:id="rId19"/>
+    <p:sldId id="285" r:id="rId20"/>
+    <p:sldId id="288" r:id="rId21"/>
+    <p:sldId id="264" r:id="rId22"/>
+    <p:sldId id="280" r:id="rId23"/>
+    <p:sldId id="265" r:id="rId24"/>
+    <p:sldId id="274" r:id="rId25"/>
+    <p:sldId id="278" r:id="rId26"/>
+    <p:sldId id="289" r:id="rId27"/>
+    <p:sldId id="267" r:id="rId28"/>
+    <p:sldId id="279" r:id="rId29"/>
+    <p:sldId id="268" r:id="rId30"/>
+    <p:sldId id="272" r:id="rId31"/>
+    <p:sldId id="324" r:id="rId32"/>
+    <p:sldId id="325" r:id="rId33"/>
+    <p:sldId id="326" r:id="rId34"/>
+    <p:sldId id="327" r:id="rId35"/>
+    <p:sldId id="328" r:id="rId36"/>
+    <p:sldId id="329" r:id="rId37"/>
+    <p:sldId id="332" r:id="rId38"/>
+    <p:sldId id="333" r:id="rId39"/>
+    <p:sldId id="334" r:id="rId40"/>
+    <p:sldId id="330" r:id="rId41"/>
+    <p:sldId id="331" r:id="rId42"/>
+    <p:sldId id="344" r:id="rId43"/>
+    <p:sldId id="345" r:id="rId44"/>
+    <p:sldId id="346" r:id="rId45"/>
+    <p:sldId id="347" r:id="rId46"/>
+    <p:sldId id="348" r:id="rId47"/>
+    <p:sldId id="349" r:id="rId48"/>
+    <p:sldId id="335" r:id="rId49"/>
+    <p:sldId id="350" r:id="rId50"/>
+    <p:sldId id="351" r:id="rId51"/>
+    <p:sldId id="323" r:id="rId52"/>
+    <p:sldId id="337" r:id="rId53"/>
+    <p:sldId id="343" r:id="rId54"/>
+    <p:sldId id="287" r:id="rId55"/>
+    <p:sldId id="275" r:id="rId56"/>
+    <p:sldId id="336" r:id="rId57"/>
+    <p:sldId id="281" r:id="rId58"/>
+    <p:sldId id="374" r:id="rId59"/>
   </p:sldIdLst>
   <p:sldSz cx="12192000" cy="6858000"/>
   <p:notesSz cx="6858000" cy="9144000"/>
@@ -180,7 +183,7 @@
 <file path=ppt/revisionInfo.xml><?xml version="1.0" encoding="utf-8"?>
 <p1510:revInfo xmlns:a="http://schemas.openxmlformats.org/drawingml/2006/main" xmlns:r="http://schemas.openxmlformats.org/officeDocument/2006/relationships" xmlns:p1510="http://schemas.microsoft.com/office/powerpoint/2015/10/main">
   <p1510:revLst>
-    <p1510:client id="{18471581-60C6-45C6-91A5-DC9BBA8460E2}" v="1" dt="2019-09-04T06:45:05.905"/>
+    <p1510:client id="{537B9224-E0D6-457C-A405-EB127FDDF888}" v="1" dt="2025-06-06T07:42:22.507"/>
   </p1510:revLst>
 </p1510:revInfo>
 </file>
@@ -200,14 +203,6 @@
           <pc:docMk/>
           <pc:sldMk cId="1478526336" sldId="329"/>
         </pc:sldMkLst>
-        <pc:spChg chg="mod">
-          <ac:chgData name="Xin Zou" userId="260b9726081dae15" providerId="LiveId" clId="{18471581-60C6-45C6-91A5-DC9BBA8460E2}" dt="2019-09-04T06:45:05.905" v="2" actId="207"/>
-          <ac:spMkLst>
-            <pc:docMk/>
-            <pc:sldMk cId="1478526336" sldId="329"/>
-            <ac:spMk id="3" creationId="{00000000-0000-0000-0000-000000000000}"/>
-          </ac:spMkLst>
-        </pc:spChg>
       </pc:sldChg>
     </pc:docChg>
   </pc:docChgLst>
@@ -224,14 +219,6 @@
           <pc:docMk/>
           <pc:sldMk cId="1448842194" sldId="278"/>
         </pc:sldMkLst>
-        <pc:spChg chg="mod">
-          <ac:chgData name="Xin Zou" userId="260b9726081dae15" providerId="LiveId" clId="{DEE274BD-6143-4B6F-ADE7-B79DFE0F13CC}" dt="2018-10-24T15:11:22.326" v="4" actId="27636"/>
-          <ac:spMkLst>
-            <pc:docMk/>
-            <pc:sldMk cId="1448842194" sldId="278"/>
-            <ac:spMk id="3" creationId="{00000000-0000-0000-0000-000000000000}"/>
-          </ac:spMkLst>
-        </pc:spChg>
       </pc:sldChg>
       <pc:sldChg chg="modSp">
         <pc:chgData name="Xin Zou" userId="260b9726081dae15" providerId="LiveId" clId="{DEE274BD-6143-4B6F-ADE7-B79DFE0F13CC}" dt="2018-10-24T15:10:23.283" v="1" actId="14100"/>
@@ -239,14 +226,6 @@
           <pc:docMk/>
           <pc:sldMk cId="1650682258" sldId="286"/>
         </pc:sldMkLst>
-        <pc:spChg chg="mod">
-          <ac:chgData name="Xin Zou" userId="260b9726081dae15" providerId="LiveId" clId="{DEE274BD-6143-4B6F-ADE7-B79DFE0F13CC}" dt="2018-10-24T15:10:23.283" v="1" actId="14100"/>
-          <ac:spMkLst>
-            <pc:docMk/>
-            <pc:sldMk cId="1650682258" sldId="286"/>
-            <ac:spMk id="3" creationId="{00000000-0000-0000-0000-000000000000}"/>
-          </ac:spMkLst>
-        </pc:spChg>
       </pc:sldChg>
       <pc:sldChg chg="modSp">
         <pc:chgData name="Xin Zou" userId="260b9726081dae15" providerId="LiveId" clId="{DEE274BD-6143-4B6F-ADE7-B79DFE0F13CC}" dt="2018-10-24T15:12:19.051" v="7" actId="14100"/>
@@ -254,14 +233,6 @@
           <pc:docMk/>
           <pc:sldMk cId="1132296088" sldId="328"/>
         </pc:sldMkLst>
-        <pc:spChg chg="mod">
-          <ac:chgData name="Xin Zou" userId="260b9726081dae15" providerId="LiveId" clId="{DEE274BD-6143-4B6F-ADE7-B79DFE0F13CC}" dt="2018-10-24T15:12:19.051" v="7" actId="14100"/>
-          <ac:spMkLst>
-            <pc:docMk/>
-            <pc:sldMk cId="1132296088" sldId="328"/>
-            <ac:spMk id="3" creationId="{00000000-0000-0000-0000-000000000000}"/>
-          </ac:spMkLst>
-        </pc:spChg>
       </pc:sldChg>
       <pc:sldChg chg="modSp">
         <pc:chgData name="Xin Zou" userId="260b9726081dae15" providerId="LiveId" clId="{DEE274BD-6143-4B6F-ADE7-B79DFE0F13CC}" dt="2018-10-24T15:13:15.550" v="9" actId="1076"/>
@@ -269,22 +240,6 @@
           <pc:docMk/>
           <pc:sldMk cId="3666095403" sldId="335"/>
         </pc:sldMkLst>
-        <pc:spChg chg="mod">
-          <ac:chgData name="Xin Zou" userId="260b9726081dae15" providerId="LiveId" clId="{DEE274BD-6143-4B6F-ADE7-B79DFE0F13CC}" dt="2018-10-24T15:13:08.681" v="8" actId="1076"/>
-          <ac:spMkLst>
-            <pc:docMk/>
-            <pc:sldMk cId="3666095403" sldId="335"/>
-            <ac:spMk id="3" creationId="{00000000-0000-0000-0000-000000000000}"/>
-          </ac:spMkLst>
-        </pc:spChg>
-        <pc:picChg chg="mod">
-          <ac:chgData name="Xin Zou" userId="260b9726081dae15" providerId="LiveId" clId="{DEE274BD-6143-4B6F-ADE7-B79DFE0F13CC}" dt="2018-10-24T15:13:15.550" v="9" actId="1076"/>
-          <ac:picMkLst>
-            <pc:docMk/>
-            <pc:sldMk cId="3666095403" sldId="335"/>
-            <ac:picMk id="7170" creationId="{00000000-0000-0000-0000-000000000000}"/>
-          </ac:picMkLst>
-        </pc:picChg>
       </pc:sldChg>
       <pc:sldChg chg="modSp">
         <pc:chgData name="Xin Zou" userId="260b9726081dae15" providerId="LiveId" clId="{DEE274BD-6143-4B6F-ADE7-B79DFE0F13CC}" dt="2018-10-24T15:13:31.797" v="10" actId="6549"/>
@@ -292,14 +247,125 @@
           <pc:docMk/>
           <pc:sldMk cId="2856180883" sldId="351"/>
         </pc:sldMkLst>
+      </pc:sldChg>
+    </pc:docChg>
+  </pc:docChgLst>
+  <pc:docChgLst>
+    <pc:chgData name="Xin Zou" userId="260b9726081dae15" providerId="LiveId" clId="{537B9224-E0D6-457C-A405-EB127FDDF888}"/>
+    <pc:docChg chg="custSel addSld modSld">
+      <pc:chgData name="Xin Zou" userId="260b9726081dae15" providerId="LiveId" clId="{537B9224-E0D6-457C-A405-EB127FDDF888}" dt="2025-06-06T07:49:43.347" v="61" actId="20577"/>
+      <pc:docMkLst>
+        <pc:docMk/>
+      </pc:docMkLst>
+      <pc:sldChg chg="addSp delSp modSp new mod modNotesTx">
+        <pc:chgData name="Xin Zou" userId="260b9726081dae15" providerId="LiveId" clId="{537B9224-E0D6-457C-A405-EB127FDDF888}" dt="2025-06-06T07:49:43.347" v="61" actId="20577"/>
+        <pc:sldMkLst>
+          <pc:docMk/>
+          <pc:sldMk cId="2120637123" sldId="438"/>
+        </pc:sldMkLst>
         <pc:spChg chg="mod">
-          <ac:chgData name="Xin Zou" userId="260b9726081dae15" providerId="LiveId" clId="{DEE274BD-6143-4B6F-ADE7-B79DFE0F13CC}" dt="2018-10-24T15:13:31.797" v="10" actId="6549"/>
+          <ac:chgData name="Xin Zou" userId="260b9726081dae15" providerId="LiveId" clId="{537B9224-E0D6-457C-A405-EB127FDDF888}" dt="2025-06-06T07:42:33.291" v="39" actId="5793"/>
           <ac:spMkLst>
             <pc:docMk/>
-            <pc:sldMk cId="2856180883" sldId="351"/>
-            <ac:spMk id="3" creationId="{00000000-0000-0000-0000-000000000000}"/>
+            <pc:sldMk cId="2120637123" sldId="438"/>
+            <ac:spMk id="2" creationId="{0DE63A95-A29C-2178-DAF8-E90E344002A5}"/>
           </ac:spMkLst>
         </pc:spChg>
+        <pc:spChg chg="del">
+          <ac:chgData name="Xin Zou" userId="260b9726081dae15" providerId="LiveId" clId="{537B9224-E0D6-457C-A405-EB127FDDF888}" dt="2025-06-06T07:42:22.505" v="1"/>
+          <ac:spMkLst>
+            <pc:docMk/>
+            <pc:sldMk cId="2120637123" sldId="438"/>
+            <ac:spMk id="3" creationId="{4FC5A640-40CD-F6F0-C9FF-A5DD7939BF62}"/>
+          </ac:spMkLst>
+        </pc:spChg>
+        <pc:picChg chg="add mod">
+          <ac:chgData name="Xin Zou" userId="260b9726081dae15" providerId="LiveId" clId="{537B9224-E0D6-457C-A405-EB127FDDF888}" dt="2025-06-06T07:42:23.805" v="3" actId="962"/>
+          <ac:picMkLst>
+            <pc:docMk/>
+            <pc:sldMk cId="2120637123" sldId="438"/>
+            <ac:picMk id="5" creationId="{97DBD05B-DA90-6912-EAF6-BBCE8A83AA89}"/>
+          </ac:picMkLst>
+        </pc:picChg>
+      </pc:sldChg>
+    </pc:docChg>
+  </pc:docChgLst>
+  <pc:docChgLst>
+    <pc:chgData name="Xin Zou" userId="260b9726081dae15" providerId="LiveId" clId="{D5A9281E-9F08-6548-8C70-E2281F55B560}"/>
+    <pc:docChg chg="custSel addSld modSld">
+      <pc:chgData name="Xin Zou" userId="260b9726081dae15" providerId="LiveId" clId="{D5A9281E-9F08-6548-8C70-E2281F55B560}" dt="2022-08-31T01:45:05.387" v="426" actId="20577"/>
+      <pc:docMkLst>
+        <pc:docMk/>
+      </pc:docMkLst>
+      <pc:sldChg chg="modSp mod">
+        <pc:chgData name="Xin Zou" userId="260b9726081dae15" providerId="LiveId" clId="{D5A9281E-9F08-6548-8C70-E2281F55B560}" dt="2022-08-30T05:57:31.033" v="55" actId="20577"/>
+        <pc:sldMkLst>
+          <pc:docMk/>
+          <pc:sldMk cId="0" sldId="256"/>
+        </pc:sldMkLst>
+      </pc:sldChg>
+      <pc:sldChg chg="modSp mod">
+        <pc:chgData name="Xin Zou" userId="260b9726081dae15" providerId="LiveId" clId="{D5A9281E-9F08-6548-8C70-E2281F55B560}" dt="2022-08-30T05:59:34.912" v="150" actId="20577"/>
+        <pc:sldMkLst>
+          <pc:docMk/>
+          <pc:sldMk cId="3734779282" sldId="265"/>
+        </pc:sldMkLst>
+      </pc:sldChg>
+      <pc:sldChg chg="modSp mod">
+        <pc:chgData name="Xin Zou" userId="260b9726081dae15" providerId="LiveId" clId="{D5A9281E-9F08-6548-8C70-E2281F55B560}" dt="2022-08-30T05:58:20.517" v="64" actId="20577"/>
+        <pc:sldMkLst>
+          <pc:docMk/>
+          <pc:sldMk cId="1580964085" sldId="266"/>
+        </pc:sldMkLst>
+      </pc:sldChg>
+      <pc:sldChg chg="modSp mod">
+        <pc:chgData name="Xin Zou" userId="260b9726081dae15" providerId="LiveId" clId="{D5A9281E-9F08-6548-8C70-E2281F55B560}" dt="2022-08-30T06:00:16.633" v="153" actId="20577"/>
+        <pc:sldMkLst>
+          <pc:docMk/>
+          <pc:sldMk cId="3602450418" sldId="274"/>
+        </pc:sldMkLst>
+      </pc:sldChg>
+      <pc:sldChg chg="modSp mod">
+        <pc:chgData name="Xin Zou" userId="260b9726081dae15" providerId="LiveId" clId="{D5A9281E-9F08-6548-8C70-E2281F55B560}" dt="2022-08-30T06:08:04.357" v="155" actId="404"/>
+        <pc:sldMkLst>
+          <pc:docMk/>
+          <pc:sldMk cId="1448842194" sldId="278"/>
+        </pc:sldMkLst>
+      </pc:sldChg>
+      <pc:sldChg chg="modSp modAnim">
+        <pc:chgData name="Xin Zou" userId="260b9726081dae15" providerId="LiveId" clId="{D5A9281E-9F08-6548-8C70-E2281F55B560}" dt="2022-08-30T06:08:26.471" v="156" actId="20577"/>
+        <pc:sldMkLst>
+          <pc:docMk/>
+          <pc:sldMk cId="486507686" sldId="279"/>
+        </pc:sldMkLst>
+      </pc:sldChg>
+      <pc:sldChg chg="modSp mod">
+        <pc:chgData name="Xin Zou" userId="260b9726081dae15" providerId="LiveId" clId="{D5A9281E-9F08-6548-8C70-E2281F55B560}" dt="2022-08-30T08:08:53.606" v="348" actId="20577"/>
+        <pc:sldMkLst>
+          <pc:docMk/>
+          <pc:sldMk cId="779054329" sldId="282"/>
+        </pc:sldMkLst>
+      </pc:sldChg>
+      <pc:sldChg chg="modSp mod">
+        <pc:chgData name="Xin Zou" userId="260b9726081dae15" providerId="LiveId" clId="{D5A9281E-9F08-6548-8C70-E2281F55B560}" dt="2022-08-30T08:07:20.569" v="197" actId="20577"/>
+        <pc:sldMkLst>
+          <pc:docMk/>
+          <pc:sldMk cId="1999221925" sldId="337"/>
+        </pc:sldMkLst>
+      </pc:sldChg>
+      <pc:sldChg chg="modSp add mod">
+        <pc:chgData name="Xin Zou" userId="260b9726081dae15" providerId="LiveId" clId="{D5A9281E-9F08-6548-8C70-E2281F55B560}" dt="2022-08-31T01:45:05.387" v="426" actId="20577"/>
+        <pc:sldMkLst>
+          <pc:docMk/>
+          <pc:sldMk cId="4277628270" sldId="427"/>
+        </pc:sldMkLst>
+      </pc:sldChg>
+      <pc:sldChg chg="delSp modSp add mod setBg delDesignElem">
+        <pc:chgData name="Xin Zou" userId="260b9726081dae15" providerId="LiveId" clId="{D5A9281E-9F08-6548-8C70-E2281F55B560}" dt="2022-08-31T01:43:56.554" v="364" actId="20577"/>
+        <pc:sldMkLst>
+          <pc:docMk/>
+          <pc:sldMk cId="3929729383" sldId="437"/>
+        </pc:sldMkLst>
       </pc:sldChg>
     </pc:docChg>
   </pc:docChgLst>
@@ -316,22 +382,6 @@
           <pc:docMk/>
           <pc:sldMk cId="0" sldId="256"/>
         </pc:sldMkLst>
-        <pc:spChg chg="mod">
-          <ac:chgData name="Xin Zou" userId="260b9726081dae15" providerId="LiveId" clId="{2908D8BF-1E25-48E2-8C59-157AF534B0FC}" dt="2018-10-06T04:19:46.553" v="364" actId="20577"/>
-          <ac:spMkLst>
-            <pc:docMk/>
-            <pc:sldMk cId="0" sldId="256"/>
-            <ac:spMk id="2" creationId="{00000000-0000-0000-0000-000000000000}"/>
-          </ac:spMkLst>
-        </pc:spChg>
-        <pc:spChg chg="mod">
-          <ac:chgData name="Xin Zou" userId="260b9726081dae15" providerId="LiveId" clId="{2908D8BF-1E25-48E2-8C59-157AF534B0FC}" dt="2018-10-08T05:57:13.571" v="451"/>
-          <ac:spMkLst>
-            <pc:docMk/>
-            <pc:sldMk cId="0" sldId="256"/>
-            <ac:spMk id="3" creationId="{00000000-0000-0000-0000-000000000000}"/>
-          </ac:spMkLst>
-        </pc:spChg>
       </pc:sldChg>
       <pc:sldChg chg="modSp">
         <pc:chgData name="Xin Zou" userId="260b9726081dae15" providerId="LiveId" clId="{2908D8BF-1E25-48E2-8C59-157AF534B0FC}" dt="2018-10-05T03:42:18.547" v="3" actId="27636"/>
@@ -339,14 +389,6 @@
           <pc:docMk/>
           <pc:sldMk cId="3734779282" sldId="265"/>
         </pc:sldMkLst>
-        <pc:spChg chg="mod">
-          <ac:chgData name="Xin Zou" userId="260b9726081dae15" providerId="LiveId" clId="{2908D8BF-1E25-48E2-8C59-157AF534B0FC}" dt="2018-10-05T03:42:18.547" v="3" actId="27636"/>
-          <ac:spMkLst>
-            <pc:docMk/>
-            <pc:sldMk cId="3734779282" sldId="265"/>
-            <ac:spMk id="3" creationId="{00000000-0000-0000-0000-000000000000}"/>
-          </ac:spMkLst>
-        </pc:spChg>
       </pc:sldChg>
       <pc:sldChg chg="modSp">
         <pc:chgData name="Xin Zou" userId="260b9726081dae15" providerId="LiveId" clId="{2908D8BF-1E25-48E2-8C59-157AF534B0FC}" dt="2018-10-05T03:43:54.386" v="50" actId="20577"/>
@@ -354,14 +396,6 @@
           <pc:docMk/>
           <pc:sldMk cId="1580964085" sldId="266"/>
         </pc:sldMkLst>
-        <pc:spChg chg="mod">
-          <ac:chgData name="Xin Zou" userId="260b9726081dae15" providerId="LiveId" clId="{2908D8BF-1E25-48E2-8C59-157AF534B0FC}" dt="2018-10-05T03:43:54.386" v="50" actId="20577"/>
-          <ac:spMkLst>
-            <pc:docMk/>
-            <pc:sldMk cId="1580964085" sldId="266"/>
-            <ac:spMk id="3" creationId="{00000000-0000-0000-0000-000000000000}"/>
-          </ac:spMkLst>
-        </pc:spChg>
       </pc:sldChg>
       <pc:sldChg chg="modSp">
         <pc:chgData name="Xin Zou" userId="260b9726081dae15" providerId="LiveId" clId="{2908D8BF-1E25-48E2-8C59-157AF534B0FC}" dt="2018-10-08T05:47:38.490" v="418" actId="27636"/>
@@ -369,22 +403,6 @@
           <pc:docMk/>
           <pc:sldMk cId="1635746704" sldId="267"/>
         </pc:sldMkLst>
-        <pc:spChg chg="mod">
-          <ac:chgData name="Xin Zou" userId="260b9726081dae15" providerId="LiveId" clId="{2908D8BF-1E25-48E2-8C59-157AF534B0FC}" dt="2018-10-05T03:45:21.388" v="57" actId="20577"/>
-          <ac:spMkLst>
-            <pc:docMk/>
-            <pc:sldMk cId="1635746704" sldId="267"/>
-            <ac:spMk id="2" creationId="{00000000-0000-0000-0000-000000000000}"/>
-          </ac:spMkLst>
-        </pc:spChg>
-        <pc:spChg chg="mod">
-          <ac:chgData name="Xin Zou" userId="260b9726081dae15" providerId="LiveId" clId="{2908D8BF-1E25-48E2-8C59-157AF534B0FC}" dt="2018-10-08T05:47:38.490" v="418" actId="27636"/>
-          <ac:spMkLst>
-            <pc:docMk/>
-            <pc:sldMk cId="1635746704" sldId="267"/>
-            <ac:spMk id="3" creationId="{00000000-0000-0000-0000-000000000000}"/>
-          </ac:spMkLst>
-        </pc:spChg>
       </pc:sldChg>
       <pc:sldChg chg="modSp">
         <pc:chgData name="Xin Zou" userId="260b9726081dae15" providerId="LiveId" clId="{2908D8BF-1E25-48E2-8C59-157AF534B0FC}" dt="2018-10-05T03:45:38.340" v="62"/>
@@ -392,14 +410,6 @@
           <pc:docMk/>
           <pc:sldMk cId="459747832" sldId="268"/>
         </pc:sldMkLst>
-        <pc:spChg chg="mod">
-          <ac:chgData name="Xin Zou" userId="260b9726081dae15" providerId="LiveId" clId="{2908D8BF-1E25-48E2-8C59-157AF534B0FC}" dt="2018-10-05T03:45:38.340" v="62"/>
-          <ac:spMkLst>
-            <pc:docMk/>
-            <pc:sldMk cId="459747832" sldId="268"/>
-            <ac:spMk id="2" creationId="{00000000-0000-0000-0000-000000000000}"/>
-          </ac:spMkLst>
-        </pc:spChg>
       </pc:sldChg>
       <pc:sldChg chg="modSp">
         <pc:chgData name="Xin Zou" userId="260b9726081dae15" providerId="LiveId" clId="{2908D8BF-1E25-48E2-8C59-157AF534B0FC}" dt="2018-10-05T03:42:17.845" v="0"/>
@@ -407,14 +417,6 @@
           <pc:docMk/>
           <pc:sldMk cId="361494511" sldId="269"/>
         </pc:sldMkLst>
-        <pc:picChg chg="mod">
-          <ac:chgData name="Xin Zou" userId="260b9726081dae15" providerId="LiveId" clId="{2908D8BF-1E25-48E2-8C59-157AF534B0FC}" dt="2018-10-05T03:42:17.845" v="0"/>
-          <ac:picMkLst>
-            <pc:docMk/>
-            <pc:sldMk cId="361494511" sldId="269"/>
-            <ac:picMk id="1026" creationId="{00000000-0000-0000-0000-000000000000}"/>
-          </ac:picMkLst>
-        </pc:picChg>
       </pc:sldChg>
       <pc:sldChg chg="modSp">
         <pc:chgData name="Xin Zou" userId="260b9726081dae15" providerId="LiveId" clId="{2908D8BF-1E25-48E2-8C59-157AF534B0FC}" dt="2018-10-05T03:42:17.845" v="0"/>
@@ -422,14 +424,6 @@
           <pc:docMk/>
           <pc:sldMk cId="4213188873" sldId="271"/>
         </pc:sldMkLst>
-        <pc:picChg chg="mod">
-          <ac:chgData name="Xin Zou" userId="260b9726081dae15" providerId="LiveId" clId="{2908D8BF-1E25-48E2-8C59-157AF534B0FC}" dt="2018-10-05T03:42:17.845" v="0"/>
-          <ac:picMkLst>
-            <pc:docMk/>
-            <pc:sldMk cId="4213188873" sldId="271"/>
-            <ac:picMk id="2050" creationId="{00000000-0000-0000-0000-000000000000}"/>
-          </ac:picMkLst>
-        </pc:picChg>
       </pc:sldChg>
       <pc:sldChg chg="modSp">
         <pc:chgData name="Xin Zou" userId="260b9726081dae15" providerId="LiveId" clId="{2908D8BF-1E25-48E2-8C59-157AF534B0FC}" dt="2018-10-08T05:47:38.508" v="419" actId="27636"/>
@@ -437,14 +431,6 @@
           <pc:docMk/>
           <pc:sldMk cId="4191706059" sldId="272"/>
         </pc:sldMkLst>
-        <pc:spChg chg="mod">
-          <ac:chgData name="Xin Zou" userId="260b9726081dae15" providerId="LiveId" clId="{2908D8BF-1E25-48E2-8C59-157AF534B0FC}" dt="2018-10-08T05:47:38.508" v="419" actId="27636"/>
-          <ac:spMkLst>
-            <pc:docMk/>
-            <pc:sldMk cId="4191706059" sldId="272"/>
-            <ac:spMk id="3" creationId="{00000000-0000-0000-0000-000000000000}"/>
-          </ac:spMkLst>
-        </pc:spChg>
       </pc:sldChg>
       <pc:sldChg chg="modSp">
         <pc:chgData name="Xin Zou" userId="260b9726081dae15" providerId="LiveId" clId="{2908D8BF-1E25-48E2-8C59-157AF534B0FC}" dt="2018-10-08T05:47:38.444" v="416" actId="27636"/>
@@ -452,22 +438,6 @@
           <pc:docMk/>
           <pc:sldMk cId="3602450418" sldId="274"/>
         </pc:sldMkLst>
-        <pc:spChg chg="mod">
-          <ac:chgData name="Xin Zou" userId="260b9726081dae15" providerId="LiveId" clId="{2908D8BF-1E25-48E2-8C59-157AF534B0FC}" dt="2018-10-05T03:51:33.019" v="135"/>
-          <ac:spMkLst>
-            <pc:docMk/>
-            <pc:sldMk cId="3602450418" sldId="274"/>
-            <ac:spMk id="2" creationId="{00000000-0000-0000-0000-000000000000}"/>
-          </ac:spMkLst>
-        </pc:spChg>
-        <pc:spChg chg="mod">
-          <ac:chgData name="Xin Zou" userId="260b9726081dae15" providerId="LiveId" clId="{2908D8BF-1E25-48E2-8C59-157AF534B0FC}" dt="2018-10-08T05:47:38.444" v="416" actId="27636"/>
-          <ac:spMkLst>
-            <pc:docMk/>
-            <pc:sldMk cId="3602450418" sldId="274"/>
-            <ac:spMk id="3" creationId="{00000000-0000-0000-0000-000000000000}"/>
-          </ac:spMkLst>
-        </pc:spChg>
       </pc:sldChg>
       <pc:sldChg chg="addSp delSp modSp">
         <pc:chgData name="Xin Zou" userId="260b9726081dae15" providerId="LiveId" clId="{2908D8BF-1E25-48E2-8C59-157AF534B0FC}" dt="2018-10-08T05:48:37.345" v="441" actId="1076"/>
@@ -475,46 +445,6 @@
           <pc:docMk/>
           <pc:sldMk cId="2114977532" sldId="276"/>
         </pc:sldMkLst>
-        <pc:spChg chg="mod">
-          <ac:chgData name="Xin Zou" userId="260b9726081dae15" providerId="LiveId" clId="{2908D8BF-1E25-48E2-8C59-157AF534B0FC}" dt="2018-10-08T05:48:13.304" v="433" actId="27636"/>
-          <ac:spMkLst>
-            <pc:docMk/>
-            <pc:sldMk cId="2114977532" sldId="276"/>
-            <ac:spMk id="2" creationId="{00000000-0000-0000-0000-000000000000}"/>
-          </ac:spMkLst>
-        </pc:spChg>
-        <pc:spChg chg="del mod">
-          <ac:chgData name="Xin Zou" userId="260b9726081dae15" providerId="LiveId" clId="{2908D8BF-1E25-48E2-8C59-157AF534B0FC}" dt="2018-10-08T05:48:16.456" v="434" actId="478"/>
-          <ac:spMkLst>
-            <pc:docMk/>
-            <pc:sldMk cId="2114977532" sldId="276"/>
-            <ac:spMk id="3" creationId="{00000000-0000-0000-0000-000000000000}"/>
-          </ac:spMkLst>
-        </pc:spChg>
-        <pc:picChg chg="mod">
-          <ac:chgData name="Xin Zou" userId="260b9726081dae15" providerId="LiveId" clId="{2908D8BF-1E25-48E2-8C59-157AF534B0FC}" dt="2018-10-08T05:48:23.497" v="436" actId="14100"/>
-          <ac:picMkLst>
-            <pc:docMk/>
-            <pc:sldMk cId="2114977532" sldId="276"/>
-            <ac:picMk id="4" creationId="{00000000-0000-0000-0000-000000000000}"/>
-          </ac:picMkLst>
-        </pc:picChg>
-        <pc:picChg chg="add del">
-          <ac:chgData name="Xin Zou" userId="260b9726081dae15" providerId="LiveId" clId="{2908D8BF-1E25-48E2-8C59-157AF534B0FC}" dt="2018-10-06T04:20:41.494" v="407"/>
-          <ac:picMkLst>
-            <pc:docMk/>
-            <pc:sldMk cId="2114977532" sldId="276"/>
-            <ac:picMk id="1026" creationId="{909D1FB4-7BBD-48F4-91A7-6F6E5712E492}"/>
-          </ac:picMkLst>
-        </pc:picChg>
-        <pc:picChg chg="add mod">
-          <ac:chgData name="Xin Zou" userId="260b9726081dae15" providerId="LiveId" clId="{2908D8BF-1E25-48E2-8C59-157AF534B0FC}" dt="2018-10-08T05:48:37.345" v="441" actId="1076"/>
-          <ac:picMkLst>
-            <pc:docMk/>
-            <pc:sldMk cId="2114977532" sldId="276"/>
-            <ac:picMk id="1028" creationId="{AAD0EA6A-1B7C-45DB-8FC2-BA8984223FD5}"/>
-          </ac:picMkLst>
-        </pc:picChg>
       </pc:sldChg>
       <pc:sldChg chg="modSp">
         <pc:chgData name="Xin Zou" userId="260b9726081dae15" providerId="LiveId" clId="{2908D8BF-1E25-48E2-8C59-157AF534B0FC}" dt="2018-10-05T03:42:17.845" v="0"/>
@@ -522,14 +452,6 @@
           <pc:docMk/>
           <pc:sldMk cId="2432718742" sldId="277"/>
         </pc:sldMkLst>
-        <pc:picChg chg="mod">
-          <ac:chgData name="Xin Zou" userId="260b9726081dae15" providerId="LiveId" clId="{2908D8BF-1E25-48E2-8C59-157AF534B0FC}" dt="2018-10-05T03:42:17.845" v="0"/>
-          <ac:picMkLst>
-            <pc:docMk/>
-            <pc:sldMk cId="2432718742" sldId="277"/>
-            <ac:picMk id="5" creationId="{00000000-0000-0000-0000-000000000000}"/>
-          </ac:picMkLst>
-        </pc:picChg>
       </pc:sldChg>
       <pc:sldChg chg="modSp">
         <pc:chgData name="Xin Zou" userId="260b9726081dae15" providerId="LiveId" clId="{2908D8BF-1E25-48E2-8C59-157AF534B0FC}" dt="2018-10-08T05:47:38.464" v="417" actId="27636"/>
@@ -537,22 +459,6 @@
           <pc:docMk/>
           <pc:sldMk cId="1448842194" sldId="278"/>
         </pc:sldMkLst>
-        <pc:spChg chg="mod">
-          <ac:chgData name="Xin Zou" userId="260b9726081dae15" providerId="LiveId" clId="{2908D8BF-1E25-48E2-8C59-157AF534B0FC}" dt="2018-10-08T05:47:38.464" v="417" actId="27636"/>
-          <ac:spMkLst>
-            <pc:docMk/>
-            <pc:sldMk cId="1448842194" sldId="278"/>
-            <ac:spMk id="3" creationId="{00000000-0000-0000-0000-000000000000}"/>
-          </ac:spMkLst>
-        </pc:spChg>
-        <pc:picChg chg="mod">
-          <ac:chgData name="Xin Zou" userId="260b9726081dae15" providerId="LiveId" clId="{2908D8BF-1E25-48E2-8C59-157AF534B0FC}" dt="2018-10-05T03:42:17.845" v="0"/>
-          <ac:picMkLst>
-            <pc:docMk/>
-            <pc:sldMk cId="1448842194" sldId="278"/>
-            <ac:picMk id="4" creationId="{00000000-0000-0000-0000-000000000000}"/>
-          </ac:picMkLst>
-        </pc:picChg>
       </pc:sldChg>
       <pc:sldChg chg="modSp">
         <pc:chgData name="Xin Zou" userId="260b9726081dae15" providerId="LiveId" clId="{2908D8BF-1E25-48E2-8C59-157AF534B0FC}" dt="2018-10-05T03:42:18.666" v="5" actId="27636"/>
@@ -560,14 +466,6 @@
           <pc:docMk/>
           <pc:sldMk cId="486507686" sldId="279"/>
         </pc:sldMkLst>
-        <pc:spChg chg="mod">
-          <ac:chgData name="Xin Zou" userId="260b9726081dae15" providerId="LiveId" clId="{2908D8BF-1E25-48E2-8C59-157AF534B0FC}" dt="2018-10-05T03:42:18.666" v="5" actId="27636"/>
-          <ac:spMkLst>
-            <pc:docMk/>
-            <pc:sldMk cId="486507686" sldId="279"/>
-            <ac:spMk id="3" creationId="{00000000-0000-0000-0000-000000000000}"/>
-          </ac:spMkLst>
-        </pc:spChg>
       </pc:sldChg>
       <pc:sldChg chg="modSp">
         <pc:chgData name="Xin Zou" userId="260b9726081dae15" providerId="LiveId" clId="{2908D8BF-1E25-48E2-8C59-157AF534B0FC}" dt="2018-10-05T03:42:18.337" v="1" actId="27636"/>
@@ -575,14 +473,6 @@
           <pc:docMk/>
           <pc:sldMk cId="3435014385" sldId="283"/>
         </pc:sldMkLst>
-        <pc:spChg chg="mod">
-          <ac:chgData name="Xin Zou" userId="260b9726081dae15" providerId="LiveId" clId="{2908D8BF-1E25-48E2-8C59-157AF534B0FC}" dt="2018-10-05T03:42:18.337" v="1" actId="27636"/>
-          <ac:spMkLst>
-            <pc:docMk/>
-            <pc:sldMk cId="3435014385" sldId="283"/>
-            <ac:spMk id="3" creationId="{00000000-0000-0000-0000-000000000000}"/>
-          </ac:spMkLst>
-        </pc:spChg>
       </pc:sldChg>
       <pc:sldChg chg="modSp">
         <pc:chgData name="Xin Zou" userId="260b9726081dae15" providerId="LiveId" clId="{2908D8BF-1E25-48E2-8C59-157AF534B0FC}" dt="2018-10-05T03:42:18.502" v="2" actId="27636"/>
@@ -590,14 +480,6 @@
           <pc:docMk/>
           <pc:sldMk cId="1917322977" sldId="285"/>
         </pc:sldMkLst>
-        <pc:spChg chg="mod">
-          <ac:chgData name="Xin Zou" userId="260b9726081dae15" providerId="LiveId" clId="{2908D8BF-1E25-48E2-8C59-157AF534B0FC}" dt="2018-10-05T03:42:18.502" v="2" actId="27636"/>
-          <ac:spMkLst>
-            <pc:docMk/>
-            <pc:sldMk cId="1917322977" sldId="285"/>
-            <ac:spMk id="3" creationId="{00000000-0000-0000-0000-000000000000}"/>
-          </ac:spMkLst>
-        </pc:spChg>
       </pc:sldChg>
       <pc:sldChg chg="modSp">
         <pc:chgData name="Xin Zou" userId="260b9726081dae15" providerId="LiveId" clId="{2908D8BF-1E25-48E2-8C59-157AF534B0FC}" dt="2018-10-05T03:46:01.989" v="81" actId="5793"/>
@@ -605,22 +487,6 @@
           <pc:docMk/>
           <pc:sldMk cId="1650682258" sldId="286"/>
         </pc:sldMkLst>
-        <pc:spChg chg="mod">
-          <ac:chgData name="Xin Zou" userId="260b9726081dae15" providerId="LiveId" clId="{2908D8BF-1E25-48E2-8C59-157AF534B0FC}" dt="2018-10-05T03:46:01.989" v="81" actId="5793"/>
-          <ac:spMkLst>
-            <pc:docMk/>
-            <pc:sldMk cId="1650682258" sldId="286"/>
-            <ac:spMk id="3" creationId="{00000000-0000-0000-0000-000000000000}"/>
-          </ac:spMkLst>
-        </pc:spChg>
-        <pc:picChg chg="mod">
-          <ac:chgData name="Xin Zou" userId="260b9726081dae15" providerId="LiveId" clId="{2908D8BF-1E25-48E2-8C59-157AF534B0FC}" dt="2018-10-05T03:42:17.845" v="0"/>
-          <ac:picMkLst>
-            <pc:docMk/>
-            <pc:sldMk cId="1650682258" sldId="286"/>
-            <ac:picMk id="4" creationId="{00000000-0000-0000-0000-000000000000}"/>
-          </ac:picMkLst>
-        </pc:picChg>
       </pc:sldChg>
       <pc:sldChg chg="modSp">
         <pc:chgData name="Xin Zou" userId="260b9726081dae15" providerId="LiveId" clId="{2908D8BF-1E25-48E2-8C59-157AF534B0FC}" dt="2018-10-08T17:32:14.985" v="462" actId="1076"/>
@@ -628,22 +494,6 @@
           <pc:docMk/>
           <pc:sldMk cId="1972928947" sldId="287"/>
         </pc:sldMkLst>
-        <pc:spChg chg="mod">
-          <ac:chgData name="Xin Zou" userId="260b9726081dae15" providerId="LiveId" clId="{2908D8BF-1E25-48E2-8C59-157AF534B0FC}" dt="2018-10-08T17:32:14.985" v="462" actId="1076"/>
-          <ac:spMkLst>
-            <pc:docMk/>
-            <pc:sldMk cId="1972928947" sldId="287"/>
-            <ac:spMk id="3" creationId="{00000000-0000-0000-0000-000000000000}"/>
-          </ac:spMkLst>
-        </pc:spChg>
-        <pc:picChg chg="mod">
-          <ac:chgData name="Xin Zou" userId="260b9726081dae15" providerId="LiveId" clId="{2908D8BF-1E25-48E2-8C59-157AF534B0FC}" dt="2018-10-05T03:42:17.845" v="0"/>
-          <ac:picMkLst>
-            <pc:docMk/>
-            <pc:sldMk cId="1972928947" sldId="287"/>
-            <ac:picMk id="4" creationId="{00000000-0000-0000-0000-000000000000}"/>
-          </ac:picMkLst>
-        </pc:picChg>
       </pc:sldChg>
       <pc:sldChg chg="modSp">
         <pc:chgData name="Xin Zou" userId="260b9726081dae15" providerId="LiveId" clId="{2908D8BF-1E25-48E2-8C59-157AF534B0FC}" dt="2018-10-05T03:42:17.845" v="0"/>
@@ -651,14 +501,6 @@
           <pc:docMk/>
           <pc:sldMk cId="1770826963" sldId="288"/>
         </pc:sldMkLst>
-        <pc:picChg chg="mod">
-          <ac:chgData name="Xin Zou" userId="260b9726081dae15" providerId="LiveId" clId="{2908D8BF-1E25-48E2-8C59-157AF534B0FC}" dt="2018-10-05T03:42:17.845" v="0"/>
-          <ac:picMkLst>
-            <pc:docMk/>
-            <pc:sldMk cId="1770826963" sldId="288"/>
-            <ac:picMk id="4" creationId="{00000000-0000-0000-0000-000000000000}"/>
-          </ac:picMkLst>
-        </pc:picChg>
       </pc:sldChg>
       <pc:sldChg chg="add">
         <pc:chgData name="Xin Zou" userId="260b9726081dae15" providerId="LiveId" clId="{2908D8BF-1E25-48E2-8C59-157AF534B0FC}" dt="2018-10-08T17:31:57.838" v="452"/>
@@ -687,14 +529,6 @@
           <pc:docMk/>
           <pc:sldMk cId="1437463544" sldId="326"/>
         </pc:sldMkLst>
-        <pc:spChg chg="mod">
-          <ac:chgData name="Xin Zou" userId="260b9726081dae15" providerId="LiveId" clId="{2908D8BF-1E25-48E2-8C59-157AF534B0FC}" dt="2018-10-08T17:31:58.068" v="453" actId="27636"/>
-          <ac:spMkLst>
-            <pc:docMk/>
-            <pc:sldMk cId="1437463544" sldId="326"/>
-            <ac:spMk id="6" creationId="{00000000-0000-0000-0000-000000000000}"/>
-          </ac:spMkLst>
-        </pc:spChg>
       </pc:sldChg>
       <pc:sldChg chg="add">
         <pc:chgData name="Xin Zou" userId="260b9726081dae15" providerId="LiveId" clId="{2908D8BF-1E25-48E2-8C59-157AF534B0FC}" dt="2018-10-08T17:31:57.838" v="452"/>
@@ -709,14 +543,6 @@
           <pc:docMk/>
           <pc:sldMk cId="1132296088" sldId="328"/>
         </pc:sldMkLst>
-        <pc:spChg chg="mod">
-          <ac:chgData name="Xin Zou" userId="260b9726081dae15" providerId="LiveId" clId="{2908D8BF-1E25-48E2-8C59-157AF534B0FC}" dt="2018-10-08T17:31:58.093" v="454" actId="27636"/>
-          <ac:spMkLst>
-            <pc:docMk/>
-            <pc:sldMk cId="1132296088" sldId="328"/>
-            <ac:spMk id="3" creationId="{00000000-0000-0000-0000-000000000000}"/>
-          </ac:spMkLst>
-        </pc:spChg>
       </pc:sldChg>
       <pc:sldChg chg="modSp add">
         <pc:chgData name="Xin Zou" userId="260b9726081dae15" providerId="LiveId" clId="{2908D8BF-1E25-48E2-8C59-157AF534B0FC}" dt="2018-10-08T17:31:58.134" v="455" actId="27636"/>
@@ -724,14 +550,6 @@
           <pc:docMk/>
           <pc:sldMk cId="1478526336" sldId="329"/>
         </pc:sldMkLst>
-        <pc:spChg chg="mod">
-          <ac:chgData name="Xin Zou" userId="260b9726081dae15" providerId="LiveId" clId="{2908D8BF-1E25-48E2-8C59-157AF534B0FC}" dt="2018-10-08T17:31:58.134" v="455" actId="27636"/>
-          <ac:spMkLst>
-            <pc:docMk/>
-            <pc:sldMk cId="1478526336" sldId="329"/>
-            <ac:spMk id="3" creationId="{00000000-0000-0000-0000-000000000000}"/>
-          </ac:spMkLst>
-        </pc:spChg>
       </pc:sldChg>
       <pc:sldChg chg="add">
         <pc:chgData name="Xin Zou" userId="260b9726081dae15" providerId="LiveId" clId="{2908D8BF-1E25-48E2-8C59-157AF534B0FC}" dt="2018-10-08T17:31:57.838" v="452"/>
@@ -746,14 +564,6 @@
           <pc:docMk/>
           <pc:sldMk cId="2016910119" sldId="331"/>
         </pc:sldMkLst>
-        <pc:spChg chg="mod">
-          <ac:chgData name="Xin Zou" userId="260b9726081dae15" providerId="LiveId" clId="{2908D8BF-1E25-48E2-8C59-157AF534B0FC}" dt="2018-10-08T17:31:58.214" v="457" actId="27636"/>
-          <ac:spMkLst>
-            <pc:docMk/>
-            <pc:sldMk cId="2016910119" sldId="331"/>
-            <ac:spMk id="3" creationId="{00000000-0000-0000-0000-000000000000}"/>
-          </ac:spMkLst>
-        </pc:spChg>
       </pc:sldChg>
       <pc:sldChg chg="add">
         <pc:chgData name="Xin Zou" userId="260b9726081dae15" providerId="LiveId" clId="{2908D8BF-1E25-48E2-8C59-157AF534B0FC}" dt="2018-10-08T17:31:57.838" v="452"/>
@@ -768,14 +578,6 @@
           <pc:docMk/>
           <pc:sldMk cId="240750047" sldId="333"/>
         </pc:sldMkLst>
-        <pc:spChg chg="mod">
-          <ac:chgData name="Xin Zou" userId="260b9726081dae15" providerId="LiveId" clId="{2908D8BF-1E25-48E2-8C59-157AF534B0FC}" dt="2018-10-08T17:31:58.150" v="456" actId="27636"/>
-          <ac:spMkLst>
-            <pc:docMk/>
-            <pc:sldMk cId="240750047" sldId="333"/>
-            <ac:spMk id="3" creationId="{00000000-0000-0000-0000-000000000000}"/>
-          </ac:spMkLst>
-        </pc:spChg>
       </pc:sldChg>
       <pc:sldChg chg="add">
         <pc:chgData name="Xin Zou" userId="260b9726081dae15" providerId="LiveId" clId="{2908D8BF-1E25-48E2-8C59-157AF534B0FC}" dt="2018-10-08T17:31:57.838" v="452"/>
@@ -790,14 +592,6 @@
           <pc:docMk/>
           <pc:sldMk cId="3666095403" sldId="335"/>
         </pc:sldMkLst>
-        <pc:spChg chg="mod">
-          <ac:chgData name="Xin Zou" userId="260b9726081dae15" providerId="LiveId" clId="{2908D8BF-1E25-48E2-8C59-157AF534B0FC}" dt="2018-10-08T17:31:58.255" v="458" actId="27636"/>
-          <ac:spMkLst>
-            <pc:docMk/>
-            <pc:sldMk cId="3666095403" sldId="335"/>
-            <ac:spMk id="3" creationId="{00000000-0000-0000-0000-000000000000}"/>
-          </ac:spMkLst>
-        </pc:spChg>
       </pc:sldChg>
       <pc:sldChg chg="add">
         <pc:chgData name="Xin Zou" userId="260b9726081dae15" providerId="LiveId" clId="{2908D8BF-1E25-48E2-8C59-157AF534B0FC}" dt="2018-10-06T05:17:55.764" v="413"/>
@@ -868,14 +662,6 @@
           <pc:docMk/>
           <pc:sldMk cId="2203527375" sldId="350"/>
         </pc:sldMkLst>
-        <pc:spChg chg="mod">
-          <ac:chgData name="Xin Zou" userId="260b9726081dae15" providerId="LiveId" clId="{2908D8BF-1E25-48E2-8C59-157AF534B0FC}" dt="2018-10-08T17:31:58.282" v="459" actId="27636"/>
-          <ac:spMkLst>
-            <pc:docMk/>
-            <pc:sldMk cId="2203527375" sldId="350"/>
-            <ac:spMk id="3" creationId="{00000000-0000-0000-0000-000000000000}"/>
-          </ac:spMkLst>
-        </pc:spChg>
       </pc:sldChg>
       <pc:sldChg chg="modSp add">
         <pc:chgData name="Xin Zou" userId="260b9726081dae15" providerId="LiveId" clId="{2908D8BF-1E25-48E2-8C59-157AF534B0FC}" dt="2018-10-08T17:31:58.305" v="460" actId="27636"/>
@@ -883,14 +669,6 @@
           <pc:docMk/>
           <pc:sldMk cId="2856180883" sldId="351"/>
         </pc:sldMkLst>
-        <pc:spChg chg="mod">
-          <ac:chgData name="Xin Zou" userId="260b9726081dae15" providerId="LiveId" clId="{2908D8BF-1E25-48E2-8C59-157AF534B0FC}" dt="2018-10-08T17:31:58.305" v="460" actId="27636"/>
-          <ac:spMkLst>
-            <pc:docMk/>
-            <pc:sldMk cId="2856180883" sldId="351"/>
-            <ac:spMk id="3" creationId="{00000000-0000-0000-0000-000000000000}"/>
-          </ac:spMkLst>
-        </pc:spChg>
       </pc:sldChg>
       <pc:sldChg chg="add">
         <pc:chgData name="Xin Zou" userId="260b9726081dae15" providerId="LiveId" clId="{2908D8BF-1E25-48E2-8C59-157AF534B0FC}" dt="2018-10-08T05:47:33.145" v="414"/>
@@ -5318,7 +5096,7 @@
           <a:p>
             <a:fld id="{D936C36B-0FF0-48C8-A5FE-A8F1A0E43C02}" type="datetimeFigureOut">
               <a:rPr lang="en-US" smtClean="0"/>
-              <a:t>9/4/2019</a:t>
+              <a:t>6/6/2025</a:t>
             </a:fld>
             <a:endParaRPr lang="en-US"/>
           </a:p>
@@ -5650,7 +5428,7 @@
           <a:p>
             <a:fld id="{6EB7EF2B-259C-44C7-8293-47B66B2B973A}" type="slidenum">
               <a:rPr lang="en-US" smtClean="0"/>
-              <a:t>6</a:t>
+              <a:t>1</a:t>
             </a:fld>
             <a:endParaRPr lang="en-US"/>
           </a:p>
@@ -5659,7 +5437,7 @@
     </p:spTree>
     <p:extLst>
       <p:ext uri="{BB962C8B-B14F-4D97-AF65-F5344CB8AC3E}">
-        <p14:creationId xmlns:p14="http://schemas.microsoft.com/office/powerpoint/2010/main" val="518887749"/>
+        <p14:creationId xmlns:p14="http://schemas.microsoft.com/office/powerpoint/2010/main" val="373316661"/>
       </p:ext>
     </p:extLst>
   </p:cSld>
@@ -5688,7 +5466,7 @@
       </p:grpSpPr>
       <p:sp>
         <p:nvSpPr>
-          <p:cNvPr id="2" name="幻灯片图像占位符 1"/>
+          <p:cNvPr id="2" name="Slide Image Placeholder 1"/>
           <p:cNvSpPr>
             <a:spLocks noGrp="1" noRot="1" noChangeAspect="1"/>
           </p:cNvSpPr>
@@ -5696,16 +5474,11 @@
             <p:ph type="sldImg"/>
           </p:nvPr>
         </p:nvSpPr>
-        <p:spPr>
-          <a:xfrm>
-            <a:off x="381000" y="685800"/>
-            <a:ext cx="6096000" cy="3429000"/>
-          </a:xfrm>
-        </p:spPr>
-      </p:sp>
-      <p:sp>
-        <p:nvSpPr>
-          <p:cNvPr id="3" name="备注占位符 2"/>
+        <p:spPr/>
+      </p:sp>
+      <p:sp>
+        <p:nvSpPr>
+          <p:cNvPr id="3" name="Notes Placeholder 2"/>
           <p:cNvSpPr>
             <a:spLocks noGrp="1"/>
           </p:cNvSpPr>
@@ -5718,87 +5491,18 @@
           <a:bodyPr/>
           <a:lstStyle/>
           <a:p>
-            <a:pPr eaLnBrk="0" hangingPunct="0"/>
-            <a:r>
-              <a:rPr lang="zh-CN" altLang="en-US" sz="1200" kern="1200" dirty="0">
-                <a:solidFill>
-                  <a:schemeClr val="tx1"/>
-                </a:solidFill>
-                <a:effectLst/>
-                <a:latin typeface="+mn-lt"/>
-                <a:ea typeface="+mn-ea"/>
-                <a:cs typeface="+mn-cs"/>
-              </a:rPr>
-              <a:t>专家对爵士乐代表人物的评价：</a:t>
-            </a:r>
-            <a:r>
-              <a:rPr lang="en-US" sz="1200" kern="1200" dirty="0">
-                <a:solidFill>
-                  <a:schemeClr val="tx1"/>
-                </a:solidFill>
-                <a:effectLst/>
-                <a:latin typeface="+mn-lt"/>
-                <a:ea typeface="+mn-ea"/>
-                <a:cs typeface="+mn-cs"/>
-              </a:rPr>
-              <a:t> </a:t>
-            </a:r>
-          </a:p>
-          <a:p>
-            <a:pPr eaLnBrk="0" hangingPunct="0"/>
-            <a:r>
-              <a:rPr lang="en-US" sz="1200" kern="1200" dirty="0">
-                <a:solidFill>
-                  <a:schemeClr val="tx1"/>
-                </a:solidFill>
-                <a:effectLst/>
-                <a:latin typeface="+mn-lt"/>
-                <a:ea typeface="+mn-ea"/>
-                <a:cs typeface="+mn-cs"/>
-              </a:rPr>
-              <a:t>individual expression, emphatic interaction, and creative response to shifting contents. </a:t>
-            </a:r>
-          </a:p>
-          <a:p>
-            <a:pPr eaLnBrk="0" hangingPunct="0"/>
-            <a:r>
-              <a:rPr lang="zh-CN" altLang="en-US" sz="1200" kern="1200" dirty="0">
-                <a:solidFill>
-                  <a:schemeClr val="tx1"/>
-                </a:solidFill>
-                <a:effectLst/>
-                <a:latin typeface="+mn-lt"/>
-                <a:ea typeface="+mn-ea"/>
-                <a:cs typeface="+mn-cs"/>
-              </a:rPr>
-              <a:t>强调个性化的表达，强有力的互动，对变化的内容有创意的回应。</a:t>
-            </a:r>
-            <a:endParaRPr lang="en-US" sz="1200" kern="1200" dirty="0">
-              <a:solidFill>
-                <a:schemeClr val="tx1"/>
-              </a:solidFill>
-              <a:effectLst/>
-              <a:latin typeface="+mn-lt"/>
-              <a:ea typeface="+mn-ea"/>
-              <a:cs typeface="+mn-cs"/>
-            </a:endParaRPr>
-          </a:p>
-          <a:p>
             <a:endParaRPr lang="en-US" dirty="0"/>
           </a:p>
-          <a:p>
-            <a:endParaRPr lang="en-US" dirty="0"/>
-          </a:p>
-        </p:txBody>
-      </p:sp>
-      <p:sp>
-        <p:nvSpPr>
-          <p:cNvPr id="4" name="灯片编号占位符 3"/>
+        </p:txBody>
+      </p:sp>
+      <p:sp>
+        <p:nvSpPr>
+          <p:cNvPr id="4" name="Slide Number Placeholder 3"/>
           <p:cNvSpPr>
             <a:spLocks noGrp="1"/>
           </p:cNvSpPr>
           <p:nvPr>
-            <p:ph type="sldNum" sz="quarter" idx="10"/>
+            <p:ph type="sldNum" sz="quarter" idx="5"/>
           </p:nvPr>
         </p:nvSpPr>
         <p:spPr/>
@@ -5808,7 +5512,7 @@
           <a:p>
             <a:fld id="{6EB7EF2B-259C-44C7-8293-47B66B2B973A}" type="slidenum">
               <a:rPr lang="en-US" smtClean="0"/>
-              <a:t>13</a:t>
+              <a:t>8</a:t>
             </a:fld>
             <a:endParaRPr lang="en-US"/>
           </a:p>
@@ -5817,7 +5521,7 @@
     </p:spTree>
     <p:extLst>
       <p:ext uri="{BB962C8B-B14F-4D97-AF65-F5344CB8AC3E}">
-        <p14:creationId xmlns:p14="http://schemas.microsoft.com/office/powerpoint/2010/main" val="1824389468"/>
+        <p14:creationId xmlns:p14="http://schemas.microsoft.com/office/powerpoint/2010/main" val="518887749"/>
       </p:ext>
     </p:extLst>
   </p:cSld>
@@ -5854,12 +5558,7 @@
             <p:ph type="sldImg"/>
           </p:nvPr>
         </p:nvSpPr>
-        <p:spPr>
-          <a:xfrm>
-            <a:off x="381000" y="685800"/>
-            <a:ext cx="6096000" cy="3429000"/>
-          </a:xfrm>
-        </p:spPr>
+        <p:spPr/>
       </p:sp>
       <p:sp>
         <p:nvSpPr>
@@ -5878,9 +5577,8 @@
           <a:p>
             <a:r>
               <a:rPr lang="zh-CN" altLang="en-US" dirty="0"/>
-              <a:t>这个乐手在哪一个乐器上达到 “精通”？ 他的音乐除了有趣之外，还有别的价值么？</a:t>
-            </a:r>
-            <a:endParaRPr lang="en-US" dirty="0"/>
+              <a:t>来自：李云</a:t>
+            </a:r>
           </a:p>
         </p:txBody>
       </p:sp>
@@ -5891,7 +5589,7 @@
             <a:spLocks noGrp="1"/>
           </p:cNvSpPr>
           <p:nvPr>
-            <p:ph type="sldNum" sz="quarter" idx="10"/>
+            <p:ph type="sldNum" sz="quarter" idx="5"/>
           </p:nvPr>
         </p:nvSpPr>
         <p:spPr/>
@@ -5901,7 +5599,7 @@
           <a:p>
             <a:fld id="{6EB7EF2B-259C-44C7-8293-47B66B2B973A}" type="slidenum">
               <a:rPr lang="en-US" smtClean="0"/>
-              <a:t>14</a:t>
+              <a:t>11</a:t>
             </a:fld>
             <a:endParaRPr lang="en-US"/>
           </a:p>
@@ -5910,7 +5608,7 @@
     </p:spTree>
     <p:extLst>
       <p:ext uri="{BB962C8B-B14F-4D97-AF65-F5344CB8AC3E}">
-        <p14:creationId xmlns:p14="http://schemas.microsoft.com/office/powerpoint/2010/main" val="2072861361"/>
+        <p14:creationId xmlns:p14="http://schemas.microsoft.com/office/powerpoint/2010/main" val="1429986146"/>
       </p:ext>
     </p:extLst>
   </p:cSld>
@@ -5969,7 +5667,76 @@
           <a:bodyPr/>
           <a:lstStyle/>
           <a:p>
-            <a:endParaRPr lang="en-US"/>
+            <a:pPr eaLnBrk="0" hangingPunct="0"/>
+            <a:r>
+              <a:rPr lang="zh-CN" altLang="en-US" sz="1200" kern="1200" dirty="0">
+                <a:solidFill>
+                  <a:schemeClr val="tx1"/>
+                </a:solidFill>
+                <a:effectLst/>
+                <a:latin typeface="+mn-lt"/>
+                <a:ea typeface="+mn-ea"/>
+                <a:cs typeface="+mn-cs"/>
+              </a:rPr>
+              <a:t>专家对爵士乐代表人物的评价：</a:t>
+            </a:r>
+            <a:r>
+              <a:rPr lang="en-US" sz="1200" kern="1200" dirty="0">
+                <a:solidFill>
+                  <a:schemeClr val="tx1"/>
+                </a:solidFill>
+                <a:effectLst/>
+                <a:latin typeface="+mn-lt"/>
+                <a:ea typeface="+mn-ea"/>
+                <a:cs typeface="+mn-cs"/>
+              </a:rPr>
+              <a:t> </a:t>
+            </a:r>
+          </a:p>
+          <a:p>
+            <a:pPr eaLnBrk="0" hangingPunct="0"/>
+            <a:r>
+              <a:rPr lang="en-US" sz="1200" kern="1200" dirty="0">
+                <a:solidFill>
+                  <a:schemeClr val="tx1"/>
+                </a:solidFill>
+                <a:effectLst/>
+                <a:latin typeface="+mn-lt"/>
+                <a:ea typeface="+mn-ea"/>
+                <a:cs typeface="+mn-cs"/>
+              </a:rPr>
+              <a:t>individual expression, emphatic interaction, and creative response to shifting contents. </a:t>
+            </a:r>
+          </a:p>
+          <a:p>
+            <a:pPr eaLnBrk="0" hangingPunct="0"/>
+            <a:r>
+              <a:rPr lang="zh-CN" altLang="en-US" sz="1200" kern="1200" dirty="0">
+                <a:solidFill>
+                  <a:schemeClr val="tx1"/>
+                </a:solidFill>
+                <a:effectLst/>
+                <a:latin typeface="+mn-lt"/>
+                <a:ea typeface="+mn-ea"/>
+                <a:cs typeface="+mn-cs"/>
+              </a:rPr>
+              <a:t>强调个性化的表达，强有力的互动，对变化的内容有创意的回应。</a:t>
+            </a:r>
+            <a:endParaRPr lang="en-US" sz="1200" kern="1200" dirty="0">
+              <a:solidFill>
+                <a:schemeClr val="tx1"/>
+              </a:solidFill>
+              <a:effectLst/>
+              <a:latin typeface="+mn-lt"/>
+              <a:ea typeface="+mn-ea"/>
+              <a:cs typeface="+mn-cs"/>
+            </a:endParaRPr>
+          </a:p>
+          <a:p>
+            <a:endParaRPr lang="en-US" dirty="0"/>
+          </a:p>
+          <a:p>
+            <a:endParaRPr lang="en-US" dirty="0"/>
           </a:p>
         </p:txBody>
       </p:sp>
@@ -5990,7 +5757,7 @@
           <a:p>
             <a:fld id="{6EB7EF2B-259C-44C7-8293-47B66B2B973A}" type="slidenum">
               <a:rPr lang="en-US" smtClean="0"/>
-              <a:t>18</a:t>
+              <a:t>16</a:t>
             </a:fld>
             <a:endParaRPr lang="en-US"/>
           </a:p>
@@ -5999,7 +5766,7 @@
     </p:spTree>
     <p:extLst>
       <p:ext uri="{BB962C8B-B14F-4D97-AF65-F5344CB8AC3E}">
-        <p14:creationId xmlns:p14="http://schemas.microsoft.com/office/powerpoint/2010/main" val="212999227"/>
+        <p14:creationId xmlns:p14="http://schemas.microsoft.com/office/powerpoint/2010/main" val="1824389468"/>
       </p:ext>
     </p:extLst>
   </p:cSld>
@@ -6028,7 +5795,7 @@
       </p:grpSpPr>
       <p:sp>
         <p:nvSpPr>
-          <p:cNvPr id="2" name="Slide Image Placeholder 1"/>
+          <p:cNvPr id="2" name="幻灯片图像占位符 1"/>
           <p:cNvSpPr>
             <a:spLocks noGrp="1" noRot="1" noChangeAspect="1"/>
           </p:cNvSpPr>
@@ -6045,7 +5812,7 @@
       </p:sp>
       <p:sp>
         <p:nvSpPr>
-          <p:cNvPr id="3" name="Notes Placeholder 2"/>
+          <p:cNvPr id="3" name="备注占位符 2"/>
           <p:cNvSpPr>
             <a:spLocks noGrp="1"/>
           </p:cNvSpPr>
@@ -6059,30 +5826,16 @@
           <a:lstStyle/>
           <a:p>
             <a:r>
-              <a:rPr lang="en-US" dirty="0"/>
-              <a:t>Entry - is the standard expected of employees on entry into a role. This is often used when the new entrant must learn or be trained to be able to perform to the standards required within the role / job.</a:t>
-            </a:r>
-          </a:p>
-          <a:p>
-            <a:r>
-              <a:rPr lang="en-US" dirty="0"/>
-              <a:t>Fully Effective - is level required of employees who are performing at the standard expected for their role / job.</a:t>
-            </a:r>
-          </a:p>
-          <a:p>
-            <a:r>
-              <a:rPr lang="en-US" dirty="0"/>
-              <a:t>Stretch / Mastery - is typically displayed by employees who have mastered their job / role. These employees are often sought out by other employees and managers / supervisors to provide advice / assistance.</a:t>
-            </a:r>
-          </a:p>
-          <a:p>
+              <a:rPr lang="zh-CN" altLang="en-US" dirty="0"/>
+              <a:t>这个乐手在哪一个乐器上达到 “精通”？ 他的音乐除了有趣之外，还有别的价值么？</a:t>
+            </a:r>
             <a:endParaRPr lang="en-US" dirty="0"/>
           </a:p>
         </p:txBody>
       </p:sp>
       <p:sp>
         <p:nvSpPr>
-          <p:cNvPr id="4" name="Slide Number Placeholder 3"/>
+          <p:cNvPr id="4" name="灯片编号占位符 3"/>
           <p:cNvSpPr>
             <a:spLocks noGrp="1"/>
           </p:cNvSpPr>
@@ -6097,7 +5850,7 @@
           <a:p>
             <a:fld id="{6EB7EF2B-259C-44C7-8293-47B66B2B973A}" type="slidenum">
               <a:rPr lang="en-US" smtClean="0"/>
-              <a:t>21</a:t>
+              <a:t>17</a:t>
             </a:fld>
             <a:endParaRPr lang="en-US"/>
           </a:p>
@@ -6106,7 +5859,7 @@
     </p:spTree>
     <p:extLst>
       <p:ext uri="{BB962C8B-B14F-4D97-AF65-F5344CB8AC3E}">
-        <p14:creationId xmlns:p14="http://schemas.microsoft.com/office/powerpoint/2010/main" val="51412415"/>
+        <p14:creationId xmlns:p14="http://schemas.microsoft.com/office/powerpoint/2010/main" val="2072861361"/>
       </p:ext>
     </p:extLst>
   </p:cSld>
@@ -6135,7 +5888,7 @@
       </p:grpSpPr>
       <p:sp>
         <p:nvSpPr>
-          <p:cNvPr id="2" name="Slide Image Placeholder 1"/>
+          <p:cNvPr id="2" name="幻灯片图像占位符 1"/>
           <p:cNvSpPr>
             <a:spLocks noGrp="1" noRot="1" noChangeAspect="1"/>
           </p:cNvSpPr>
@@ -6143,11 +5896,16 @@
             <p:ph type="sldImg"/>
           </p:nvPr>
         </p:nvSpPr>
-        <p:spPr/>
-      </p:sp>
-      <p:sp>
-        <p:nvSpPr>
-          <p:cNvPr id="3" name="Notes Placeholder 2"/>
+        <p:spPr>
+          <a:xfrm>
+            <a:off x="381000" y="685800"/>
+            <a:ext cx="6096000" cy="3429000"/>
+          </a:xfrm>
+        </p:spPr>
+      </p:sp>
+      <p:sp>
+        <p:nvSpPr>
+          <p:cNvPr id="3" name="备注占位符 2"/>
           <p:cNvSpPr>
             <a:spLocks noGrp="1"/>
           </p:cNvSpPr>
@@ -6160,18 +5918,18 @@
           <a:bodyPr/>
           <a:lstStyle/>
           <a:p>
-            <a:endParaRPr lang="en-US" dirty="0"/>
-          </a:p>
-        </p:txBody>
-      </p:sp>
-      <p:sp>
-        <p:nvSpPr>
-          <p:cNvPr id="4" name="Slide Number Placeholder 3"/>
+            <a:endParaRPr lang="en-US"/>
+          </a:p>
+        </p:txBody>
+      </p:sp>
+      <p:sp>
+        <p:nvSpPr>
+          <p:cNvPr id="4" name="灯片编号占位符 3"/>
           <p:cNvSpPr>
             <a:spLocks noGrp="1"/>
           </p:cNvSpPr>
           <p:nvPr>
-            <p:ph type="sldNum" sz="quarter" idx="5"/>
+            <p:ph type="sldNum" sz="quarter" idx="10"/>
           </p:nvPr>
         </p:nvSpPr>
         <p:spPr/>
@@ -6181,7 +5939,198 @@
           <a:p>
             <a:fld id="{6EB7EF2B-259C-44C7-8293-47B66B2B973A}" type="slidenum">
               <a:rPr lang="en-US" smtClean="0"/>
-              <a:t>49</a:t>
+              <a:t>21</a:t>
+            </a:fld>
+            <a:endParaRPr lang="en-US"/>
+          </a:p>
+        </p:txBody>
+      </p:sp>
+    </p:spTree>
+    <p:extLst>
+      <p:ext uri="{BB962C8B-B14F-4D97-AF65-F5344CB8AC3E}">
+        <p14:creationId xmlns:p14="http://schemas.microsoft.com/office/powerpoint/2010/main" val="212999227"/>
+      </p:ext>
+    </p:extLst>
+  </p:cSld>
+  <p:clrMapOvr>
+    <a:masterClrMapping/>
+  </p:clrMapOvr>
+</p:notes>
+</file>
+
+<file path=ppt/notesSlides/notesSlide7.xml><?xml version="1.0" encoding="utf-8"?>
+<p:notes xmlns:a="http://schemas.openxmlformats.org/drawingml/2006/main" xmlns:r="http://schemas.openxmlformats.org/officeDocument/2006/relationships" xmlns:p="http://schemas.openxmlformats.org/presentationml/2006/main">
+  <p:cSld>
+    <p:spTree>
+      <p:nvGrpSpPr>
+        <p:cNvPr id="1" name=""/>
+        <p:cNvGrpSpPr/>
+        <p:nvPr/>
+      </p:nvGrpSpPr>
+      <p:grpSpPr>
+        <a:xfrm>
+          <a:off x="0" y="0"/>
+          <a:ext cx="0" cy="0"/>
+          <a:chOff x="0" y="0"/>
+          <a:chExt cx="0" cy="0"/>
+        </a:xfrm>
+      </p:grpSpPr>
+      <p:sp>
+        <p:nvSpPr>
+          <p:cNvPr id="2" name="Slide Image Placeholder 1"/>
+          <p:cNvSpPr>
+            <a:spLocks noGrp="1" noRot="1" noChangeAspect="1"/>
+          </p:cNvSpPr>
+          <p:nvPr>
+            <p:ph type="sldImg"/>
+          </p:nvPr>
+        </p:nvSpPr>
+        <p:spPr>
+          <a:xfrm>
+            <a:off x="381000" y="685800"/>
+            <a:ext cx="6096000" cy="3429000"/>
+          </a:xfrm>
+        </p:spPr>
+      </p:sp>
+      <p:sp>
+        <p:nvSpPr>
+          <p:cNvPr id="3" name="Notes Placeholder 2"/>
+          <p:cNvSpPr>
+            <a:spLocks noGrp="1"/>
+          </p:cNvSpPr>
+          <p:nvPr>
+            <p:ph type="body" idx="1"/>
+          </p:nvPr>
+        </p:nvSpPr>
+        <p:spPr/>
+        <p:txBody>
+          <a:bodyPr/>
+          <a:lstStyle/>
+          <a:p>
+            <a:r>
+              <a:rPr lang="en-US" dirty="0"/>
+              <a:t>Entry - is the standard expected of employees on entry into a role. This is often used when the new entrant must learn or be trained to be able to perform to the standards required within the role / job.</a:t>
+            </a:r>
+          </a:p>
+          <a:p>
+            <a:r>
+              <a:rPr lang="en-US" dirty="0"/>
+              <a:t>Fully Effective - is level required of employees who are performing at the standard expected for their role / job.</a:t>
+            </a:r>
+          </a:p>
+          <a:p>
+            <a:r>
+              <a:rPr lang="en-US" dirty="0"/>
+              <a:t>Stretch / Mastery - is typically displayed by employees who have mastered their job / role. These employees are often sought out by other employees and managers / supervisors to provide advice / assistance.</a:t>
+            </a:r>
+          </a:p>
+          <a:p>
+            <a:endParaRPr lang="en-US" dirty="0"/>
+          </a:p>
+        </p:txBody>
+      </p:sp>
+      <p:sp>
+        <p:nvSpPr>
+          <p:cNvPr id="4" name="Slide Number Placeholder 3"/>
+          <p:cNvSpPr>
+            <a:spLocks noGrp="1"/>
+          </p:cNvSpPr>
+          <p:nvPr>
+            <p:ph type="sldNum" sz="quarter" idx="10"/>
+          </p:nvPr>
+        </p:nvSpPr>
+        <p:spPr/>
+        <p:txBody>
+          <a:bodyPr/>
+          <a:lstStyle/>
+          <a:p>
+            <a:fld id="{6EB7EF2B-259C-44C7-8293-47B66B2B973A}" type="slidenum">
+              <a:rPr lang="en-US" smtClean="0"/>
+              <a:t>24</a:t>
+            </a:fld>
+            <a:endParaRPr lang="en-US"/>
+          </a:p>
+        </p:txBody>
+      </p:sp>
+    </p:spTree>
+    <p:extLst>
+      <p:ext uri="{BB962C8B-B14F-4D97-AF65-F5344CB8AC3E}">
+        <p14:creationId xmlns:p14="http://schemas.microsoft.com/office/powerpoint/2010/main" val="51412415"/>
+      </p:ext>
+    </p:extLst>
+  </p:cSld>
+  <p:clrMapOvr>
+    <a:masterClrMapping/>
+  </p:clrMapOvr>
+</p:notes>
+</file>
+
+<file path=ppt/notesSlides/notesSlide8.xml><?xml version="1.0" encoding="utf-8"?>
+<p:notes xmlns:a="http://schemas.openxmlformats.org/drawingml/2006/main" xmlns:r="http://schemas.openxmlformats.org/officeDocument/2006/relationships" xmlns:p="http://schemas.openxmlformats.org/presentationml/2006/main">
+  <p:cSld>
+    <p:spTree>
+      <p:nvGrpSpPr>
+        <p:cNvPr id="1" name=""/>
+        <p:cNvGrpSpPr/>
+        <p:nvPr/>
+      </p:nvGrpSpPr>
+      <p:grpSpPr>
+        <a:xfrm>
+          <a:off x="0" y="0"/>
+          <a:ext cx="0" cy="0"/>
+          <a:chOff x="0" y="0"/>
+          <a:chExt cx="0" cy="0"/>
+        </a:xfrm>
+      </p:grpSpPr>
+      <p:sp>
+        <p:nvSpPr>
+          <p:cNvPr id="2" name="Slide Image Placeholder 1"/>
+          <p:cNvSpPr>
+            <a:spLocks noGrp="1" noRot="1" noChangeAspect="1"/>
+          </p:cNvSpPr>
+          <p:nvPr>
+            <p:ph type="sldImg"/>
+          </p:nvPr>
+        </p:nvSpPr>
+        <p:spPr/>
+      </p:sp>
+      <p:sp>
+        <p:nvSpPr>
+          <p:cNvPr id="3" name="Notes Placeholder 2"/>
+          <p:cNvSpPr>
+            <a:spLocks noGrp="1"/>
+          </p:cNvSpPr>
+          <p:nvPr>
+            <p:ph type="body" idx="1"/>
+          </p:nvPr>
+        </p:nvSpPr>
+        <p:spPr/>
+        <p:txBody>
+          <a:bodyPr/>
+          <a:lstStyle/>
+          <a:p>
+            <a:endParaRPr lang="en-US" dirty="0"/>
+          </a:p>
+        </p:txBody>
+      </p:sp>
+      <p:sp>
+        <p:nvSpPr>
+          <p:cNvPr id="4" name="Slide Number Placeholder 3"/>
+          <p:cNvSpPr>
+            <a:spLocks noGrp="1"/>
+          </p:cNvSpPr>
+          <p:nvPr>
+            <p:ph type="sldNum" sz="quarter" idx="5"/>
+          </p:nvPr>
+        </p:nvSpPr>
+        <p:spPr/>
+        <p:txBody>
+          <a:bodyPr/>
+          <a:lstStyle/>
+          <a:p>
+            <a:fld id="{6EB7EF2B-259C-44C7-8293-47B66B2B973A}" type="slidenum">
+              <a:rPr lang="en-US" smtClean="0"/>
+              <a:t>52</a:t>
             </a:fld>
             <a:endParaRPr lang="en-US"/>
           </a:p>
@@ -6396,7 +6345,7 @@
           <a:p>
             <a:fld id="{48A87A34-81AB-432B-8DAE-1953F412C126}" type="datetimeFigureOut">
               <a:rPr lang="en-US" smtClean="0"/>
-              <a:t>9/4/2019</a:t>
+              <a:t>6/6/2025</a:t>
             </a:fld>
             <a:endParaRPr lang="en-US" dirty="0"/>
           </a:p>
@@ -6678,7 +6627,7 @@
             <a:fld id="{48A87A34-81AB-432B-8DAE-1953F412C126}" type="datetimeFigureOut">
               <a:rPr lang="en-US" smtClean="0"/>
               <a:pPr/>
-              <a:t>9/4/2019</a:t>
+              <a:t>6/6/2025</a:t>
             </a:fld>
             <a:endParaRPr lang="en-US" dirty="0"/>
           </a:p>
@@ -6872,7 +6821,7 @@
             <a:fld id="{48A87A34-81AB-432B-8DAE-1953F412C126}" type="datetimeFigureOut">
               <a:rPr lang="en-US" smtClean="0"/>
               <a:pPr/>
-              <a:t>9/4/2019</a:t>
+              <a:t>6/6/2025</a:t>
             </a:fld>
             <a:endParaRPr lang="en-US" dirty="0"/>
           </a:p>
@@ -7135,7 +7084,7 @@
             <a:fld id="{48A87A34-81AB-432B-8DAE-1953F412C126}" type="datetimeFigureOut">
               <a:rPr lang="en-US" smtClean="0"/>
               <a:pPr/>
-              <a:t>9/4/2019</a:t>
+              <a:t>6/6/2025</a:t>
             </a:fld>
             <a:endParaRPr lang="en-US" dirty="0"/>
           </a:p>
@@ -7563,7 +7512,7 @@
             <a:fld id="{48A87A34-81AB-432B-8DAE-1953F412C126}" type="datetimeFigureOut">
               <a:rPr lang="en-US" smtClean="0"/>
               <a:pPr/>
-              <a:t>9/4/2019</a:t>
+              <a:t>6/6/2025</a:t>
             </a:fld>
             <a:endParaRPr lang="en-US" dirty="0"/>
           </a:p>
@@ -8111,7 +8060,7 @@
             <a:fld id="{48A87A34-81AB-432B-8DAE-1953F412C126}" type="datetimeFigureOut">
               <a:rPr lang="en-US" smtClean="0"/>
               <a:pPr/>
-              <a:t>9/4/2019</a:t>
+              <a:t>6/6/2025</a:t>
             </a:fld>
             <a:endParaRPr lang="en-US" dirty="0"/>
           </a:p>
@@ -8944,7 +8893,7 @@
             <a:fld id="{48A87A34-81AB-432B-8DAE-1953F412C126}" type="datetimeFigureOut">
               <a:rPr lang="en-US" smtClean="0"/>
               <a:pPr/>
-              <a:t>9/4/2019</a:t>
+              <a:t>6/6/2025</a:t>
             </a:fld>
             <a:endParaRPr lang="en-US" dirty="0"/>
           </a:p>
@@ -9115,7 +9064,7 @@
           <a:p>
             <a:fld id="{48A87A34-81AB-432B-8DAE-1953F412C126}" type="datetimeFigureOut">
               <a:rPr lang="en-US" smtClean="0"/>
-              <a:t>9/4/2019</a:t>
+              <a:t>6/6/2025</a:t>
             </a:fld>
             <a:endParaRPr lang="en-US" dirty="0"/>
           </a:p>
@@ -9295,7 +9244,7 @@
           <a:p>
             <a:fld id="{48A87A34-81AB-432B-8DAE-1953F412C126}" type="datetimeFigureOut">
               <a:rPr lang="en-US" smtClean="0"/>
-              <a:t>9/4/2019</a:t>
+              <a:t>6/6/2025</a:t>
             </a:fld>
             <a:endParaRPr lang="en-US" dirty="0"/>
           </a:p>
@@ -9465,7 +9414,7 @@
           <a:p>
             <a:fld id="{48A87A34-81AB-432B-8DAE-1953F412C126}" type="datetimeFigureOut">
               <a:rPr lang="en-US" smtClean="0"/>
-              <a:t>9/4/2019</a:t>
+              <a:t>6/6/2025</a:t>
             </a:fld>
             <a:endParaRPr lang="en-US" dirty="0"/>
           </a:p>
@@ -9722,7 +9671,7 @@
           <a:p>
             <a:fld id="{48A87A34-81AB-432B-8DAE-1953F412C126}" type="datetimeFigureOut">
               <a:rPr lang="en-US" smtClean="0"/>
-              <a:t>9/4/2019</a:t>
+              <a:t>6/6/2025</a:t>
             </a:fld>
             <a:endParaRPr lang="en-US" dirty="0"/>
           </a:p>
@@ -9954,7 +9903,7 @@
           <a:p>
             <a:fld id="{48A87A34-81AB-432B-8DAE-1953F412C126}" type="datetimeFigureOut">
               <a:rPr lang="en-US" smtClean="0"/>
-              <a:t>9/4/2019</a:t>
+              <a:t>6/6/2025</a:t>
             </a:fld>
             <a:endParaRPr lang="en-US" dirty="0"/>
           </a:p>
@@ -10347,7 +10296,7 @@
           <a:p>
             <a:fld id="{48A87A34-81AB-432B-8DAE-1953F412C126}" type="datetimeFigureOut">
               <a:rPr lang="en-US" smtClean="0"/>
-              <a:t>9/4/2019</a:t>
+              <a:t>6/6/2025</a:t>
             </a:fld>
             <a:endParaRPr lang="en-US" dirty="0"/>
           </a:p>
@@ -10465,7 +10414,7 @@
           <a:p>
             <a:fld id="{48A87A34-81AB-432B-8DAE-1953F412C126}" type="datetimeFigureOut">
               <a:rPr lang="en-US" smtClean="0"/>
-              <a:t>9/4/2019</a:t>
+              <a:t>6/6/2025</a:t>
             </a:fld>
             <a:endParaRPr lang="en-US" dirty="0"/>
           </a:p>
@@ -10560,7 +10509,7 @@
           <a:p>
             <a:fld id="{48A87A34-81AB-432B-8DAE-1953F412C126}" type="datetimeFigureOut">
               <a:rPr lang="en-US" smtClean="0"/>
-              <a:t>9/4/2019</a:t>
+              <a:t>6/6/2025</a:t>
             </a:fld>
             <a:endParaRPr lang="en-US" dirty="0"/>
           </a:p>
@@ -10833,7 +10782,7 @@
           <a:p>
             <a:fld id="{48A87A34-81AB-432B-8DAE-1953F412C126}" type="datetimeFigureOut">
               <a:rPr lang="en-US" smtClean="0"/>
-              <a:t>9/4/2019</a:t>
+              <a:t>6/6/2025</a:t>
             </a:fld>
             <a:endParaRPr lang="en-US" dirty="0"/>
           </a:p>
@@ -11114,7 +11063,7 @@
           <a:p>
             <a:fld id="{48A87A34-81AB-432B-8DAE-1953F412C126}" type="datetimeFigureOut">
               <a:rPr lang="en-US" smtClean="0"/>
-              <a:t>9/4/2019</a:t>
+              <a:t>6/6/2025</a:t>
             </a:fld>
             <a:endParaRPr lang="en-US" dirty="0"/>
           </a:p>
@@ -11355,7 +11304,7 @@
             <a:fld id="{48A87A34-81AB-432B-8DAE-1953F412C126}" type="datetimeFigureOut">
               <a:rPr lang="en-US" smtClean="0"/>
               <a:pPr/>
-              <a:t>9/4/2019</a:t>
+              <a:t>6/6/2025</a:t>
             </a:fld>
             <a:endParaRPr lang="en-US" dirty="0"/>
           </a:p>
@@ -11954,7 +11903,7 @@
         <p:spPr/>
         <p:txBody>
           <a:bodyPr>
-            <a:normAutofit/>
+            <a:normAutofit fontScale="92500" lnSpcReduction="20000"/>
           </a:bodyPr>
           <a:lstStyle/>
           <a:p>
@@ -11967,6 +11916,29 @@
           <a:p>
             <a:r>
               <a:rPr lang="zh-CN" altLang="en-US" dirty="0"/>
+              <a:t>北航 </a:t>
+            </a:r>
+            <a:r>
+              <a:rPr lang="en-US" altLang="zh-CN" dirty="0"/>
+              <a:t>《</a:t>
+            </a:r>
+            <a:r>
+              <a:rPr lang="zh-CN" altLang="en-US" dirty="0"/>
+              <a:t>开源软件开发导论</a:t>
+            </a:r>
+            <a:r>
+              <a:rPr lang="en-US" altLang="zh-CN" dirty="0"/>
+              <a:t>》</a:t>
+            </a:r>
+            <a:r>
+              <a:rPr lang="zh-CN" altLang="en-US" dirty="0"/>
+              <a:t>课程</a:t>
+            </a:r>
+            <a:endParaRPr lang="en-US" altLang="zh-CN" dirty="0"/>
+          </a:p>
+          <a:p>
+            <a:r>
+              <a:rPr lang="zh-CN" altLang="en-US" dirty="0"/>
               <a:t>构建之法 </a:t>
             </a:r>
             <a:r>
@@ -11989,10 +11961,9 @@
           </a:p>
           <a:p>
             <a:r>
-              <a:rPr lang="en-US" altLang="zh-CN"/>
-              <a:t>2018</a:t>
-            </a:r>
-            <a:endParaRPr lang="en-US" altLang="zh-CN" dirty="0"/>
+              <a:rPr lang="en-US" altLang="zh-CN" dirty="0"/>
+              <a:t>2022</a:t>
+            </a:r>
           </a:p>
         </p:txBody>
       </p:sp>
@@ -12005,6 +11976,313 @@
 </file>
 
 <file path=ppt/slides/slide10.xml><?xml version="1.0" encoding="utf-8"?>
+<p:sld xmlns:a="http://schemas.openxmlformats.org/drawingml/2006/main" xmlns:r="http://schemas.openxmlformats.org/officeDocument/2006/relationships" xmlns:p="http://schemas.openxmlformats.org/presentationml/2006/main" showMasterSp="0">
+  <p:cSld>
+    <p:spTree>
+      <p:nvGrpSpPr>
+        <p:cNvPr id="1" name=""/>
+        <p:cNvGrpSpPr/>
+        <p:nvPr/>
+      </p:nvGrpSpPr>
+      <p:grpSpPr>
+        <a:xfrm>
+          <a:off x="0" y="0"/>
+          <a:ext cx="0" cy="0"/>
+          <a:chOff x="0" y="0"/>
+          <a:chExt cx="0" cy="0"/>
+        </a:xfrm>
+      </p:grpSpPr>
+      <p:pic>
+        <p:nvPicPr>
+          <p:cNvPr id="2050" name="Picture 2" descr="image032"/>
+          <p:cNvPicPr>
+            <a:picLocks noChangeAspect="1" noChangeArrowheads="1"/>
+          </p:cNvPicPr>
+          <p:nvPr/>
+        </p:nvPicPr>
+        <p:blipFill>
+          <a:blip r:embed="rId2" cstate="print">
+            <a:extLst>
+              <a:ext uri="{28A0092B-C50C-407E-A947-70E740481C1C}">
+                <a14:useLocalDpi xmlns:a14="http://schemas.microsoft.com/office/drawing/2010/main" val="0"/>
+              </a:ext>
+            </a:extLst>
+          </a:blip>
+          <a:srcRect/>
+          <a:stretch>
+            <a:fillRect/>
+          </a:stretch>
+        </p:blipFill>
+        <p:spPr bwMode="auto">
+          <a:xfrm>
+            <a:off x="2959100" y="44128"/>
+            <a:ext cx="6184900" cy="6813872"/>
+          </a:xfrm>
+          <a:prstGeom prst="rect">
+            <a:avLst/>
+          </a:prstGeom>
+          <a:noFill/>
+          <a:ln w="9525">
+            <a:solidFill>
+              <a:srgbClr val="000000"/>
+            </a:solidFill>
+            <a:miter lim="800000"/>
+            <a:headEnd/>
+            <a:tailEnd/>
+          </a:ln>
+          <a:extLst>
+            <a:ext uri="{909E8E84-426E-40DD-AFC4-6F175D3DCCD1}">
+              <a14:hiddenFill xmlns:a14="http://schemas.microsoft.com/office/drawing/2010/main">
+                <a:solidFill>
+                  <a:srgbClr val="FFFFFF"/>
+                </a:solidFill>
+              </a14:hiddenFill>
+            </a:ext>
+          </a:extLst>
+        </p:spPr>
+      </p:pic>
+    </p:spTree>
+    <p:extLst>
+      <p:ext uri="{BB962C8B-B14F-4D97-AF65-F5344CB8AC3E}">
+        <p14:creationId xmlns:p14="http://schemas.microsoft.com/office/powerpoint/2010/main" val="4213188873"/>
+      </p:ext>
+    </p:extLst>
+  </p:cSld>
+  <p:clrMapOvr>
+    <a:masterClrMapping/>
+  </p:clrMapOvr>
+</p:sld>
+</file>
+
+<file path=ppt/slides/slide11.xml><?xml version="1.0" encoding="utf-8"?>
+<p:sld xmlns:a="http://schemas.openxmlformats.org/drawingml/2006/main" xmlns:r="http://schemas.openxmlformats.org/officeDocument/2006/relationships" xmlns:p="http://schemas.openxmlformats.org/presentationml/2006/main">
+  <p:cSld>
+    <p:spTree>
+      <p:nvGrpSpPr>
+        <p:cNvPr id="1" name=""/>
+        <p:cNvGrpSpPr/>
+        <p:nvPr/>
+      </p:nvGrpSpPr>
+      <p:grpSpPr>
+        <a:xfrm>
+          <a:off x="0" y="0"/>
+          <a:ext cx="0" cy="0"/>
+          <a:chOff x="0" y="0"/>
+          <a:chExt cx="0" cy="0"/>
+        </a:xfrm>
+      </p:grpSpPr>
+      <p:sp>
+        <p:nvSpPr>
+          <p:cNvPr id="2" name="标题 1">
+            <a:extLst>
+              <a:ext uri="{FF2B5EF4-FFF2-40B4-BE49-F238E27FC236}">
+                <a16:creationId xmlns:a16="http://schemas.microsoft.com/office/drawing/2014/main" id="{0DE63A95-A29C-2178-DAF8-E90E344002A5}"/>
+              </a:ext>
+            </a:extLst>
+          </p:cNvPr>
+          <p:cNvSpPr>
+            <a:spLocks noGrp="1"/>
+          </p:cNvSpPr>
+          <p:nvPr>
+            <p:ph type="title"/>
+          </p:nvPr>
+        </p:nvSpPr>
+        <p:spPr/>
+        <p:txBody>
+          <a:bodyPr/>
+          <a:lstStyle/>
+          <a:p>
+            <a:r>
+              <a:rPr lang="zh-CN" altLang="en-US" dirty="0"/>
+              <a:t>团队还有 </a:t>
+            </a:r>
+            <a:r>
+              <a:rPr lang="en-US" altLang="zh-CN" dirty="0"/>
+              <a:t>– </a:t>
+            </a:r>
+            <a:r>
+              <a:rPr lang="zh-CN" altLang="en-US" dirty="0"/>
+              <a:t>效能</a:t>
+            </a:r>
+          </a:p>
+        </p:txBody>
+      </p:sp>
+      <p:pic>
+        <p:nvPicPr>
+          <p:cNvPr id="5" name="内容占位符 4" descr="图示&#10;&#10;AI 生成的内容可能不正确。">
+            <a:extLst>
+              <a:ext uri="{FF2B5EF4-FFF2-40B4-BE49-F238E27FC236}">
+                <a16:creationId xmlns:a16="http://schemas.microsoft.com/office/drawing/2014/main" id="{97DBD05B-DA90-6912-EAF6-BBCE8A83AA89}"/>
+              </a:ext>
+            </a:extLst>
+          </p:cNvPr>
+          <p:cNvPicPr>
+            <a:picLocks noGrp="1" noChangeAspect="1"/>
+          </p:cNvPicPr>
+          <p:nvPr>
+            <p:ph idx="1"/>
+          </p:nvPr>
+        </p:nvPicPr>
+        <p:blipFill>
+          <a:blip r:embed="rId3">
+            <a:extLst>
+              <a:ext uri="{28A0092B-C50C-407E-A947-70E740481C1C}">
+                <a14:useLocalDpi xmlns:a14="http://schemas.microsoft.com/office/drawing/2010/main" val="0"/>
+              </a:ext>
+            </a:extLst>
+          </a:blip>
+          <a:stretch>
+            <a:fillRect/>
+          </a:stretch>
+        </p:blipFill>
+        <p:spPr>
+          <a:xfrm>
+            <a:off x="2035032" y="1825625"/>
+            <a:ext cx="8404511" cy="4351338"/>
+          </a:xfrm>
+        </p:spPr>
+      </p:pic>
+    </p:spTree>
+    <p:extLst>
+      <p:ext uri="{BB962C8B-B14F-4D97-AF65-F5344CB8AC3E}">
+        <p14:creationId xmlns:p14="http://schemas.microsoft.com/office/powerpoint/2010/main" val="2120637123"/>
+      </p:ext>
+    </p:extLst>
+  </p:cSld>
+  <p:clrMapOvr>
+    <a:masterClrMapping/>
+  </p:clrMapOvr>
+</p:sld>
+</file>
+
+<file path=ppt/slides/slide12.xml><?xml version="1.0" encoding="utf-8"?>
+<p:sld xmlns:a="http://schemas.openxmlformats.org/drawingml/2006/main" xmlns:r="http://schemas.openxmlformats.org/officeDocument/2006/relationships" xmlns:p="http://schemas.openxmlformats.org/presentationml/2006/main">
+  <p:cSld>
+    <p:spTree>
+      <p:nvGrpSpPr>
+        <p:cNvPr id="1" name=""/>
+        <p:cNvGrpSpPr/>
+        <p:nvPr/>
+      </p:nvGrpSpPr>
+      <p:grpSpPr>
+        <a:xfrm>
+          <a:off x="0" y="0"/>
+          <a:ext cx="0" cy="0"/>
+          <a:chOff x="0" y="0"/>
+          <a:chExt cx="0" cy="0"/>
+        </a:xfrm>
+      </p:grpSpPr>
+      <p:sp>
+        <p:nvSpPr>
+          <p:cNvPr id="2" name="Title 1"/>
+          <p:cNvSpPr>
+            <a:spLocks noGrp="1"/>
+          </p:cNvSpPr>
+          <p:nvPr>
+            <p:ph type="title"/>
+          </p:nvPr>
+        </p:nvSpPr>
+        <p:spPr/>
+        <p:txBody>
+          <a:bodyPr/>
+          <a:lstStyle/>
+          <a:p>
+            <a:r>
+              <a:rPr lang="zh-CN" altLang="en-US" dirty="0"/>
+              <a:t>不同的团队类型</a:t>
+            </a:r>
+            <a:endParaRPr lang="en-US" dirty="0"/>
+          </a:p>
+        </p:txBody>
+      </p:sp>
+      <p:sp>
+        <p:nvSpPr>
+          <p:cNvPr id="3" name="Content Placeholder 2"/>
+          <p:cNvSpPr>
+            <a:spLocks noGrp="1"/>
+          </p:cNvSpPr>
+          <p:nvPr>
+            <p:ph idx="1"/>
+          </p:nvPr>
+        </p:nvSpPr>
+        <p:spPr/>
+        <p:txBody>
+          <a:bodyPr>
+            <a:normAutofit/>
+          </a:bodyPr>
+          <a:lstStyle/>
+          <a:p>
+            <a:pPr fontAlgn="ctr"/>
+            <a:r>
+              <a:rPr lang="en-US" dirty="0"/>
+              <a:t>Theater Team </a:t>
+            </a:r>
+            <a:r>
+              <a:rPr lang="zh-CN" altLang="en-US" dirty="0"/>
+              <a:t>剧院团队</a:t>
+            </a:r>
+            <a:endParaRPr lang="en-US" altLang="zh-CN" dirty="0"/>
+          </a:p>
+          <a:p>
+            <a:pPr fontAlgn="ctr"/>
+            <a:r>
+              <a:rPr lang="zh-CN" altLang="en-US" dirty="0"/>
+              <a:t>一群有天赋的演员在剧院里演话剧，他们是如何分配角色的？</a:t>
+            </a:r>
+            <a:endParaRPr lang="en-US" dirty="0"/>
+          </a:p>
+          <a:p>
+            <a:pPr lvl="1"/>
+            <a:r>
+              <a:rPr lang="en-US" dirty="0"/>
+              <a:t>Strong direction,  team member negotiate for roles,   </a:t>
+            </a:r>
+          </a:p>
+          <a:p>
+            <a:pPr lvl="1"/>
+            <a:r>
+              <a:rPr lang="zh-CN" altLang="en-US" dirty="0"/>
+              <a:t>适用于</a:t>
+            </a:r>
+            <a:r>
+              <a:rPr lang="en-US" dirty="0"/>
+              <a:t>: </a:t>
+            </a:r>
+          </a:p>
+          <a:p>
+            <a:pPr lvl="2"/>
+            <a:r>
+              <a:rPr lang="en-US" dirty="0"/>
+              <a:t>training project, volunteer project  </a:t>
+            </a:r>
+          </a:p>
+          <a:p>
+            <a:pPr lvl="2"/>
+            <a:r>
+              <a:rPr lang="zh-CN" altLang="en-US" dirty="0"/>
+              <a:t>大学生的软件工程项目</a:t>
+            </a:r>
+            <a:endParaRPr lang="en-US" dirty="0"/>
+          </a:p>
+          <a:p>
+            <a:endParaRPr lang="en-US" dirty="0"/>
+          </a:p>
+        </p:txBody>
+      </p:sp>
+    </p:spTree>
+    <p:extLst>
+      <p:ext uri="{BB962C8B-B14F-4D97-AF65-F5344CB8AC3E}">
+        <p14:creationId xmlns:p14="http://schemas.microsoft.com/office/powerpoint/2010/main" val="1142539797"/>
+      </p:ext>
+    </p:extLst>
+  </p:cSld>
+  <p:clrMapOvr>
+    <a:masterClrMapping/>
+  </p:clrMapOvr>
+</p:sld>
+</file>
+
+<file path=ppt/slides/slide13.xml><?xml version="1.0" encoding="utf-8"?>
 <p:sld xmlns:a="http://schemas.openxmlformats.org/drawingml/2006/main" xmlns:r="http://schemas.openxmlformats.org/officeDocument/2006/relationships" xmlns:p="http://schemas.openxmlformats.org/presentationml/2006/main">
   <p:cSld>
     <p:spTree>
@@ -12146,7 +12424,7 @@
 </p:sld>
 </file>
 
-<file path=ppt/slides/slide11.xml><?xml version="1.0" encoding="utf-8"?>
+<file path=ppt/slides/slide14.xml><?xml version="1.0" encoding="utf-8"?>
 <p:sld xmlns:a="http://schemas.openxmlformats.org/drawingml/2006/main" xmlns:r="http://schemas.openxmlformats.org/officeDocument/2006/relationships" xmlns:p="http://schemas.openxmlformats.org/presentationml/2006/main">
   <p:cSld>
     <p:spTree>
@@ -12266,7 +12544,7 @@
 </p:sld>
 </file>
 
-<file path=ppt/slides/slide12.xml><?xml version="1.0" encoding="utf-8"?>
+<file path=ppt/slides/slide15.xml><?xml version="1.0" encoding="utf-8"?>
 <p:sld xmlns:a="http://schemas.openxmlformats.org/drawingml/2006/main" xmlns:r="http://schemas.openxmlformats.org/officeDocument/2006/relationships" xmlns:p="http://schemas.openxmlformats.org/presentationml/2006/main">
   <p:cSld>
     <p:spTree>
@@ -12403,7 +12681,7 @@
 </p:sld>
 </file>
 
-<file path=ppt/slides/slide13.xml><?xml version="1.0" encoding="utf-8"?>
+<file path=ppt/slides/slide16.xml><?xml version="1.0" encoding="utf-8"?>
 <p:sld xmlns:a="http://schemas.openxmlformats.org/drawingml/2006/main" xmlns:r="http://schemas.openxmlformats.org/officeDocument/2006/relationships" xmlns:p="http://schemas.openxmlformats.org/presentationml/2006/main">
   <p:cSld>
     <p:spTree>
@@ -12506,7 +12784,7 @@
 </p:sld>
 </file>
 
-<file path=ppt/slides/slide14.xml><?xml version="1.0" encoding="utf-8"?>
+<file path=ppt/slides/slide17.xml><?xml version="1.0" encoding="utf-8"?>
 <p:sld xmlns:a="http://schemas.openxmlformats.org/drawingml/2006/main" xmlns:r="http://schemas.openxmlformats.org/officeDocument/2006/relationships" xmlns:p="http://schemas.openxmlformats.org/presentationml/2006/main">
   <p:cSld>
     <p:spTree>
@@ -12587,340 +12865,6 @@
 </p:sld>
 </file>
 
-<file path=ppt/slides/slide15.xml><?xml version="1.0" encoding="utf-8"?>
-<p:sld xmlns:a="http://schemas.openxmlformats.org/drawingml/2006/main" xmlns:r="http://schemas.openxmlformats.org/officeDocument/2006/relationships" xmlns:p="http://schemas.openxmlformats.org/presentationml/2006/main">
-  <p:cSld>
-    <p:spTree>
-      <p:nvGrpSpPr>
-        <p:cNvPr id="1" name=""/>
-        <p:cNvGrpSpPr/>
-        <p:nvPr/>
-      </p:nvGrpSpPr>
-      <p:grpSpPr>
-        <a:xfrm>
-          <a:off x="0" y="0"/>
-          <a:ext cx="0" cy="0"/>
-          <a:chOff x="0" y="0"/>
-          <a:chExt cx="0" cy="0"/>
-        </a:xfrm>
-      </p:grpSpPr>
-      <p:sp>
-        <p:nvSpPr>
-          <p:cNvPr id="2" name="Title 1"/>
-          <p:cNvSpPr>
-            <a:spLocks noGrp="1"/>
-          </p:cNvSpPr>
-          <p:nvPr>
-            <p:ph type="title"/>
-          </p:nvPr>
-        </p:nvSpPr>
-        <p:spPr/>
-        <p:txBody>
-          <a:bodyPr/>
-          <a:lstStyle/>
-          <a:p>
-            <a:r>
-              <a:rPr lang="zh-CN" altLang="en-US" dirty="0"/>
-              <a:t>不同的团队类型</a:t>
-            </a:r>
-            <a:endParaRPr lang="en-US" dirty="0"/>
-          </a:p>
-        </p:txBody>
-      </p:sp>
-      <p:sp>
-        <p:nvSpPr>
-          <p:cNvPr id="3" name="Content Placeholder 2"/>
-          <p:cNvSpPr>
-            <a:spLocks noGrp="1"/>
-          </p:cNvSpPr>
-          <p:nvPr>
-            <p:ph idx="1"/>
-          </p:nvPr>
-        </p:nvSpPr>
-        <p:spPr/>
-        <p:txBody>
-          <a:bodyPr>
-            <a:normAutofit/>
-          </a:bodyPr>
-          <a:lstStyle/>
-          <a:p>
-            <a:pPr fontAlgn="ctr"/>
-            <a:r>
-              <a:rPr lang="en-US" dirty="0"/>
-              <a:t>Skunkworks Team </a:t>
-            </a:r>
-            <a:r>
-              <a:rPr lang="zh-CN" altLang="en-US" dirty="0"/>
-              <a:t>秘密团队</a:t>
-            </a:r>
-            <a:endParaRPr lang="en-US" dirty="0"/>
-          </a:p>
-          <a:p>
-            <a:pPr lvl="1"/>
-            <a:r>
-              <a:rPr lang="en-US" dirty="0"/>
-              <a:t>A group of people work without much visibility and management,  intense ownership, extraordinary buy-in from the developers involved. </a:t>
-            </a:r>
-          </a:p>
-          <a:p>
-            <a:pPr lvl="1"/>
-            <a:r>
-              <a:rPr lang="en-US" dirty="0"/>
-              <a:t>Example:</a:t>
-            </a:r>
-          </a:p>
-          <a:p>
-            <a:pPr lvl="2"/>
-            <a:r>
-              <a:rPr lang="en-US" dirty="0"/>
-              <a:t>Secret software project</a:t>
-            </a:r>
-          </a:p>
-        </p:txBody>
-      </p:sp>
-    </p:spTree>
-    <p:extLst>
-      <p:ext uri="{BB962C8B-B14F-4D97-AF65-F5344CB8AC3E}">
-        <p14:creationId xmlns:p14="http://schemas.microsoft.com/office/powerpoint/2010/main" val="3771881510"/>
-      </p:ext>
-    </p:extLst>
-  </p:cSld>
-  <p:clrMapOvr>
-    <a:masterClrMapping/>
-  </p:clrMapOvr>
-</p:sld>
-</file>
-
-<file path=ppt/slides/slide16.xml><?xml version="1.0" encoding="utf-8"?>
-<p:sld xmlns:a="http://schemas.openxmlformats.org/drawingml/2006/main" xmlns:r="http://schemas.openxmlformats.org/officeDocument/2006/relationships" xmlns:p="http://schemas.openxmlformats.org/presentationml/2006/main">
-  <p:cSld>
-    <p:spTree>
-      <p:nvGrpSpPr>
-        <p:cNvPr id="1" name=""/>
-        <p:cNvGrpSpPr/>
-        <p:nvPr/>
-      </p:nvGrpSpPr>
-      <p:grpSpPr>
-        <a:xfrm>
-          <a:off x="0" y="0"/>
-          <a:ext cx="0" cy="0"/>
-          <a:chOff x="0" y="0"/>
-          <a:chExt cx="0" cy="0"/>
-        </a:xfrm>
-      </p:grpSpPr>
-      <p:sp>
-        <p:nvSpPr>
-          <p:cNvPr id="2" name="Title 1"/>
-          <p:cNvSpPr>
-            <a:spLocks noGrp="1"/>
-          </p:cNvSpPr>
-          <p:nvPr>
-            <p:ph type="title"/>
-          </p:nvPr>
-        </p:nvSpPr>
-        <p:spPr/>
-        <p:txBody>
-          <a:bodyPr/>
-          <a:lstStyle/>
-          <a:p>
-            <a:r>
-              <a:rPr lang="zh-CN" altLang="en-US" dirty="0"/>
-              <a:t>不同的团队类型</a:t>
-            </a:r>
-            <a:endParaRPr lang="en-US" dirty="0"/>
-          </a:p>
-        </p:txBody>
-      </p:sp>
-      <p:sp>
-        <p:nvSpPr>
-          <p:cNvPr id="3" name="Content Placeholder 2"/>
-          <p:cNvSpPr>
-            <a:spLocks noGrp="1"/>
-          </p:cNvSpPr>
-          <p:nvPr>
-            <p:ph idx="1"/>
-          </p:nvPr>
-        </p:nvSpPr>
-        <p:spPr/>
-        <p:txBody>
-          <a:bodyPr>
-            <a:normAutofit/>
-          </a:bodyPr>
-          <a:lstStyle/>
-          <a:p>
-            <a:pPr fontAlgn="ctr"/>
-            <a:r>
-              <a:rPr lang="en-US" dirty="0"/>
-              <a:t>SWAT team </a:t>
-            </a:r>
-            <a:r>
-              <a:rPr lang="zh-CN" altLang="en-US" dirty="0"/>
-              <a:t>特工团队</a:t>
-            </a:r>
-            <a:endParaRPr lang="en-US" dirty="0"/>
-          </a:p>
-          <a:p>
-            <a:pPr lvl="1"/>
-            <a:r>
-              <a:rPr lang="en-US" dirty="0"/>
-              <a:t>Skilled With Advanced Tools,  a group of people who are highly skilled with a particular tool or practice</a:t>
-            </a:r>
-          </a:p>
-          <a:p>
-            <a:pPr lvl="1"/>
-            <a:r>
-              <a:rPr lang="en-US" dirty="0"/>
-              <a:t>Solving a specific problem,  highly urgent. </a:t>
-            </a:r>
-          </a:p>
-          <a:p>
-            <a:pPr lvl="1"/>
-            <a:r>
-              <a:rPr lang="en-US" dirty="0"/>
-              <a:t>Example: </a:t>
-            </a:r>
-          </a:p>
-          <a:p>
-            <a:pPr lvl="2"/>
-            <a:r>
-              <a:rPr lang="en-US" dirty="0"/>
-              <a:t>Year-2000 project;   Security project; Tech Transfer Project</a:t>
-            </a:r>
-          </a:p>
-        </p:txBody>
-      </p:sp>
-    </p:spTree>
-    <p:extLst>
-      <p:ext uri="{BB962C8B-B14F-4D97-AF65-F5344CB8AC3E}">
-        <p14:creationId xmlns:p14="http://schemas.microsoft.com/office/powerpoint/2010/main" val="3308180656"/>
-      </p:ext>
-    </p:extLst>
-  </p:cSld>
-  <p:clrMapOvr>
-    <a:masterClrMapping/>
-  </p:clrMapOvr>
-</p:sld>
-</file>
-
-<file path=ppt/slides/slide17.xml><?xml version="1.0" encoding="utf-8"?>
-<p:sld xmlns:a="http://schemas.openxmlformats.org/drawingml/2006/main" xmlns:r="http://schemas.openxmlformats.org/officeDocument/2006/relationships" xmlns:p="http://schemas.openxmlformats.org/presentationml/2006/main">
-  <p:cSld>
-    <p:spTree>
-      <p:nvGrpSpPr>
-        <p:cNvPr id="1" name=""/>
-        <p:cNvGrpSpPr/>
-        <p:nvPr/>
-      </p:nvGrpSpPr>
-      <p:grpSpPr>
-        <a:xfrm>
-          <a:off x="0" y="0"/>
-          <a:ext cx="0" cy="0"/>
-          <a:chOff x="0" y="0"/>
-          <a:chExt cx="0" cy="0"/>
-        </a:xfrm>
-      </p:grpSpPr>
-      <p:sp>
-        <p:nvSpPr>
-          <p:cNvPr id="2" name="Title 1"/>
-          <p:cNvSpPr>
-            <a:spLocks noGrp="1"/>
-          </p:cNvSpPr>
-          <p:nvPr>
-            <p:ph type="title"/>
-          </p:nvPr>
-        </p:nvSpPr>
-        <p:spPr/>
-        <p:txBody>
-          <a:bodyPr/>
-          <a:lstStyle/>
-          <a:p>
-            <a:r>
-              <a:rPr lang="zh-CN" altLang="en-US" dirty="0"/>
-              <a:t>不同的团队类型</a:t>
-            </a:r>
-            <a:endParaRPr lang="en-US" dirty="0"/>
-          </a:p>
-        </p:txBody>
-      </p:sp>
-      <p:sp>
-        <p:nvSpPr>
-          <p:cNvPr id="3" name="Content Placeholder 2"/>
-          <p:cNvSpPr>
-            <a:spLocks noGrp="1"/>
-          </p:cNvSpPr>
-          <p:nvPr>
-            <p:ph idx="1"/>
-          </p:nvPr>
-        </p:nvSpPr>
-        <p:spPr/>
-        <p:txBody>
-          <a:bodyPr>
-            <a:normAutofit/>
-          </a:bodyPr>
-          <a:lstStyle/>
-          <a:p>
-            <a:pPr fontAlgn="ctr"/>
-            <a:r>
-              <a:rPr lang="en-US" dirty="0"/>
-              <a:t>Chief-Programmer Team  (surgical team)</a:t>
-            </a:r>
-          </a:p>
-          <a:p>
-            <a:pPr lvl="1"/>
-            <a:r>
-              <a:rPr lang="zh-CN" altLang="en-US" dirty="0"/>
-              <a:t>主治医师模式</a:t>
-            </a:r>
-            <a:endParaRPr lang="en-US" altLang="zh-CN" dirty="0"/>
-          </a:p>
-          <a:p>
-            <a:pPr lvl="1"/>
-            <a:r>
-              <a:rPr lang="en-US" dirty="0"/>
-              <a:t>Chief-programmer handles the bulk of the design and code,  other team members are in supporting role (backup programmer, admin, tool-smith, language lawyer, specialist)</a:t>
-            </a:r>
-          </a:p>
-          <a:p>
-            <a:pPr lvl="1"/>
-            <a:r>
-              <a:rPr lang="en-US" dirty="0"/>
-              <a:t>Example:</a:t>
-            </a:r>
-          </a:p>
-          <a:p>
-            <a:pPr lvl="2"/>
-            <a:r>
-              <a:rPr lang="en-US" dirty="0"/>
-              <a:t>IBM 360 </a:t>
-            </a:r>
-            <a:r>
-              <a:rPr lang="en-US" altLang="zh-CN" dirty="0"/>
-              <a:t>team</a:t>
-            </a:r>
-          </a:p>
-          <a:p>
-            <a:pPr lvl="2"/>
-            <a:r>
-              <a:rPr lang="zh-CN" altLang="en-US" dirty="0"/>
-              <a:t>一些学校的软件团队退化为“一人加班，其他人抱大腿”</a:t>
-            </a:r>
-            <a:endParaRPr lang="en-US" dirty="0"/>
-          </a:p>
-        </p:txBody>
-      </p:sp>
-    </p:spTree>
-    <p:extLst>
-      <p:ext uri="{BB962C8B-B14F-4D97-AF65-F5344CB8AC3E}">
-        <p14:creationId xmlns:p14="http://schemas.microsoft.com/office/powerpoint/2010/main" val="3734779282"/>
-      </p:ext>
-    </p:extLst>
-  </p:cSld>
-  <p:clrMapOvr>
-    <a:masterClrMapping/>
-  </p:clrMapOvr>
-</p:sld>
-</file>
-
 <file path=ppt/slides/slide18.xml><?xml version="1.0" encoding="utf-8"?>
 <p:sld xmlns:a="http://schemas.openxmlformats.org/drawingml/2006/main" xmlns:r="http://schemas.openxmlformats.org/officeDocument/2006/relationships" xmlns:p="http://schemas.openxmlformats.org/presentationml/2006/main">
   <p:cSld>
@@ -12950,264 +12894,72 @@
         </p:nvSpPr>
         <p:spPr/>
         <p:txBody>
+          <a:bodyPr/>
+          <a:lstStyle/>
+          <a:p>
+            <a:r>
+              <a:rPr lang="zh-CN" altLang="en-US" dirty="0"/>
+              <a:t>不同的团队类型</a:t>
+            </a:r>
+            <a:endParaRPr lang="en-US" dirty="0"/>
+          </a:p>
+        </p:txBody>
+      </p:sp>
+      <p:sp>
+        <p:nvSpPr>
+          <p:cNvPr id="3" name="Content Placeholder 2"/>
+          <p:cNvSpPr>
+            <a:spLocks noGrp="1"/>
+          </p:cNvSpPr>
+          <p:nvPr>
+            <p:ph idx="1"/>
+          </p:nvPr>
+        </p:nvSpPr>
+        <p:spPr/>
+        <p:txBody>
           <a:bodyPr>
             <a:normAutofit/>
           </a:bodyPr>
           <a:lstStyle/>
           <a:p>
-            <a:r>
-              <a:rPr lang="zh-CN" altLang="en-US" dirty="0"/>
-              <a:t>明星团队 </a:t>
-            </a:r>
-            <a:r>
-              <a:rPr lang="en-US" altLang="zh-CN" dirty="0"/>
-              <a:t>/ </a:t>
-            </a:r>
-            <a:r>
-              <a:rPr lang="zh-CN" altLang="en-US" dirty="0"/>
-              <a:t>社区团队</a:t>
+            <a:pPr fontAlgn="ctr"/>
+            <a:r>
+              <a:rPr lang="en-US" dirty="0"/>
+              <a:t>Skunkworks Team </a:t>
+            </a:r>
+            <a:r>
+              <a:rPr lang="zh-CN" altLang="en-US" dirty="0"/>
+              <a:t>秘密团队</a:t>
             </a:r>
             <a:endParaRPr lang="en-US" dirty="0"/>
           </a:p>
-        </p:txBody>
-      </p:sp>
-      <p:sp>
-        <p:nvSpPr>
-          <p:cNvPr id="3" name="Content Placeholder 2"/>
-          <p:cNvSpPr>
-            <a:spLocks noGrp="1"/>
-          </p:cNvSpPr>
-          <p:nvPr>
-            <p:ph idx="1"/>
-          </p:nvPr>
-        </p:nvSpPr>
-        <p:spPr/>
-        <p:txBody>
-          <a:bodyPr>
-            <a:normAutofit fontScale="55000" lnSpcReduction="20000"/>
-          </a:bodyPr>
-          <a:lstStyle/>
-          <a:p>
-            <a:pPr marL="118872" indent="0">
-              <a:lnSpc>
-                <a:spcPct val="120000"/>
-              </a:lnSpc>
-              <a:buNone/>
-            </a:pPr>
-            <a:r>
-              <a:rPr lang="en-US" altLang="zh-CN" b="1" dirty="0"/>
-              <a:t>Superstar</a:t>
-            </a:r>
-            <a:r>
-              <a:rPr lang="en-US" b="1" dirty="0"/>
-              <a:t> Team </a:t>
-            </a:r>
-            <a:r>
-              <a:rPr lang="zh-CN" altLang="en-US" b="1" dirty="0"/>
-              <a:t>（明星团队）</a:t>
-            </a:r>
-            <a:endParaRPr lang="en-US" b="1" dirty="0"/>
-          </a:p>
-          <a:p>
-            <a:pPr>
-              <a:lnSpc>
-                <a:spcPct val="120000"/>
-              </a:lnSpc>
-            </a:pPr>
+          <a:p>
+            <a:pPr lvl="1"/>
             <a:r>
               <a:rPr lang="en-US" dirty="0"/>
-              <a:t>A group of talented </a:t>
-            </a:r>
-            <a:r>
-              <a:rPr lang="en-US" dirty="0" err="1"/>
-              <a:t>devs</a:t>
-            </a:r>
+              <a:t>A group of people work without much visibility and management,  intense ownership, extraordinary buy-in from the developers involved. </a:t>
+            </a:r>
+          </a:p>
+          <a:p>
+            <a:pPr lvl="1"/>
             <a:r>
               <a:rPr lang="en-US" dirty="0"/>
-              <a:t>, specialist, with managers to support them,  the star is the player</a:t>
-            </a:r>
-          </a:p>
-          <a:p>
-            <a:pPr lvl="1">
-              <a:lnSpc>
-                <a:spcPct val="120000"/>
-              </a:lnSpc>
-            </a:pPr>
+              <a:t>Example:</a:t>
+            </a:r>
+          </a:p>
+          <a:p>
+            <a:pPr lvl="2"/>
             <a:r>
               <a:rPr lang="en-US" dirty="0"/>
-              <a:t>Example: </a:t>
-            </a:r>
-            <a:r>
-              <a:rPr lang="zh-CN" altLang="en-US" dirty="0"/>
-              <a:t>刘翔 </a:t>
-            </a:r>
-            <a:r>
-              <a:rPr lang="en-US" altLang="zh-CN" dirty="0"/>
-              <a:t>– </a:t>
-            </a:r>
-            <a:r>
-              <a:rPr lang="zh-CN" altLang="en-US" dirty="0"/>
-              <a:t>翔之队</a:t>
-            </a:r>
-            <a:endParaRPr lang="en-US" dirty="0"/>
-          </a:p>
-          <a:p>
-            <a:pPr>
-              <a:lnSpc>
-                <a:spcPct val="120000"/>
-              </a:lnSpc>
-            </a:pPr>
-            <a:r>
-              <a:rPr lang="zh-CN" altLang="en-US" dirty="0"/>
-              <a:t>一旦明星出了问题，怎么办？</a:t>
-            </a:r>
-            <a:endParaRPr lang="en-US" altLang="zh-CN" dirty="0"/>
-          </a:p>
-          <a:p>
-            <a:pPr>
-              <a:lnSpc>
-                <a:spcPct val="120000"/>
-              </a:lnSpc>
-            </a:pPr>
-            <a:endParaRPr lang="en-US" altLang="zh-CN" dirty="0"/>
-          </a:p>
-          <a:p>
-            <a:pPr marL="118872" indent="0">
-              <a:lnSpc>
-                <a:spcPct val="120000"/>
-              </a:lnSpc>
-              <a:buNone/>
-            </a:pPr>
-            <a:r>
-              <a:rPr lang="zh-CN" altLang="en-US" b="1" dirty="0"/>
-              <a:t>社区团队</a:t>
-            </a:r>
-            <a:endParaRPr lang="en-US" altLang="zh-CN" b="1" dirty="0"/>
-          </a:p>
-          <a:p>
-            <a:pPr>
-              <a:lnSpc>
-                <a:spcPct val="120000"/>
-              </a:lnSpc>
-            </a:pPr>
-            <a:r>
-              <a:rPr lang="zh-CN" altLang="en-US" dirty="0"/>
-              <a:t>很多志愿者参与</a:t>
-            </a:r>
-            <a:r>
-              <a:rPr lang="en-US" altLang="zh-CN" dirty="0"/>
-              <a:t>, </a:t>
-            </a:r>
-            <a:r>
-              <a:rPr lang="zh-CN" altLang="en-US" dirty="0"/>
-              <a:t>每个人参与自己感兴趣的项目</a:t>
-            </a:r>
-            <a:r>
-              <a:rPr lang="en-US" altLang="zh-CN" dirty="0"/>
-              <a:t>, </a:t>
-            </a:r>
-            <a:r>
-              <a:rPr lang="zh-CN" altLang="en-US" dirty="0"/>
-              <a:t>贡献力量</a:t>
-            </a:r>
-            <a:r>
-              <a:rPr lang="en-US" altLang="zh-CN" dirty="0"/>
-              <a:t>, </a:t>
-            </a:r>
-            <a:r>
-              <a:rPr lang="zh-CN" altLang="en-US" dirty="0"/>
-              <a:t>大部分人不拿报酬。</a:t>
-            </a:r>
-            <a:endParaRPr lang="en-US" altLang="zh-CN" dirty="0"/>
-          </a:p>
-          <a:p>
-            <a:pPr>
-              <a:lnSpc>
-                <a:spcPct val="120000"/>
-              </a:lnSpc>
-            </a:pPr>
-            <a:r>
-              <a:rPr lang="zh-CN" altLang="en-US" dirty="0"/>
-              <a:t>好处是“众人拾柴火焰高”，但是如果大家都只来烤火</a:t>
-            </a:r>
-            <a:r>
-              <a:rPr lang="en-US" altLang="zh-CN" dirty="0"/>
-              <a:t>, </a:t>
-            </a:r>
-            <a:r>
-              <a:rPr lang="zh-CN" altLang="en-US" dirty="0"/>
-              <a:t>不去拾柴；或者捡到的柴火质量太差</a:t>
-            </a:r>
-            <a:r>
-              <a:rPr lang="en-US" altLang="zh-CN" dirty="0"/>
-              <a:t>, </a:t>
-            </a:r>
-            <a:r>
-              <a:rPr lang="zh-CN" altLang="en-US" dirty="0"/>
-              <a:t>最后火也熄灭了。  </a:t>
-            </a:r>
-            <a:endParaRPr lang="en-US" altLang="zh-CN" dirty="0"/>
-          </a:p>
-          <a:p>
-            <a:pPr>
-              <a:lnSpc>
-                <a:spcPct val="120000"/>
-              </a:lnSpc>
-            </a:pPr>
-            <a:r>
-              <a:rPr lang="zh-CN" altLang="en-US" dirty="0"/>
-              <a:t>“社区” 并不意味着“随意”</a:t>
-            </a:r>
-            <a:r>
-              <a:rPr lang="en-US" altLang="zh-CN" dirty="0"/>
-              <a:t>,  </a:t>
-            </a:r>
-            <a:r>
-              <a:rPr lang="zh-CN" altLang="en-US" dirty="0"/>
-              <a:t>一些成功的社区项目（例如开发和维护</a:t>
-            </a:r>
-            <a:r>
-              <a:rPr lang="en-US" altLang="zh-CN" dirty="0"/>
-              <a:t>Linux </a:t>
-            </a:r>
-            <a:r>
-              <a:rPr lang="zh-CN" altLang="en-US" dirty="0"/>
-              <a:t>操作系统的社区）都有很严格的代码复审和签入的质量控制。</a:t>
-            </a:r>
-            <a:endParaRPr lang="en-US" altLang="zh-CN" dirty="0"/>
-          </a:p>
-          <a:p>
-            <a:pPr>
-              <a:lnSpc>
-                <a:spcPct val="120000"/>
-              </a:lnSpc>
-            </a:pPr>
-            <a:r>
-              <a:rPr lang="zh-CN" altLang="en-US" dirty="0"/>
-              <a:t>社区有一个脾气大的明星，怎么办？</a:t>
-            </a:r>
-            <a:endParaRPr lang="en-US" altLang="zh-CN" dirty="0"/>
-          </a:p>
-          <a:p>
-            <a:pPr lvl="1">
-              <a:lnSpc>
-                <a:spcPct val="120000"/>
-              </a:lnSpc>
-            </a:pPr>
-            <a:r>
-              <a:rPr lang="en-US" dirty="0">
-                <a:hlinkClick r:id="rId3"/>
-              </a:rPr>
-              <a:t>Linus Torvalds and community</a:t>
-            </a:r>
-            <a:endParaRPr lang="en-US" dirty="0"/>
+              <a:t>Secret software project</a:t>
+            </a:r>
           </a:p>
         </p:txBody>
       </p:sp>
     </p:spTree>
     <p:extLst>
       <p:ext uri="{BB962C8B-B14F-4D97-AF65-F5344CB8AC3E}">
-        <p14:creationId xmlns:p14="http://schemas.microsoft.com/office/powerpoint/2010/main" val="3602450418"/>
+        <p14:creationId xmlns:p14="http://schemas.microsoft.com/office/powerpoint/2010/main" val="3771881510"/>
       </p:ext>
     </p:extLst>
   </p:cSld>
@@ -13236,6 +12988,1303 @@
       </p:grpSpPr>
       <p:sp>
         <p:nvSpPr>
+          <p:cNvPr id="2" name="Title 1"/>
+          <p:cNvSpPr>
+            <a:spLocks noGrp="1"/>
+          </p:cNvSpPr>
+          <p:nvPr>
+            <p:ph type="title"/>
+          </p:nvPr>
+        </p:nvSpPr>
+        <p:spPr/>
+        <p:txBody>
+          <a:bodyPr/>
+          <a:lstStyle/>
+          <a:p>
+            <a:r>
+              <a:rPr lang="zh-CN" altLang="en-US" dirty="0"/>
+              <a:t>不同的团队类型</a:t>
+            </a:r>
+            <a:endParaRPr lang="en-US" dirty="0"/>
+          </a:p>
+        </p:txBody>
+      </p:sp>
+      <p:sp>
+        <p:nvSpPr>
+          <p:cNvPr id="3" name="Content Placeholder 2"/>
+          <p:cNvSpPr>
+            <a:spLocks noGrp="1"/>
+          </p:cNvSpPr>
+          <p:nvPr>
+            <p:ph idx="1"/>
+          </p:nvPr>
+        </p:nvSpPr>
+        <p:spPr/>
+        <p:txBody>
+          <a:bodyPr>
+            <a:normAutofit/>
+          </a:bodyPr>
+          <a:lstStyle/>
+          <a:p>
+            <a:pPr fontAlgn="ctr"/>
+            <a:r>
+              <a:rPr lang="en-US" dirty="0"/>
+              <a:t>SWAT team </a:t>
+            </a:r>
+            <a:r>
+              <a:rPr lang="zh-CN" altLang="en-US" dirty="0"/>
+              <a:t>特工团队</a:t>
+            </a:r>
+            <a:endParaRPr lang="en-US" dirty="0"/>
+          </a:p>
+          <a:p>
+            <a:pPr lvl="1"/>
+            <a:r>
+              <a:rPr lang="en-US" dirty="0"/>
+              <a:t>Skilled With Advanced Tools,  a group of people who are highly skilled with a particular tool or practice</a:t>
+            </a:r>
+          </a:p>
+          <a:p>
+            <a:pPr lvl="1"/>
+            <a:r>
+              <a:rPr lang="en-US" dirty="0"/>
+              <a:t>Solving a specific problem,  highly urgent. </a:t>
+            </a:r>
+          </a:p>
+          <a:p>
+            <a:pPr lvl="1"/>
+            <a:r>
+              <a:rPr lang="en-US" dirty="0"/>
+              <a:t>Example: </a:t>
+            </a:r>
+          </a:p>
+          <a:p>
+            <a:pPr lvl="2"/>
+            <a:r>
+              <a:rPr lang="en-US" dirty="0"/>
+              <a:t>Year-2000 project;   Security project; Tech Transfer Project</a:t>
+            </a:r>
+          </a:p>
+        </p:txBody>
+      </p:sp>
+    </p:spTree>
+    <p:extLst>
+      <p:ext uri="{BB962C8B-B14F-4D97-AF65-F5344CB8AC3E}">
+        <p14:creationId xmlns:p14="http://schemas.microsoft.com/office/powerpoint/2010/main" val="3308180656"/>
+      </p:ext>
+    </p:extLst>
+  </p:cSld>
+  <p:clrMapOvr>
+    <a:masterClrMapping/>
+  </p:clrMapOvr>
+</p:sld>
+</file>
+
+<file path=ppt/slides/slide2.xml><?xml version="1.0" encoding="utf-8"?>
+<p:sld xmlns:a="http://schemas.openxmlformats.org/drawingml/2006/main" xmlns:r="http://schemas.openxmlformats.org/officeDocument/2006/relationships" xmlns:p="http://schemas.openxmlformats.org/presentationml/2006/main">
+  <p:cSld>
+    <p:spTree>
+      <p:nvGrpSpPr>
+        <p:cNvPr id="1" name=""/>
+        <p:cNvGrpSpPr/>
+        <p:nvPr/>
+      </p:nvGrpSpPr>
+      <p:grpSpPr>
+        <a:xfrm>
+          <a:off x="0" y="0"/>
+          <a:ext cx="0" cy="0"/>
+          <a:chOff x="0" y="0"/>
+          <a:chExt cx="0" cy="0"/>
+        </a:xfrm>
+      </p:grpSpPr>
+      <p:sp>
+        <p:nvSpPr>
+          <p:cNvPr id="2" name="Title 1">
+            <a:extLst>
+              <a:ext uri="{FF2B5EF4-FFF2-40B4-BE49-F238E27FC236}">
+                <a16:creationId xmlns:a16="http://schemas.microsoft.com/office/drawing/2014/main" id="{12BB53EC-CC0F-4758-90EA-E0984E1257A3}"/>
+              </a:ext>
+            </a:extLst>
+          </p:cNvPr>
+          <p:cNvSpPr>
+            <a:spLocks noGrp="1"/>
+          </p:cNvSpPr>
+          <p:nvPr>
+            <p:ph type="title"/>
+          </p:nvPr>
+        </p:nvSpPr>
+        <p:spPr>
+          <a:xfrm>
+            <a:off x="868680" y="642593"/>
+            <a:ext cx="6281928" cy="1744183"/>
+          </a:xfrm>
+        </p:spPr>
+        <p:txBody>
+          <a:bodyPr>
+            <a:normAutofit/>
+          </a:bodyPr>
+          <a:lstStyle/>
+          <a:p>
+            <a:r>
+              <a:rPr lang="zh-CN" altLang="en-US" dirty="0">
+                <a:latin typeface="Microsoft YaHei UI" panose="020B0503020204020204" pitchFamily="34" charset="-122"/>
+                <a:ea typeface="Microsoft YaHei UI" panose="020B0503020204020204" pitchFamily="34" charset="-122"/>
+              </a:rPr>
+              <a:t>邹欣</a:t>
+            </a:r>
+            <a:endParaRPr lang="en-US" dirty="0">
+              <a:latin typeface="Microsoft YaHei UI" panose="020B0503020204020204" pitchFamily="34" charset="-122"/>
+              <a:ea typeface="Microsoft YaHei UI" panose="020B0503020204020204" pitchFamily="34" charset="-122"/>
+            </a:endParaRPr>
+          </a:p>
+        </p:txBody>
+      </p:sp>
+      <p:sp>
+        <p:nvSpPr>
+          <p:cNvPr id="9" name="Content Placeholder 8">
+            <a:extLst>
+              <a:ext uri="{FF2B5EF4-FFF2-40B4-BE49-F238E27FC236}">
+                <a16:creationId xmlns:a16="http://schemas.microsoft.com/office/drawing/2014/main" id="{A4530C10-8724-4957-904E-0C75FF19CA43}"/>
+              </a:ext>
+            </a:extLst>
+          </p:cNvPr>
+          <p:cNvSpPr>
+            <a:spLocks noGrp="1"/>
+          </p:cNvSpPr>
+          <p:nvPr>
+            <p:ph idx="1"/>
+          </p:nvPr>
+        </p:nvSpPr>
+        <p:spPr>
+          <a:xfrm>
+            <a:off x="868680" y="2386584"/>
+            <a:ext cx="6281928" cy="3648456"/>
+          </a:xfrm>
+        </p:spPr>
+        <p:txBody>
+          <a:bodyPr>
+            <a:normAutofit fontScale="55000" lnSpcReduction="20000"/>
+          </a:bodyPr>
+          <a:lstStyle/>
+          <a:p>
+            <a:pPr marL="0" indent="0">
+              <a:lnSpc>
+                <a:spcPct val="120000"/>
+              </a:lnSpc>
+              <a:spcBef>
+                <a:spcPts val="0"/>
+              </a:spcBef>
+              <a:spcAft>
+                <a:spcPts val="600"/>
+              </a:spcAft>
+              <a:buClrTx/>
+              <a:buNone/>
+              <a:defRPr/>
+            </a:pPr>
+            <a:r>
+              <a:rPr kumimoji="0" lang="zh-CN" altLang="en-US" b="0" i="0" u="none" strike="noStrike" kern="1200" cap="none" spc="0" normalizeH="0" baseline="0" noProof="0" dirty="0">
+                <a:ln>
+                  <a:noFill/>
+                </a:ln>
+                <a:effectLst/>
+                <a:uLnTx/>
+                <a:uFillTx/>
+                <a:latin typeface="Microsoft YaHei UI" panose="020B0503020204020204" pitchFamily="34" charset="-122"/>
+                <a:ea typeface="Microsoft YaHei UI" panose="020B0503020204020204" pitchFamily="34" charset="-122"/>
+              </a:rPr>
+              <a:t>现任</a:t>
+            </a:r>
+            <a:r>
+              <a:rPr lang="zh-CN" altLang="en-US" dirty="0">
+                <a:latin typeface="Microsoft YaHei UI" panose="020B0503020204020204" pitchFamily="34" charset="-122"/>
+                <a:ea typeface="Microsoft YaHei UI" panose="020B0503020204020204" pitchFamily="34" charset="-122"/>
+              </a:rPr>
+              <a:t> </a:t>
+            </a:r>
+            <a:r>
+              <a:rPr lang="en-US" altLang="zh-CN" dirty="0">
+                <a:latin typeface="Microsoft YaHei UI" panose="020B0503020204020204" pitchFamily="34" charset="-122"/>
+                <a:ea typeface="Microsoft YaHei UI" panose="020B0503020204020204" pitchFamily="34" charset="-122"/>
+              </a:rPr>
+              <a:t>CSDN</a:t>
+            </a:r>
+            <a:r>
+              <a:rPr lang="zh-CN" altLang="en-US" dirty="0">
+                <a:latin typeface="Microsoft YaHei UI" panose="020B0503020204020204" pitchFamily="34" charset="-122"/>
+                <a:ea typeface="Microsoft YaHei UI" panose="020B0503020204020204" pitchFamily="34" charset="-122"/>
+              </a:rPr>
+              <a:t> 副总裁 </a:t>
+            </a:r>
+            <a:r>
+              <a:rPr lang="en-US" altLang="zh-CN" dirty="0">
+                <a:latin typeface="Microsoft YaHei UI" panose="020B0503020204020204" pitchFamily="34" charset="-122"/>
+                <a:ea typeface="Microsoft YaHei UI" panose="020B0503020204020204" pitchFamily="34" charset="-122"/>
+                <a:hlinkClick r:id="rId2"/>
+              </a:rPr>
+              <a:t>http://edu.csdn.net/me/softwareteacher</a:t>
+            </a:r>
+            <a:endParaRPr kumimoji="0" lang="en-US" altLang="zh-CN" b="0" i="0" u="none" strike="noStrike" kern="1200" cap="none" spc="0" normalizeH="0" baseline="0" noProof="0" dirty="0">
+              <a:ln>
+                <a:noFill/>
+              </a:ln>
+              <a:effectLst/>
+              <a:uLnTx/>
+              <a:uFillTx/>
+              <a:latin typeface="Microsoft YaHei UI" panose="020B0503020204020204" pitchFamily="34" charset="-122"/>
+              <a:ea typeface="Microsoft YaHei UI" panose="020B0503020204020204" pitchFamily="34" charset="-122"/>
+            </a:endParaRPr>
+          </a:p>
+          <a:p>
+            <a:pPr marL="0" indent="0">
+              <a:lnSpc>
+                <a:spcPct val="120000"/>
+              </a:lnSpc>
+              <a:spcBef>
+                <a:spcPts val="0"/>
+              </a:spcBef>
+              <a:spcAft>
+                <a:spcPts val="600"/>
+              </a:spcAft>
+              <a:buClrTx/>
+              <a:buNone/>
+              <a:defRPr/>
+            </a:pPr>
+            <a:endParaRPr kumimoji="0" lang="en-US" altLang="zh-CN" b="0" i="0" u="none" strike="noStrike" kern="1200" cap="none" spc="0" normalizeH="0" baseline="0" noProof="0" dirty="0">
+              <a:ln>
+                <a:noFill/>
+              </a:ln>
+              <a:effectLst/>
+              <a:uLnTx/>
+              <a:uFillTx/>
+              <a:latin typeface="Microsoft YaHei UI" panose="020B0503020204020204" pitchFamily="34" charset="-122"/>
+              <a:ea typeface="Microsoft YaHei UI" panose="020B0503020204020204" pitchFamily="34" charset="-122"/>
+            </a:endParaRPr>
+          </a:p>
+          <a:p>
+            <a:pPr marL="0" marR="0" lvl="0" indent="0" defTabSz="914400" rtl="0" eaLnBrk="1" fontAlgn="auto" latinLnBrk="0" hangingPunct="1">
+              <a:lnSpc>
+                <a:spcPct val="120000"/>
+              </a:lnSpc>
+              <a:spcBef>
+                <a:spcPts val="0"/>
+              </a:spcBef>
+              <a:spcAft>
+                <a:spcPts val="600"/>
+              </a:spcAft>
+              <a:buClrTx/>
+              <a:buSzTx/>
+              <a:buFontTx/>
+              <a:buNone/>
+              <a:tabLst/>
+              <a:defRPr/>
+            </a:pPr>
+            <a:r>
+              <a:rPr kumimoji="0" lang="zh-CN" altLang="en-US" b="1" i="0" u="none" strike="noStrike" kern="1200" cap="none" spc="0" normalizeH="0" baseline="0" noProof="0" dirty="0">
+                <a:ln>
+                  <a:noFill/>
+                </a:ln>
+                <a:effectLst/>
+                <a:uLnTx/>
+                <a:uFillTx/>
+                <a:latin typeface="Microsoft YaHei UI" panose="020B0503020204020204" pitchFamily="34" charset="-122"/>
+                <a:ea typeface="Microsoft YaHei UI" panose="020B0503020204020204" pitchFamily="34" charset="-122"/>
+              </a:rPr>
+              <a:t>做过：</a:t>
+            </a:r>
+            <a:endParaRPr kumimoji="0" lang="en-US" altLang="zh-CN" b="1" i="0" u="none" strike="noStrike" kern="1200" cap="none" spc="0" normalizeH="0" baseline="0" noProof="0" dirty="0">
+              <a:ln>
+                <a:noFill/>
+              </a:ln>
+              <a:effectLst/>
+              <a:uLnTx/>
+              <a:uFillTx/>
+              <a:latin typeface="Microsoft YaHei UI" panose="020B0503020204020204" pitchFamily="34" charset="-122"/>
+              <a:ea typeface="Microsoft YaHei UI" panose="020B0503020204020204" pitchFamily="34" charset="-122"/>
+            </a:endParaRPr>
+          </a:p>
+          <a:p>
+            <a:pPr>
+              <a:lnSpc>
+                <a:spcPct val="120000"/>
+              </a:lnSpc>
+              <a:spcBef>
+                <a:spcPts val="0"/>
+              </a:spcBef>
+              <a:spcAft>
+                <a:spcPts val="600"/>
+              </a:spcAft>
+              <a:buClrTx/>
+              <a:defRPr/>
+            </a:pPr>
+            <a:r>
+              <a:rPr lang="en-US" altLang="zh-CN" dirty="0">
+                <a:latin typeface="Microsoft YaHei UI" panose="020B0503020204020204" pitchFamily="34" charset="-122"/>
+                <a:ea typeface="Microsoft YaHei UI" panose="020B0503020204020204" pitchFamily="34" charset="-122"/>
+              </a:rPr>
+              <a:t>MS</a:t>
+            </a:r>
+            <a:r>
+              <a:rPr lang="zh-CN" altLang="en-US" dirty="0">
+                <a:latin typeface="Microsoft YaHei UI" panose="020B0503020204020204" pitchFamily="34" charset="-122"/>
+                <a:ea typeface="Microsoft YaHei UI" panose="020B0503020204020204" pitchFamily="34" charset="-122"/>
+              </a:rPr>
+              <a:t> </a:t>
+            </a:r>
+            <a:r>
+              <a:rPr lang="en-US" altLang="zh-CN" dirty="0">
+                <a:latin typeface="Microsoft YaHei UI" panose="020B0503020204020204" pitchFamily="34" charset="-122"/>
+                <a:ea typeface="Microsoft YaHei UI" panose="020B0503020204020204" pitchFamily="34" charset="-122"/>
+              </a:rPr>
+              <a:t>Office</a:t>
+            </a:r>
+            <a:r>
+              <a:rPr lang="zh-CN" altLang="en-US" dirty="0">
+                <a:latin typeface="Microsoft YaHei UI" panose="020B0503020204020204" pitchFamily="34" charset="-122"/>
+                <a:ea typeface="Microsoft YaHei UI" panose="020B0503020204020204" pitchFamily="34" charset="-122"/>
+              </a:rPr>
+              <a:t>，</a:t>
+            </a:r>
+            <a:r>
+              <a:rPr lang="en-US" altLang="zh-CN" dirty="0">
+                <a:latin typeface="Microsoft YaHei UI" panose="020B0503020204020204" pitchFamily="34" charset="-122"/>
+                <a:ea typeface="Microsoft YaHei UI" panose="020B0503020204020204" pitchFamily="34" charset="-122"/>
+              </a:rPr>
+              <a:t>Bing</a:t>
+            </a:r>
+            <a:r>
+              <a:rPr lang="zh-CN" altLang="en-US" dirty="0">
+                <a:latin typeface="Microsoft YaHei UI" panose="020B0503020204020204" pitchFamily="34" charset="-122"/>
+                <a:ea typeface="Microsoft YaHei UI" panose="020B0503020204020204" pitchFamily="34" charset="-122"/>
+              </a:rPr>
+              <a:t>， </a:t>
+            </a:r>
+            <a:r>
+              <a:rPr lang="en-US" altLang="zh-CN" dirty="0">
+                <a:latin typeface="Microsoft YaHei UI" panose="020B0503020204020204" pitchFamily="34" charset="-122"/>
+                <a:ea typeface="Microsoft YaHei UI" panose="020B0503020204020204" pitchFamily="34" charset="-122"/>
+              </a:rPr>
+              <a:t>Windows</a:t>
+            </a:r>
+            <a:r>
+              <a:rPr lang="zh-CN" altLang="en-US" dirty="0">
+                <a:latin typeface="Microsoft YaHei UI" panose="020B0503020204020204" pitchFamily="34" charset="-122"/>
+                <a:ea typeface="Microsoft YaHei UI" panose="020B0503020204020204" pitchFamily="34" charset="-122"/>
+              </a:rPr>
+              <a:t>，</a:t>
+            </a:r>
+            <a:r>
+              <a:rPr lang="en-US" altLang="zh-CN" dirty="0">
+                <a:latin typeface="Microsoft YaHei UI" panose="020B0503020204020204" pitchFamily="34" charset="-122"/>
+                <a:ea typeface="Microsoft YaHei UI" panose="020B0503020204020204" pitchFamily="34" charset="-122"/>
+              </a:rPr>
+              <a:t>Azure</a:t>
+            </a:r>
+          </a:p>
+          <a:p>
+            <a:pPr>
+              <a:lnSpc>
+                <a:spcPct val="120000"/>
+              </a:lnSpc>
+              <a:spcBef>
+                <a:spcPts val="0"/>
+              </a:spcBef>
+              <a:spcAft>
+                <a:spcPts val="600"/>
+              </a:spcAft>
+              <a:buClrTx/>
+              <a:defRPr/>
+            </a:pPr>
+            <a:r>
+              <a:rPr kumimoji="0" lang="en-US" altLang="zh-CN" b="0" i="0" u="none" strike="noStrike" kern="1200" cap="none" spc="0" normalizeH="0" baseline="0" noProof="0" dirty="0">
+                <a:ln>
+                  <a:noFill/>
+                </a:ln>
+                <a:effectLst/>
+                <a:uLnTx/>
+                <a:uFillTx/>
+                <a:latin typeface="Microsoft YaHei UI" panose="020B0503020204020204" pitchFamily="34" charset="-122"/>
+                <a:ea typeface="Microsoft YaHei UI" panose="020B0503020204020204" pitchFamily="34" charset="-122"/>
+              </a:rPr>
+              <a:t>MSRA </a:t>
+            </a:r>
+            <a:r>
+              <a:rPr kumimoji="0" lang="zh-CN" altLang="en-US" b="0" i="0" u="none" strike="noStrike" kern="1200" cap="none" spc="0" normalizeH="0" baseline="0" noProof="0" dirty="0">
+                <a:ln>
+                  <a:noFill/>
+                </a:ln>
+                <a:effectLst/>
+                <a:uLnTx/>
+                <a:uFillTx/>
+                <a:latin typeface="Microsoft YaHei UI" panose="020B0503020204020204" pitchFamily="34" charset="-122"/>
+                <a:ea typeface="Microsoft YaHei UI" panose="020B0503020204020204" pitchFamily="34" charset="-122"/>
+              </a:rPr>
+              <a:t>创新项目（学术搜索，</a:t>
+            </a:r>
+            <a:r>
+              <a:rPr kumimoji="0" lang="en-US" altLang="zh-CN" b="0" i="0" u="none" strike="noStrike" kern="1200" cap="none" spc="0" normalizeH="0" baseline="0" noProof="0" dirty="0" err="1">
+                <a:ln>
+                  <a:noFill/>
+                </a:ln>
+                <a:effectLst/>
+                <a:uLnTx/>
+                <a:uFillTx/>
+                <a:latin typeface="Microsoft YaHei UI" panose="020B0503020204020204" pitchFamily="34" charset="-122"/>
+                <a:ea typeface="Microsoft YaHei UI" panose="020B0503020204020204" pitchFamily="34" charset="-122"/>
+              </a:rPr>
+              <a:t>FaceSDK</a:t>
+            </a:r>
+            <a:r>
+              <a:rPr kumimoji="0" lang="en-US" altLang="zh-CN" b="0" i="0" u="none" strike="noStrike" kern="1200" cap="none" spc="0" normalizeH="0" baseline="0" noProof="0" dirty="0">
+                <a:ln>
+                  <a:noFill/>
+                </a:ln>
+                <a:effectLst/>
+                <a:uLnTx/>
+                <a:uFillTx/>
+                <a:latin typeface="Microsoft YaHei UI" panose="020B0503020204020204" pitchFamily="34" charset="-122"/>
+                <a:ea typeface="Microsoft YaHei UI" panose="020B0503020204020204" pitchFamily="34" charset="-122"/>
+              </a:rPr>
+              <a:t> </a:t>
+            </a:r>
+            <a:r>
+              <a:rPr kumimoji="0" lang="zh-CN" altLang="en-US" b="0" i="0" u="none" strike="noStrike" kern="1200" cap="none" spc="0" normalizeH="0" baseline="0" noProof="0" dirty="0">
+                <a:ln>
+                  <a:noFill/>
+                </a:ln>
+                <a:effectLst/>
+                <a:uLnTx/>
+                <a:uFillTx/>
+                <a:latin typeface="Microsoft YaHei UI" panose="020B0503020204020204" pitchFamily="34" charset="-122"/>
+                <a:ea typeface="Microsoft YaHei UI" panose="020B0503020204020204" pitchFamily="34" charset="-122"/>
+              </a:rPr>
+              <a:t>等</a:t>
+            </a:r>
+            <a:r>
+              <a:rPr kumimoji="0" lang="en-US" altLang="zh-CN" b="0" i="0" u="none" strike="noStrike" kern="1200" cap="none" spc="0" normalizeH="0" baseline="0" noProof="0" dirty="0">
+                <a:ln>
+                  <a:noFill/>
+                </a:ln>
+                <a:effectLst/>
+                <a:uLnTx/>
+                <a:uFillTx/>
+                <a:latin typeface="Microsoft YaHei UI" panose="020B0503020204020204" pitchFamily="34" charset="-122"/>
+                <a:ea typeface="Microsoft YaHei UI" panose="020B0503020204020204" pitchFamily="34" charset="-122"/>
+              </a:rPr>
+              <a:t>)</a:t>
+            </a:r>
+          </a:p>
+          <a:p>
+            <a:pPr marL="0" marR="0" lvl="0" indent="0" defTabSz="914400" rtl="0" eaLnBrk="1" fontAlgn="auto" latinLnBrk="0" hangingPunct="1">
+              <a:lnSpc>
+                <a:spcPct val="120000"/>
+              </a:lnSpc>
+              <a:spcBef>
+                <a:spcPts val="0"/>
+              </a:spcBef>
+              <a:spcAft>
+                <a:spcPts val="600"/>
+              </a:spcAft>
+              <a:buClrTx/>
+              <a:buSzTx/>
+              <a:buFontTx/>
+              <a:buNone/>
+              <a:tabLst/>
+              <a:defRPr/>
+            </a:pPr>
+            <a:r>
+              <a:rPr kumimoji="0" lang="zh-CN" altLang="en-US" b="1" i="0" u="none" strike="noStrike" kern="1200" cap="none" spc="0" normalizeH="0" baseline="0" noProof="0" dirty="0">
+                <a:ln>
+                  <a:noFill/>
+                </a:ln>
+                <a:effectLst/>
+                <a:uLnTx/>
+                <a:uFillTx/>
+                <a:latin typeface="Microsoft YaHei UI" panose="020B0503020204020204" pitchFamily="34" charset="-122"/>
+                <a:ea typeface="Microsoft YaHei UI" panose="020B0503020204020204" pitchFamily="34" charset="-122"/>
+              </a:rPr>
+              <a:t>搞过：</a:t>
+            </a:r>
+            <a:endParaRPr kumimoji="0" lang="en-US" altLang="zh-CN" b="1" i="0" u="none" strike="noStrike" kern="1200" cap="none" spc="0" normalizeH="0" baseline="0" noProof="0" dirty="0">
+              <a:ln>
+                <a:noFill/>
+              </a:ln>
+              <a:effectLst/>
+              <a:uLnTx/>
+              <a:uFillTx/>
+              <a:latin typeface="Microsoft YaHei UI" panose="020B0503020204020204" pitchFamily="34" charset="-122"/>
+              <a:ea typeface="Microsoft YaHei UI" panose="020B0503020204020204" pitchFamily="34" charset="-122"/>
+            </a:endParaRPr>
+          </a:p>
+          <a:p>
+            <a:pPr>
+              <a:lnSpc>
+                <a:spcPct val="120000"/>
+              </a:lnSpc>
+              <a:spcBef>
+                <a:spcPts val="0"/>
+              </a:spcBef>
+              <a:spcAft>
+                <a:spcPts val="600"/>
+              </a:spcAft>
+              <a:buClrTx/>
+              <a:defRPr/>
+            </a:pPr>
+            <a:r>
+              <a:rPr kumimoji="0" lang="zh-CN" altLang="en-US" b="0" i="0" u="none" strike="noStrike" kern="1200" cap="none" spc="0" normalizeH="0" baseline="0" noProof="0" dirty="0">
+                <a:ln>
+                  <a:noFill/>
+                </a:ln>
+                <a:effectLst/>
+                <a:uLnTx/>
+                <a:uFillTx/>
+                <a:latin typeface="Microsoft YaHei UI" panose="020B0503020204020204" pitchFamily="34" charset="-122"/>
+                <a:ea typeface="Microsoft YaHei UI" panose="020B0503020204020204" pitchFamily="34" charset="-122"/>
+              </a:rPr>
+              <a:t>网上软件工程教育改革 （北航 </a:t>
+            </a:r>
+            <a:r>
+              <a:rPr kumimoji="0" lang="en-US" altLang="zh-CN" b="0" i="0" u="none" strike="noStrike" kern="1200" cap="none" spc="0" normalizeH="0" baseline="0" noProof="0" dirty="0">
+                <a:ln>
+                  <a:noFill/>
+                </a:ln>
+                <a:effectLst/>
+                <a:uLnTx/>
+                <a:uFillTx/>
+                <a:latin typeface="Microsoft YaHei UI" panose="020B0503020204020204" pitchFamily="34" charset="-122"/>
+                <a:ea typeface="Microsoft YaHei UI" panose="020B0503020204020204" pitchFamily="34" charset="-122"/>
+              </a:rPr>
+              <a:t>+</a:t>
+            </a:r>
+            <a:r>
+              <a:rPr kumimoji="0" lang="zh-CN" altLang="en-US" b="0" i="0" u="none" strike="noStrike" kern="1200" cap="none" spc="0" normalizeH="0" baseline="0" noProof="0" dirty="0">
+                <a:ln>
+                  <a:noFill/>
+                </a:ln>
+                <a:effectLst/>
+                <a:uLnTx/>
+                <a:uFillTx/>
+                <a:latin typeface="Microsoft YaHei UI" panose="020B0503020204020204" pitchFamily="34" charset="-122"/>
+                <a:ea typeface="Microsoft YaHei UI" panose="020B0503020204020204" pitchFamily="34" charset="-122"/>
+              </a:rPr>
+              <a:t> </a:t>
+            </a:r>
+            <a:r>
+              <a:rPr lang="en-US" altLang="zh-CN" dirty="0">
+                <a:latin typeface="Microsoft YaHei UI" panose="020B0503020204020204" pitchFamily="34" charset="-122"/>
+                <a:ea typeface="Microsoft YaHei UI" panose="020B0503020204020204" pitchFamily="34" charset="-122"/>
+              </a:rPr>
+              <a:t>50 </a:t>
+            </a:r>
+            <a:r>
+              <a:rPr lang="zh-CN" altLang="en-US" dirty="0">
+                <a:latin typeface="Microsoft YaHei UI" panose="020B0503020204020204" pitchFamily="34" charset="-122"/>
+                <a:ea typeface="Microsoft YaHei UI" panose="020B0503020204020204" pitchFamily="34" charset="-122"/>
+              </a:rPr>
+              <a:t>学校</a:t>
+            </a:r>
+            <a:r>
+              <a:rPr kumimoji="0" lang="zh-CN" altLang="en-US" b="0" i="0" u="none" strike="noStrike" kern="1200" cap="none" spc="0" normalizeH="0" baseline="0" noProof="0" dirty="0">
+                <a:ln>
+                  <a:noFill/>
+                </a:ln>
+                <a:effectLst/>
+                <a:uLnTx/>
+                <a:uFillTx/>
+                <a:latin typeface="Microsoft YaHei UI" panose="020B0503020204020204" pitchFamily="34" charset="-122"/>
+                <a:ea typeface="Microsoft YaHei UI" panose="020B0503020204020204" pitchFamily="34" charset="-122"/>
+              </a:rPr>
+              <a:t>，</a:t>
+            </a:r>
+            <a:r>
+              <a:rPr lang="en-US" altLang="zh-CN" dirty="0">
+                <a:latin typeface="Microsoft YaHei UI" panose="020B0503020204020204" pitchFamily="34" charset="-122"/>
+                <a:ea typeface="Microsoft YaHei UI" panose="020B0503020204020204" pitchFamily="34" charset="-122"/>
+              </a:rPr>
+              <a:t>3</a:t>
+            </a:r>
+            <a:r>
+              <a:rPr lang="zh-CN" altLang="en-US" dirty="0">
+                <a:latin typeface="Microsoft YaHei UI" panose="020B0503020204020204" pitchFamily="34" charset="-122"/>
+                <a:ea typeface="Microsoft YaHei UI" panose="020B0503020204020204" pitchFamily="34" charset="-122"/>
+              </a:rPr>
+              <a:t>万学生</a:t>
+            </a:r>
+            <a:r>
+              <a:rPr kumimoji="0" lang="zh-CN" altLang="en-US" b="0" i="0" u="none" strike="noStrike" kern="1200" cap="none" spc="0" normalizeH="0" baseline="0" noProof="0" dirty="0">
+                <a:ln>
+                  <a:noFill/>
+                </a:ln>
+                <a:effectLst/>
+                <a:uLnTx/>
+                <a:uFillTx/>
+                <a:latin typeface="Microsoft YaHei UI" panose="020B0503020204020204" pitchFamily="34" charset="-122"/>
+                <a:ea typeface="Microsoft YaHei UI" panose="020B0503020204020204" pitchFamily="34" charset="-122"/>
+              </a:rPr>
+              <a:t>）</a:t>
+            </a:r>
+            <a:endParaRPr kumimoji="0" lang="en-US" altLang="zh-CN" b="0" i="0" u="none" strike="noStrike" kern="1200" cap="none" spc="0" normalizeH="0" baseline="0" noProof="0" dirty="0">
+              <a:ln>
+                <a:noFill/>
+              </a:ln>
+              <a:effectLst/>
+              <a:uLnTx/>
+              <a:uFillTx/>
+              <a:latin typeface="Microsoft YaHei UI" panose="020B0503020204020204" pitchFamily="34" charset="-122"/>
+              <a:ea typeface="Microsoft YaHei UI" panose="020B0503020204020204" pitchFamily="34" charset="-122"/>
+            </a:endParaRPr>
+          </a:p>
+          <a:p>
+            <a:pPr marL="0" indent="0">
+              <a:lnSpc>
+                <a:spcPct val="120000"/>
+              </a:lnSpc>
+              <a:spcBef>
+                <a:spcPts val="0"/>
+              </a:spcBef>
+              <a:spcAft>
+                <a:spcPts val="600"/>
+              </a:spcAft>
+              <a:buClrTx/>
+              <a:buNone/>
+              <a:defRPr/>
+            </a:pPr>
+            <a:r>
+              <a:rPr lang="zh-CN" altLang="en-US" b="1" dirty="0">
+                <a:latin typeface="Microsoft YaHei UI" panose="020B0503020204020204" pitchFamily="34" charset="-122"/>
+                <a:ea typeface="Microsoft YaHei UI" panose="020B0503020204020204" pitchFamily="34" charset="-122"/>
+              </a:rPr>
+              <a:t>毕业：</a:t>
+            </a:r>
+            <a:endParaRPr lang="en-US" altLang="zh-CN" b="1" dirty="0">
+              <a:latin typeface="Microsoft YaHei UI" panose="020B0503020204020204" pitchFamily="34" charset="-122"/>
+              <a:ea typeface="Microsoft YaHei UI" panose="020B0503020204020204" pitchFamily="34" charset="-122"/>
+            </a:endParaRPr>
+          </a:p>
+          <a:p>
+            <a:pPr>
+              <a:lnSpc>
+                <a:spcPct val="120000"/>
+              </a:lnSpc>
+              <a:spcBef>
+                <a:spcPts val="0"/>
+              </a:spcBef>
+              <a:spcAft>
+                <a:spcPts val="600"/>
+              </a:spcAft>
+              <a:buClrTx/>
+              <a:defRPr/>
+            </a:pPr>
+            <a:r>
+              <a:rPr lang="zh-CN" altLang="en-US" dirty="0">
+                <a:latin typeface="Microsoft YaHei UI" panose="020B0503020204020204" pitchFamily="34" charset="-122"/>
+                <a:ea typeface="Microsoft YaHei UI" panose="020B0503020204020204" pitchFamily="34" charset="-122"/>
+              </a:rPr>
+              <a:t>北京大学 计算机软件 学士</a:t>
+            </a:r>
+            <a:endParaRPr lang="en-US" altLang="zh-CN" dirty="0">
+              <a:latin typeface="Microsoft YaHei UI" panose="020B0503020204020204" pitchFamily="34" charset="-122"/>
+              <a:ea typeface="Microsoft YaHei UI" panose="020B0503020204020204" pitchFamily="34" charset="-122"/>
+            </a:endParaRPr>
+          </a:p>
+          <a:p>
+            <a:pPr>
+              <a:lnSpc>
+                <a:spcPct val="120000"/>
+              </a:lnSpc>
+              <a:spcBef>
+                <a:spcPts val="0"/>
+              </a:spcBef>
+              <a:spcAft>
+                <a:spcPts val="600"/>
+              </a:spcAft>
+              <a:buClrTx/>
+              <a:defRPr/>
+            </a:pPr>
+            <a:r>
+              <a:rPr lang="en-US" altLang="zh-CN" dirty="0">
+                <a:latin typeface="Microsoft YaHei UI" panose="020B0503020204020204" pitchFamily="34" charset="-122"/>
+                <a:ea typeface="Microsoft YaHei UI" panose="020B0503020204020204" pitchFamily="34" charset="-122"/>
+              </a:rPr>
+              <a:t>Wayne</a:t>
+            </a:r>
+            <a:r>
+              <a:rPr lang="zh-CN" altLang="en-US" dirty="0">
+                <a:latin typeface="Microsoft YaHei UI" panose="020B0503020204020204" pitchFamily="34" charset="-122"/>
+                <a:ea typeface="Microsoft YaHei UI" panose="020B0503020204020204" pitchFamily="34" charset="-122"/>
+              </a:rPr>
+              <a:t> </a:t>
+            </a:r>
+            <a:r>
+              <a:rPr lang="en-US" altLang="zh-CN" dirty="0">
+                <a:latin typeface="Microsoft YaHei UI" panose="020B0503020204020204" pitchFamily="34" charset="-122"/>
+                <a:ea typeface="Microsoft YaHei UI" panose="020B0503020204020204" pitchFamily="34" charset="-122"/>
+              </a:rPr>
+              <a:t>State University, </a:t>
+            </a:r>
+            <a:r>
+              <a:rPr lang="zh-CN" altLang="en-US" dirty="0">
+                <a:latin typeface="Microsoft YaHei UI" panose="020B0503020204020204" pitchFamily="34" charset="-122"/>
+                <a:ea typeface="Microsoft YaHei UI" panose="020B0503020204020204" pitchFamily="34" charset="-122"/>
+              </a:rPr>
+              <a:t>软件专业 硕士</a:t>
+            </a:r>
+            <a:endParaRPr lang="en-US" altLang="zh-CN" dirty="0">
+              <a:latin typeface="Microsoft YaHei UI" panose="020B0503020204020204" pitchFamily="34" charset="-122"/>
+              <a:ea typeface="Microsoft YaHei UI" panose="020B0503020204020204" pitchFamily="34" charset="-122"/>
+            </a:endParaRPr>
+          </a:p>
+          <a:p>
+            <a:pPr marL="0" indent="0">
+              <a:lnSpc>
+                <a:spcPct val="120000"/>
+              </a:lnSpc>
+              <a:spcBef>
+                <a:spcPts val="0"/>
+              </a:spcBef>
+              <a:spcAft>
+                <a:spcPts val="600"/>
+              </a:spcAft>
+              <a:buClrTx/>
+              <a:buNone/>
+              <a:defRPr/>
+            </a:pPr>
+            <a:endParaRPr kumimoji="0" lang="en-US" altLang="zh-CN" b="0" i="0" u="none" strike="noStrike" kern="1200" cap="none" spc="0" normalizeH="0" baseline="0" noProof="0" dirty="0">
+              <a:ln>
+                <a:noFill/>
+              </a:ln>
+              <a:effectLst/>
+              <a:uLnTx/>
+              <a:uFillTx/>
+              <a:latin typeface="Microsoft YaHei UI" panose="020B0503020204020204" pitchFamily="34" charset="-122"/>
+              <a:ea typeface="Microsoft YaHei UI" panose="020B0503020204020204" pitchFamily="34" charset="-122"/>
+            </a:endParaRPr>
+          </a:p>
+        </p:txBody>
+      </p:sp>
+      <p:pic>
+        <p:nvPicPr>
+          <p:cNvPr id="5" name="Content Placeholder 4" descr="A person posing for the camera&#10;&#10;Description automatically generated">
+            <a:extLst>
+              <a:ext uri="{FF2B5EF4-FFF2-40B4-BE49-F238E27FC236}">
+                <a16:creationId xmlns:a16="http://schemas.microsoft.com/office/drawing/2014/main" id="{0E7AD79F-96DA-4AC8-8AD0-2DA1127ED55D}"/>
+              </a:ext>
+            </a:extLst>
+          </p:cNvPr>
+          <p:cNvPicPr>
+            <a:picLocks noChangeAspect="1"/>
+          </p:cNvPicPr>
+          <p:nvPr/>
+        </p:nvPicPr>
+        <p:blipFill rotWithShape="1">
+          <a:blip r:embed="rId3" cstate="print">
+            <a:extLst>
+              <a:ext uri="{28A0092B-C50C-407E-A947-70E740481C1C}">
+                <a14:useLocalDpi xmlns:a14="http://schemas.microsoft.com/office/drawing/2010/main" val="0"/>
+              </a:ext>
+            </a:extLst>
+          </a:blip>
+          <a:srcRect l="471" r="2717" b="-2"/>
+          <a:stretch/>
+        </p:blipFill>
+        <p:spPr>
+          <a:xfrm>
+            <a:off x="7837371" y="237744"/>
+            <a:ext cx="4124416" cy="6382512"/>
+          </a:xfrm>
+          <a:prstGeom prst="rect">
+            <a:avLst/>
+          </a:prstGeom>
+        </p:spPr>
+      </p:pic>
+    </p:spTree>
+    <p:extLst>
+      <p:ext uri="{BB962C8B-B14F-4D97-AF65-F5344CB8AC3E}">
+        <p14:creationId xmlns:p14="http://schemas.microsoft.com/office/powerpoint/2010/main" val="4277628270"/>
+      </p:ext>
+    </p:extLst>
+  </p:cSld>
+  <p:clrMapOvr>
+    <a:masterClrMapping/>
+  </p:clrMapOvr>
+</p:sld>
+</file>
+
+<file path=ppt/slides/slide20.xml><?xml version="1.0" encoding="utf-8"?>
+<p:sld xmlns:a="http://schemas.openxmlformats.org/drawingml/2006/main" xmlns:r="http://schemas.openxmlformats.org/officeDocument/2006/relationships" xmlns:p="http://schemas.openxmlformats.org/presentationml/2006/main">
+  <p:cSld>
+    <p:spTree>
+      <p:nvGrpSpPr>
+        <p:cNvPr id="1" name=""/>
+        <p:cNvGrpSpPr/>
+        <p:nvPr/>
+      </p:nvGrpSpPr>
+      <p:grpSpPr>
+        <a:xfrm>
+          <a:off x="0" y="0"/>
+          <a:ext cx="0" cy="0"/>
+          <a:chOff x="0" y="0"/>
+          <a:chExt cx="0" cy="0"/>
+        </a:xfrm>
+      </p:grpSpPr>
+      <p:sp>
+        <p:nvSpPr>
+          <p:cNvPr id="2" name="Title 1"/>
+          <p:cNvSpPr>
+            <a:spLocks noGrp="1"/>
+          </p:cNvSpPr>
+          <p:nvPr>
+            <p:ph type="title"/>
+          </p:nvPr>
+        </p:nvSpPr>
+        <p:spPr/>
+        <p:txBody>
+          <a:bodyPr/>
+          <a:lstStyle/>
+          <a:p>
+            <a:r>
+              <a:rPr lang="zh-CN" altLang="en-US" dirty="0"/>
+              <a:t>不同的团队类型</a:t>
+            </a:r>
+            <a:endParaRPr lang="en-US" dirty="0"/>
+          </a:p>
+        </p:txBody>
+      </p:sp>
+      <p:sp>
+        <p:nvSpPr>
+          <p:cNvPr id="3" name="Content Placeholder 2"/>
+          <p:cNvSpPr>
+            <a:spLocks noGrp="1"/>
+          </p:cNvSpPr>
+          <p:nvPr>
+            <p:ph idx="1"/>
+          </p:nvPr>
+        </p:nvSpPr>
+        <p:spPr/>
+        <p:txBody>
+          <a:bodyPr>
+            <a:normAutofit/>
+          </a:bodyPr>
+          <a:lstStyle/>
+          <a:p>
+            <a:pPr fontAlgn="ctr"/>
+            <a:r>
+              <a:rPr lang="en-US" dirty="0"/>
+              <a:t>Chief-Programmer Team  (surgical team)</a:t>
+            </a:r>
+          </a:p>
+          <a:p>
+            <a:pPr lvl="1"/>
+            <a:r>
+              <a:rPr lang="zh-CN" altLang="en-US" dirty="0"/>
+              <a:t>主治医师模式</a:t>
+            </a:r>
+            <a:endParaRPr lang="en-US" altLang="zh-CN" dirty="0"/>
+          </a:p>
+          <a:p>
+            <a:pPr lvl="1"/>
+            <a:r>
+              <a:rPr lang="en-US" dirty="0"/>
+              <a:t>Chief-programmer handles the bulk of the design and code,  other team members are in supporting role (backup programmer, admin, tool-smith, language lawyer, specialist)</a:t>
+            </a:r>
+          </a:p>
+          <a:p>
+            <a:pPr lvl="1"/>
+            <a:r>
+              <a:rPr lang="en-US" dirty="0"/>
+              <a:t>Example:</a:t>
+            </a:r>
+          </a:p>
+          <a:p>
+            <a:pPr lvl="2"/>
+            <a:r>
+              <a:rPr lang="en-US" dirty="0"/>
+              <a:t>IBM System</a:t>
+            </a:r>
+            <a:r>
+              <a:rPr lang="zh-CN" altLang="en-US" dirty="0"/>
+              <a:t> </a:t>
+            </a:r>
+            <a:r>
+              <a:rPr lang="en-US" dirty="0"/>
+              <a:t>360 </a:t>
+            </a:r>
+            <a:r>
+              <a:rPr lang="en-US" dirty="0" err="1"/>
+              <a:t>的开发团队</a:t>
+            </a:r>
+            <a:r>
+              <a:rPr lang="zh-CN" altLang="en-US" dirty="0"/>
+              <a:t>，后来的经验总结为 </a:t>
+            </a:r>
+            <a:r>
+              <a:rPr lang="en-US" altLang="zh-CN" dirty="0"/>
+              <a:t>《</a:t>
+            </a:r>
+            <a:r>
+              <a:rPr lang="zh-CN" altLang="en-US" dirty="0"/>
+              <a:t>人月神话</a:t>
+            </a:r>
+            <a:r>
+              <a:rPr lang="en-US" altLang="zh-CN" dirty="0"/>
+              <a:t>》</a:t>
+            </a:r>
+          </a:p>
+          <a:p>
+            <a:pPr lvl="2"/>
+            <a:r>
+              <a:rPr lang="zh-CN" altLang="en-US" dirty="0"/>
+              <a:t>一些学校的软件团队退化为“一人加班，其他人抱大腿”</a:t>
+            </a:r>
+            <a:endParaRPr lang="en-US" dirty="0"/>
+          </a:p>
+        </p:txBody>
+      </p:sp>
+    </p:spTree>
+    <p:extLst>
+      <p:ext uri="{BB962C8B-B14F-4D97-AF65-F5344CB8AC3E}">
+        <p14:creationId xmlns:p14="http://schemas.microsoft.com/office/powerpoint/2010/main" val="3734779282"/>
+      </p:ext>
+    </p:extLst>
+  </p:cSld>
+  <p:clrMapOvr>
+    <a:masterClrMapping/>
+  </p:clrMapOvr>
+</p:sld>
+</file>
+
+<file path=ppt/slides/slide21.xml><?xml version="1.0" encoding="utf-8"?>
+<p:sld xmlns:a="http://schemas.openxmlformats.org/drawingml/2006/main" xmlns:r="http://schemas.openxmlformats.org/officeDocument/2006/relationships" xmlns:p="http://schemas.openxmlformats.org/presentationml/2006/main">
+  <p:cSld>
+    <p:spTree>
+      <p:nvGrpSpPr>
+        <p:cNvPr id="1" name=""/>
+        <p:cNvGrpSpPr/>
+        <p:nvPr/>
+      </p:nvGrpSpPr>
+      <p:grpSpPr>
+        <a:xfrm>
+          <a:off x="0" y="0"/>
+          <a:ext cx="0" cy="0"/>
+          <a:chOff x="0" y="0"/>
+          <a:chExt cx="0" cy="0"/>
+        </a:xfrm>
+      </p:grpSpPr>
+      <p:sp>
+        <p:nvSpPr>
+          <p:cNvPr id="2" name="Title 1"/>
+          <p:cNvSpPr>
+            <a:spLocks noGrp="1"/>
+          </p:cNvSpPr>
+          <p:nvPr>
+            <p:ph type="title"/>
+          </p:nvPr>
+        </p:nvSpPr>
+        <p:spPr/>
+        <p:txBody>
+          <a:bodyPr>
+            <a:normAutofit/>
+          </a:bodyPr>
+          <a:lstStyle/>
+          <a:p>
+            <a:r>
+              <a:rPr lang="zh-CN" altLang="en-US" dirty="0"/>
+              <a:t>明星团队 </a:t>
+            </a:r>
+            <a:r>
+              <a:rPr lang="en-US" altLang="zh-CN" dirty="0"/>
+              <a:t>/ </a:t>
+            </a:r>
+            <a:r>
+              <a:rPr lang="zh-CN" altLang="en-US" dirty="0"/>
+              <a:t>社区团队</a:t>
+            </a:r>
+            <a:endParaRPr lang="en-US" dirty="0"/>
+          </a:p>
+        </p:txBody>
+      </p:sp>
+      <p:sp>
+        <p:nvSpPr>
+          <p:cNvPr id="3" name="Content Placeholder 2"/>
+          <p:cNvSpPr>
+            <a:spLocks noGrp="1"/>
+          </p:cNvSpPr>
+          <p:nvPr>
+            <p:ph idx="1"/>
+          </p:nvPr>
+        </p:nvSpPr>
+        <p:spPr/>
+        <p:txBody>
+          <a:bodyPr>
+            <a:normAutofit fontScale="55000" lnSpcReduction="20000"/>
+          </a:bodyPr>
+          <a:lstStyle/>
+          <a:p>
+            <a:pPr marL="118872" indent="0">
+              <a:lnSpc>
+                <a:spcPct val="120000"/>
+              </a:lnSpc>
+              <a:buNone/>
+            </a:pPr>
+            <a:r>
+              <a:rPr lang="en-US" altLang="zh-CN" b="1" dirty="0"/>
+              <a:t>Superstar</a:t>
+            </a:r>
+            <a:r>
+              <a:rPr lang="en-US" b="1" dirty="0"/>
+              <a:t> Team </a:t>
+            </a:r>
+            <a:r>
+              <a:rPr lang="zh-CN" altLang="en-US" b="1" dirty="0"/>
+              <a:t>（明星团队）</a:t>
+            </a:r>
+            <a:endParaRPr lang="en-US" b="1" dirty="0"/>
+          </a:p>
+          <a:p>
+            <a:pPr>
+              <a:lnSpc>
+                <a:spcPct val="120000"/>
+              </a:lnSpc>
+            </a:pPr>
+            <a:r>
+              <a:rPr lang="en-US" dirty="0"/>
+              <a:t>A group of talented </a:t>
+            </a:r>
+            <a:r>
+              <a:rPr lang="en-US" dirty="0" err="1"/>
+              <a:t>devs</a:t>
+            </a:r>
+            <a:r>
+              <a:rPr lang="en-US" dirty="0"/>
+              <a:t>, specialist, with managers to support them,  the star is the player</a:t>
+            </a:r>
+          </a:p>
+          <a:p>
+            <a:pPr lvl="1">
+              <a:lnSpc>
+                <a:spcPct val="120000"/>
+              </a:lnSpc>
+            </a:pPr>
+            <a:r>
+              <a:rPr lang="en-US" dirty="0"/>
+              <a:t>Example: </a:t>
+            </a:r>
+            <a:r>
+              <a:rPr lang="zh-CN" altLang="en-US" dirty="0"/>
+              <a:t>刘翔 </a:t>
+            </a:r>
+            <a:r>
+              <a:rPr lang="en-US" altLang="zh-CN" dirty="0"/>
+              <a:t>– </a:t>
+            </a:r>
+            <a:r>
+              <a:rPr lang="zh-CN" altLang="en-US" dirty="0"/>
+              <a:t>翔之队</a:t>
+            </a:r>
+            <a:endParaRPr lang="en-US" dirty="0"/>
+          </a:p>
+          <a:p>
+            <a:pPr>
+              <a:lnSpc>
+                <a:spcPct val="120000"/>
+              </a:lnSpc>
+            </a:pPr>
+            <a:r>
+              <a:rPr lang="zh-CN" altLang="en-US" dirty="0"/>
+              <a:t>一旦明星出了问题，怎么办？</a:t>
+            </a:r>
+            <a:endParaRPr lang="en-US" altLang="zh-CN" dirty="0"/>
+          </a:p>
+          <a:p>
+            <a:pPr>
+              <a:lnSpc>
+                <a:spcPct val="120000"/>
+              </a:lnSpc>
+            </a:pPr>
+            <a:endParaRPr lang="en-US" altLang="zh-CN" dirty="0"/>
+          </a:p>
+          <a:p>
+            <a:pPr marL="118872" indent="0">
+              <a:lnSpc>
+                <a:spcPct val="120000"/>
+              </a:lnSpc>
+              <a:buNone/>
+            </a:pPr>
+            <a:r>
+              <a:rPr lang="zh-CN" altLang="en-US" b="1" dirty="0"/>
+              <a:t>社区团队</a:t>
+            </a:r>
+            <a:endParaRPr lang="en-US" altLang="zh-CN" b="1" dirty="0"/>
+          </a:p>
+          <a:p>
+            <a:pPr>
+              <a:lnSpc>
+                <a:spcPct val="120000"/>
+              </a:lnSpc>
+            </a:pPr>
+            <a:r>
+              <a:rPr lang="zh-CN" altLang="en-US" dirty="0"/>
+              <a:t>很多志愿者参与</a:t>
+            </a:r>
+            <a:r>
+              <a:rPr lang="en-US" altLang="zh-CN" dirty="0"/>
+              <a:t>, </a:t>
+            </a:r>
+            <a:r>
+              <a:rPr lang="zh-CN" altLang="en-US" dirty="0"/>
+              <a:t>每个人参与自己感兴趣的项目</a:t>
+            </a:r>
+            <a:r>
+              <a:rPr lang="en-US" altLang="zh-CN" dirty="0"/>
+              <a:t>, </a:t>
+            </a:r>
+            <a:r>
+              <a:rPr lang="zh-CN" altLang="en-US" dirty="0"/>
+              <a:t>贡献力量</a:t>
+            </a:r>
+            <a:r>
+              <a:rPr lang="en-US" altLang="zh-CN" dirty="0"/>
+              <a:t>, </a:t>
+            </a:r>
+            <a:r>
+              <a:rPr lang="zh-CN" altLang="en-US" dirty="0"/>
+              <a:t>大部分人不拿报酬。</a:t>
+            </a:r>
+            <a:endParaRPr lang="en-US" altLang="zh-CN" dirty="0"/>
+          </a:p>
+          <a:p>
+            <a:pPr>
+              <a:lnSpc>
+                <a:spcPct val="120000"/>
+              </a:lnSpc>
+            </a:pPr>
+            <a:r>
+              <a:rPr lang="zh-CN" altLang="en-US" dirty="0"/>
+              <a:t>好处是“众人拾柴火焰高”，但是如果大家都只来烤火</a:t>
+            </a:r>
+            <a:r>
+              <a:rPr lang="en-US" altLang="zh-CN" dirty="0"/>
+              <a:t>, </a:t>
+            </a:r>
+            <a:r>
+              <a:rPr lang="zh-CN" altLang="en-US" dirty="0"/>
+              <a:t>不去拾柴；或者捡到的柴火质量太差</a:t>
+            </a:r>
+            <a:r>
+              <a:rPr lang="en-US" altLang="zh-CN" dirty="0"/>
+              <a:t>, </a:t>
+            </a:r>
+            <a:r>
+              <a:rPr lang="zh-CN" altLang="en-US" dirty="0"/>
+              <a:t>最后火也熄灭了。  </a:t>
+            </a:r>
+            <a:endParaRPr lang="en-US" altLang="zh-CN" dirty="0"/>
+          </a:p>
+          <a:p>
+            <a:pPr>
+              <a:lnSpc>
+                <a:spcPct val="120000"/>
+              </a:lnSpc>
+            </a:pPr>
+            <a:r>
+              <a:rPr lang="zh-CN" altLang="en-US" dirty="0"/>
+              <a:t>“社区” 并不意味着“随意”</a:t>
+            </a:r>
+            <a:r>
+              <a:rPr lang="en-US" altLang="zh-CN" dirty="0"/>
+              <a:t>,  </a:t>
+            </a:r>
+            <a:r>
+              <a:rPr lang="zh-CN" altLang="en-US" dirty="0"/>
+              <a:t>一些成功的社区项目（例如开发和维护</a:t>
+            </a:r>
+            <a:r>
+              <a:rPr lang="en-US" altLang="zh-CN" dirty="0"/>
+              <a:t>Linux </a:t>
+            </a:r>
+            <a:r>
+              <a:rPr lang="zh-CN" altLang="en-US" dirty="0"/>
+              <a:t>操作系统的社区）都有很严格的代码复审和签入的质量控制。</a:t>
+            </a:r>
+            <a:endParaRPr lang="en-US" altLang="zh-CN" dirty="0"/>
+          </a:p>
+          <a:p>
+            <a:pPr>
+              <a:lnSpc>
+                <a:spcPct val="120000"/>
+              </a:lnSpc>
+            </a:pPr>
+            <a:r>
+              <a:rPr lang="zh-CN" altLang="en-US" dirty="0"/>
+              <a:t>社区有一个脾气大的明星，怎么办？</a:t>
+            </a:r>
+            <a:endParaRPr lang="en-US" altLang="zh-CN" dirty="0"/>
+          </a:p>
+          <a:p>
+            <a:pPr lvl="1">
+              <a:lnSpc>
+                <a:spcPct val="120000"/>
+              </a:lnSpc>
+            </a:pPr>
+            <a:r>
+              <a:rPr lang="en-US" dirty="0">
+                <a:hlinkClick r:id="rId3"/>
+              </a:rPr>
+              <a:t>Linus Torvalds and community</a:t>
+            </a:r>
+            <a:endParaRPr lang="en-US" dirty="0"/>
+          </a:p>
+          <a:p>
+            <a:pPr lvl="1">
+              <a:lnSpc>
+                <a:spcPct val="120000"/>
+              </a:lnSpc>
+            </a:pPr>
+            <a:r>
+              <a:rPr lang="en-US" dirty="0">
+                <a:hlinkClick r:id="rId3"/>
+              </a:rPr>
+              <a:t>https://lore.kernel.org/lkml/CA+55aFy+Hv9O5citAawS+mVZO+ywCKd9NQ2wxUmGsz9ZJzqgJQ@mail.gmail.com/</a:t>
+            </a:r>
+            <a:r>
+              <a:rPr lang="zh-CN" altLang="en-US" dirty="0"/>
+              <a:t> </a:t>
+            </a:r>
+            <a:endParaRPr lang="en-US" dirty="0"/>
+          </a:p>
+        </p:txBody>
+      </p:sp>
+    </p:spTree>
+    <p:extLst>
+      <p:ext uri="{BB962C8B-B14F-4D97-AF65-F5344CB8AC3E}">
+        <p14:creationId xmlns:p14="http://schemas.microsoft.com/office/powerpoint/2010/main" val="3602450418"/>
+      </p:ext>
+    </p:extLst>
+  </p:cSld>
+  <p:clrMapOvr>
+    <a:masterClrMapping/>
+  </p:clrMapOvr>
+</p:sld>
+</file>
+
+<file path=ppt/slides/slide22.xml><?xml version="1.0" encoding="utf-8"?>
+<p:sld xmlns:a="http://schemas.openxmlformats.org/drawingml/2006/main" xmlns:r="http://schemas.openxmlformats.org/officeDocument/2006/relationships" xmlns:p="http://schemas.openxmlformats.org/presentationml/2006/main">
+  <p:cSld>
+    <p:spTree>
+      <p:nvGrpSpPr>
+        <p:cNvPr id="1" name=""/>
+        <p:cNvGrpSpPr/>
+        <p:nvPr/>
+      </p:nvGrpSpPr>
+      <p:grpSpPr>
+        <a:xfrm>
+          <a:off x="0" y="0"/>
+          <a:ext cx="0" cy="0"/>
+          <a:chOff x="0" y="0"/>
+          <a:chExt cx="0" cy="0"/>
+        </a:xfrm>
+      </p:grpSpPr>
+      <p:sp>
+        <p:nvSpPr>
           <p:cNvPr id="2" name="标题 1"/>
           <p:cNvSpPr>
             <a:spLocks noGrp="1"/>
@@ -13288,17 +14337,20 @@
           <a:lstStyle/>
           <a:p>
             <a:r>
-              <a:rPr lang="zh-CN" altLang="en-US" dirty="0"/>
+              <a:rPr lang="zh-CN" altLang="en-US" sz="2400" dirty="0"/>
               <a:t>这种模式脱胎于大机构的组织架构，几个人报告给一个小头目，几个小头目报告给中头目， 依次而上。</a:t>
             </a:r>
-            <a:endParaRPr lang="en-US" altLang="zh-CN" dirty="0"/>
-          </a:p>
-          <a:p>
-            <a:r>
-              <a:rPr lang="zh-CN" altLang="en-US" dirty="0"/>
+            <a:endParaRPr lang="en-US" altLang="zh-CN" sz="2400" dirty="0"/>
+          </a:p>
+          <a:p>
+            <a:endParaRPr lang="en-US" altLang="zh-CN" sz="2400" dirty="0"/>
+          </a:p>
+          <a:p>
+            <a:r>
+              <a:rPr lang="zh-CN" altLang="en-US" sz="2400" dirty="0"/>
               <a:t>这种模式在软件开发中会出问题。因为成员之间不光有技术方面的合作和领导， 同时还混进了组织上的领导和被领导关系。跨组织的合作变得比较困难。</a:t>
             </a:r>
-            <a:endParaRPr lang="en-US" dirty="0"/>
+            <a:endParaRPr lang="en-US" sz="2400" dirty="0"/>
           </a:p>
         </p:txBody>
       </p:sp>
@@ -13339,7 +14391,7 @@
 </p:sld>
 </file>
 
-<file path=ppt/slides/slide2.xml><?xml version="1.0" encoding="utf-8"?>
+<file path=ppt/slides/slide23.xml><?xml version="1.0" encoding="utf-8"?>
 <p:sld xmlns:a="http://schemas.openxmlformats.org/drawingml/2006/main" xmlns:r="http://schemas.openxmlformats.org/officeDocument/2006/relationships" xmlns:p="http://schemas.openxmlformats.org/presentationml/2006/main">
   <p:cSld>
     <p:spTree>
@@ -13373,101 +14425,6 @@
           <a:p>
             <a:r>
               <a:rPr lang="zh-CN" altLang="en-US" dirty="0"/>
-              <a:t>团队 </a:t>
-            </a:r>
-            <a:r>
-              <a:rPr lang="en-US" altLang="zh-CN" dirty="0"/>
-              <a:t>vs </a:t>
-            </a:r>
-            <a:r>
-              <a:rPr lang="zh-CN" altLang="en-US" dirty="0"/>
-              <a:t>非团队</a:t>
-            </a:r>
-            <a:endParaRPr lang="en-US" dirty="0"/>
-          </a:p>
-        </p:txBody>
-      </p:sp>
-      <p:sp>
-        <p:nvSpPr>
-          <p:cNvPr id="3" name="内容占位符 2"/>
-          <p:cNvSpPr>
-            <a:spLocks noGrp="1"/>
-          </p:cNvSpPr>
-          <p:nvPr>
-            <p:ph idx="1"/>
-          </p:nvPr>
-        </p:nvSpPr>
-        <p:spPr/>
-        <p:txBody>
-          <a:bodyPr/>
-          <a:lstStyle/>
-          <a:p>
-            <a:r>
-              <a:rPr lang="zh-CN" altLang="en-US" dirty="0"/>
-              <a:t>问题 </a:t>
-            </a:r>
-            <a:r>
-              <a:rPr lang="en-US" altLang="zh-CN" dirty="0"/>
-              <a:t>– </a:t>
-            </a:r>
-            <a:r>
-              <a:rPr lang="zh-CN" altLang="en-US" dirty="0"/>
-              <a:t>在你之前的经历中，最有团队精神的事情是什么？ 它和其它活动有什么区别？</a:t>
-            </a:r>
-            <a:endParaRPr lang="en-US" altLang="zh-CN" dirty="0"/>
-          </a:p>
-          <a:p>
-            <a:endParaRPr lang="en-US" dirty="0"/>
-          </a:p>
-        </p:txBody>
-      </p:sp>
-    </p:spTree>
-    <p:extLst>
-      <p:ext uri="{BB962C8B-B14F-4D97-AF65-F5344CB8AC3E}">
-        <p14:creationId xmlns:p14="http://schemas.microsoft.com/office/powerpoint/2010/main" val="779054329"/>
-      </p:ext>
-    </p:extLst>
-  </p:cSld>
-  <p:clrMapOvr>
-    <a:masterClrMapping/>
-  </p:clrMapOvr>
-</p:sld>
-</file>
-
-<file path=ppt/slides/slide20.xml><?xml version="1.0" encoding="utf-8"?>
-<p:sld xmlns:a="http://schemas.openxmlformats.org/drawingml/2006/main" xmlns:r="http://schemas.openxmlformats.org/officeDocument/2006/relationships" xmlns:p="http://schemas.openxmlformats.org/presentationml/2006/main">
-  <p:cSld>
-    <p:spTree>
-      <p:nvGrpSpPr>
-        <p:cNvPr id="1" name=""/>
-        <p:cNvGrpSpPr/>
-        <p:nvPr/>
-      </p:nvGrpSpPr>
-      <p:grpSpPr>
-        <a:xfrm>
-          <a:off x="0" y="0"/>
-          <a:ext cx="0" cy="0"/>
-          <a:chOff x="0" y="0"/>
-          <a:chExt cx="0" cy="0"/>
-        </a:xfrm>
-      </p:grpSpPr>
-      <p:sp>
-        <p:nvSpPr>
-          <p:cNvPr id="2" name="标题 1"/>
-          <p:cNvSpPr>
-            <a:spLocks noGrp="1"/>
-          </p:cNvSpPr>
-          <p:nvPr>
-            <p:ph type="title"/>
-          </p:nvPr>
-        </p:nvSpPr>
-        <p:spPr/>
-        <p:txBody>
-          <a:bodyPr/>
-          <a:lstStyle/>
-          <a:p>
-            <a:r>
-              <a:rPr lang="zh-CN" altLang="en-US" dirty="0"/>
               <a:t>课堂练习</a:t>
             </a:r>
             <a:endParaRPr lang="en-US" dirty="0"/>
@@ -13545,7 +14502,7 @@
 </p:sld>
 </file>
 
-<file path=ppt/slides/slide21.xml><?xml version="1.0" encoding="utf-8"?>
+<file path=ppt/slides/slide24.xml><?xml version="1.0" encoding="utf-8"?>
 <p:sld xmlns:a="http://schemas.openxmlformats.org/drawingml/2006/main" xmlns:r="http://schemas.openxmlformats.org/officeDocument/2006/relationships" xmlns:p="http://schemas.openxmlformats.org/presentationml/2006/main">
   <p:cSld>
     <p:spTree>
@@ -14495,7 +15452,7 @@
 </p:sld>
 </file>
 
-<file path=ppt/slides/slide22.xml><?xml version="1.0" encoding="utf-8"?>
+<file path=ppt/slides/slide25.xml><?xml version="1.0" encoding="utf-8"?>
 <p:sld xmlns:a="http://schemas.openxmlformats.org/drawingml/2006/main" xmlns:r="http://schemas.openxmlformats.org/officeDocument/2006/relationships" xmlns:p="http://schemas.openxmlformats.org/presentationml/2006/main">
   <p:cSld>
     <p:spTree>
@@ -14659,6 +15616,9 @@
               <a:rPr lang="en-US" dirty="0"/>
               <a:t>)</a:t>
             </a:r>
+          </a:p>
+          <a:p>
+            <a:endParaRPr lang="en-US" altLang="zh-CN" dirty="0"/>
           </a:p>
           <a:p>
             <a:r>
@@ -14980,7 +15940,7 @@
                                         <p:tgtEl>
                                           <p:spTgt spid="3">
                                             <p:txEl>
-                                              <p:pRg st="5" end="5"/>
+                                              <p:pRg st="6" end="6"/>
                                             </p:txEl>
                                           </p:spTgt>
                                         </p:tgtEl>
@@ -15029,7 +15989,7 @@
                                         <p:tgtEl>
                                           <p:spTgt spid="3">
                                             <p:txEl>
-                                              <p:pRg st="6" end="6"/>
+                                              <p:pRg st="7" end="7"/>
                                             </p:txEl>
                                           </p:spTgt>
                                         </p:tgtEl>
@@ -15075,7 +16035,7 @@
 </p:sld>
 </file>
 
-<file path=ppt/slides/slide23.xml><?xml version="1.0" encoding="utf-8"?>
+<file path=ppt/slides/slide26.xml><?xml version="1.0" encoding="utf-8"?>
 <p:sld xmlns:a="http://schemas.openxmlformats.org/drawingml/2006/main" xmlns:r="http://schemas.openxmlformats.org/officeDocument/2006/relationships" xmlns:p="http://schemas.openxmlformats.org/presentationml/2006/main">
   <p:cSld>
     <p:spTree>
@@ -15513,7 +16473,7 @@
 </p:sld>
 </file>
 
-<file path=ppt/slides/slide24.xml><?xml version="1.0" encoding="utf-8"?>
+<file path=ppt/slides/slide27.xml><?xml version="1.0" encoding="utf-8"?>
 <p:sld xmlns:a="http://schemas.openxmlformats.org/drawingml/2006/main" xmlns:r="http://schemas.openxmlformats.org/officeDocument/2006/relationships" xmlns:p="http://schemas.openxmlformats.org/presentationml/2006/main">
   <p:cSld>
     <p:spTree>
@@ -15669,7 +16629,7 @@
 </p:sld>
 </file>
 
-<file path=ppt/slides/slide25.xml><?xml version="1.0" encoding="utf-8"?>
+<file path=ppt/slides/slide28.xml><?xml version="1.0" encoding="utf-8"?>
 <p:sld xmlns:a="http://schemas.openxmlformats.org/drawingml/2006/main" xmlns:r="http://schemas.openxmlformats.org/officeDocument/2006/relationships" xmlns:p="http://schemas.openxmlformats.org/presentationml/2006/main">
   <p:cSld>
     <p:spTree>
@@ -15822,7 +16782,7 @@
 </p:sld>
 </file>
 
-<file path=ppt/slides/slide26.xml><?xml version="1.0" encoding="utf-8"?>
+<file path=ppt/slides/slide29.xml><?xml version="1.0" encoding="utf-8"?>
 <p:sld xmlns:a="http://schemas.openxmlformats.org/drawingml/2006/main" xmlns:r="http://schemas.openxmlformats.org/officeDocument/2006/relationships" xmlns:p="http://schemas.openxmlformats.org/presentationml/2006/main">
   <p:cSld>
     <p:spTree>
@@ -15971,7 +16931,7 @@
 </p:sld>
 </file>
 
-<file path=ppt/slides/slide27.xml><?xml version="1.0" encoding="utf-8"?>
+<file path=ppt/slides/slide3.xml><?xml version="1.0" encoding="utf-8"?>
 <p:sld xmlns:a="http://schemas.openxmlformats.org/drawingml/2006/main" xmlns:r="http://schemas.openxmlformats.org/officeDocument/2006/relationships" xmlns:p="http://schemas.openxmlformats.org/presentationml/2006/main">
   <p:cSld>
     <p:spTree>
@@ -15990,6 +16950,242 @@
       </p:grpSpPr>
       <p:sp>
         <p:nvSpPr>
+          <p:cNvPr id="2" name="Title 1">
+            <a:extLst>
+              <a:ext uri="{FF2B5EF4-FFF2-40B4-BE49-F238E27FC236}">
+                <a16:creationId xmlns:a16="http://schemas.microsoft.com/office/drawing/2014/main" id="{61574E22-1C2F-BE24-FB8F-3382A541CD0D}"/>
+              </a:ext>
+            </a:extLst>
+          </p:cNvPr>
+          <p:cNvSpPr>
+            <a:spLocks noGrp="1"/>
+          </p:cNvSpPr>
+          <p:nvPr>
+            <p:ph type="title"/>
+          </p:nvPr>
+        </p:nvSpPr>
+        <p:spPr>
+          <a:xfrm>
+            <a:off x="6303580" y="642594"/>
+            <a:ext cx="5245269" cy="1371600"/>
+          </a:xfrm>
+        </p:spPr>
+        <p:txBody>
+          <a:bodyPr>
+            <a:normAutofit/>
+          </a:bodyPr>
+          <a:lstStyle/>
+          <a:p>
+            <a:r>
+              <a:rPr lang="en-US" sz="4000" dirty="0">
+                <a:solidFill>
+                  <a:schemeClr val="tx1"/>
+                </a:solidFill>
+                <a:latin typeface="PingFang SC" panose="020B0400000000000000" pitchFamily="34" charset="-122"/>
+                <a:ea typeface="PingFang SC" panose="020B0400000000000000" pitchFamily="34" charset="-122"/>
+              </a:rPr>
+              <a:t>出版书籍</a:t>
+            </a:r>
+          </a:p>
+        </p:txBody>
+      </p:sp>
+      <p:pic>
+        <p:nvPicPr>
+          <p:cNvPr id="5" name="Picture 4">
+            <a:extLst>
+              <a:ext uri="{FF2B5EF4-FFF2-40B4-BE49-F238E27FC236}">
+                <a16:creationId xmlns:a16="http://schemas.microsoft.com/office/drawing/2014/main" id="{E1FF3DA5-C250-49C7-FE06-BB7715830A66}"/>
+              </a:ext>
+            </a:extLst>
+          </p:cNvPr>
+          <p:cNvPicPr>
+            <a:picLocks noChangeAspect="1"/>
+          </p:cNvPicPr>
+          <p:nvPr/>
+        </p:nvPicPr>
+        <p:blipFill>
+          <a:blip r:embed="rId2"/>
+          <a:stretch>
+            <a:fillRect/>
+          </a:stretch>
+        </p:blipFill>
+        <p:spPr>
+          <a:xfrm>
+            <a:off x="643467" y="1008715"/>
+            <a:ext cx="4379592" cy="1894172"/>
+          </a:xfrm>
+          <a:prstGeom prst="rect">
+            <a:avLst/>
+          </a:prstGeom>
+        </p:spPr>
+      </p:pic>
+      <p:pic>
+        <p:nvPicPr>
+          <p:cNvPr id="4" name="Content Placeholder 3">
+            <a:extLst>
+              <a:ext uri="{FF2B5EF4-FFF2-40B4-BE49-F238E27FC236}">
+                <a16:creationId xmlns:a16="http://schemas.microsoft.com/office/drawing/2014/main" id="{87A2DFA2-D17F-FF66-0EA6-5C383E6372BC}"/>
+              </a:ext>
+            </a:extLst>
+          </p:cNvPr>
+          <p:cNvPicPr>
+            <a:picLocks noChangeAspect="1"/>
+          </p:cNvPicPr>
+          <p:nvPr/>
+        </p:nvPicPr>
+        <p:blipFill>
+          <a:blip r:embed="rId3"/>
+          <a:stretch>
+            <a:fillRect/>
+          </a:stretch>
+        </p:blipFill>
+        <p:spPr>
+          <a:xfrm>
+            <a:off x="761390" y="3589863"/>
+            <a:ext cx="4133335" cy="2624668"/>
+          </a:xfrm>
+          <a:prstGeom prst="rect">
+            <a:avLst/>
+          </a:prstGeom>
+        </p:spPr>
+      </p:pic>
+      <p:sp>
+        <p:nvSpPr>
+          <p:cNvPr id="9" name="Content Placeholder 8">
+            <a:extLst>
+              <a:ext uri="{FF2B5EF4-FFF2-40B4-BE49-F238E27FC236}">
+                <a16:creationId xmlns:a16="http://schemas.microsoft.com/office/drawing/2014/main" id="{8AD0F6DC-9EBD-BE1F-460B-7093F1233543}"/>
+              </a:ext>
+            </a:extLst>
+          </p:cNvPr>
+          <p:cNvSpPr>
+            <a:spLocks noGrp="1"/>
+          </p:cNvSpPr>
+          <p:nvPr>
+            <p:ph idx="1"/>
+          </p:nvPr>
+        </p:nvSpPr>
+        <p:spPr>
+          <a:xfrm>
+            <a:off x="6303580" y="2103120"/>
+            <a:ext cx="5245269" cy="3931920"/>
+          </a:xfrm>
+        </p:spPr>
+        <p:txBody>
+          <a:bodyPr>
+            <a:normAutofit/>
+          </a:bodyPr>
+          <a:lstStyle/>
+          <a:p>
+            <a:r>
+              <a:rPr lang="zh-CN" altLang="en-US" sz="2400" dirty="0">
+                <a:solidFill>
+                  <a:schemeClr val="tx1"/>
+                </a:solidFill>
+                <a:latin typeface="PingFang SC" panose="020B0400000000000000" pitchFamily="34" charset="-122"/>
+                <a:ea typeface="PingFang SC" panose="020B0400000000000000" pitchFamily="34" charset="-122"/>
+              </a:rPr>
+              <a:t>移山之道</a:t>
+            </a:r>
+            <a:endParaRPr lang="en-US" altLang="zh-CN" sz="2400" dirty="0">
+              <a:solidFill>
+                <a:schemeClr val="tx1"/>
+              </a:solidFill>
+              <a:latin typeface="PingFang SC" panose="020B0400000000000000" pitchFamily="34" charset="-122"/>
+              <a:ea typeface="PingFang SC" panose="020B0400000000000000" pitchFamily="34" charset="-122"/>
+            </a:endParaRPr>
+          </a:p>
+          <a:p>
+            <a:r>
+              <a:rPr lang="zh-CN" altLang="en-US" sz="2400" dirty="0">
+                <a:solidFill>
+                  <a:schemeClr val="tx1"/>
+                </a:solidFill>
+                <a:latin typeface="PingFang SC" panose="020B0400000000000000" pitchFamily="34" charset="-122"/>
+                <a:ea typeface="PingFang SC" panose="020B0400000000000000" pitchFamily="34" charset="-122"/>
+              </a:rPr>
+              <a:t>编程之美</a:t>
+            </a:r>
+            <a:endParaRPr lang="en-US" altLang="zh-CN" sz="2400" dirty="0">
+              <a:solidFill>
+                <a:schemeClr val="tx1"/>
+              </a:solidFill>
+              <a:latin typeface="PingFang SC" panose="020B0400000000000000" pitchFamily="34" charset="-122"/>
+              <a:ea typeface="PingFang SC" panose="020B0400000000000000" pitchFamily="34" charset="-122"/>
+            </a:endParaRPr>
+          </a:p>
+          <a:p>
+            <a:r>
+              <a:rPr lang="zh-CN" altLang="en-US" sz="2400" dirty="0">
+                <a:solidFill>
+                  <a:schemeClr val="tx1"/>
+                </a:solidFill>
+                <a:latin typeface="PingFang SC" panose="020B0400000000000000" pitchFamily="34" charset="-122"/>
+                <a:ea typeface="PingFang SC" panose="020B0400000000000000" pitchFamily="34" charset="-122"/>
+              </a:rPr>
+              <a:t>构建之法</a:t>
+            </a:r>
+            <a:endParaRPr lang="en-US" altLang="zh-CN" sz="2400" dirty="0">
+              <a:solidFill>
+                <a:schemeClr val="tx1"/>
+              </a:solidFill>
+              <a:latin typeface="PingFang SC" panose="020B0400000000000000" pitchFamily="34" charset="-122"/>
+              <a:ea typeface="PingFang SC" panose="020B0400000000000000" pitchFamily="34" charset="-122"/>
+            </a:endParaRPr>
+          </a:p>
+          <a:p>
+            <a:r>
+              <a:rPr lang="zh-CN" altLang="en-US" sz="2400" dirty="0">
+                <a:solidFill>
+                  <a:schemeClr val="tx1"/>
+                </a:solidFill>
+                <a:latin typeface="PingFang SC" panose="020B0400000000000000" pitchFamily="34" charset="-122"/>
+                <a:ea typeface="PingFang SC" panose="020B0400000000000000" pitchFamily="34" charset="-122"/>
+              </a:rPr>
+              <a:t>智能之门</a:t>
+            </a:r>
+            <a:endParaRPr lang="en-US" sz="2400" dirty="0">
+              <a:solidFill>
+                <a:schemeClr val="tx1"/>
+              </a:solidFill>
+              <a:latin typeface="PingFang SC" panose="020B0400000000000000" pitchFamily="34" charset="-122"/>
+              <a:ea typeface="PingFang SC" panose="020B0400000000000000" pitchFamily="34" charset="-122"/>
+            </a:endParaRPr>
+          </a:p>
+        </p:txBody>
+      </p:sp>
+    </p:spTree>
+    <p:extLst>
+      <p:ext uri="{BB962C8B-B14F-4D97-AF65-F5344CB8AC3E}">
+        <p14:creationId xmlns:p14="http://schemas.microsoft.com/office/powerpoint/2010/main" val="3929729383"/>
+      </p:ext>
+    </p:extLst>
+  </p:cSld>
+  <p:clrMapOvr>
+    <a:masterClrMapping/>
+  </p:clrMapOvr>
+</p:sld>
+</file>
+
+<file path=ppt/slides/slide30.xml><?xml version="1.0" encoding="utf-8"?>
+<p:sld xmlns:a="http://schemas.openxmlformats.org/drawingml/2006/main" xmlns:r="http://schemas.openxmlformats.org/officeDocument/2006/relationships" xmlns:p="http://schemas.openxmlformats.org/presentationml/2006/main">
+  <p:cSld>
+    <p:spTree>
+      <p:nvGrpSpPr>
+        <p:cNvPr id="1" name=""/>
+        <p:cNvGrpSpPr/>
+        <p:nvPr/>
+      </p:nvGrpSpPr>
+      <p:grpSpPr>
+        <a:xfrm>
+          <a:off x="0" y="0"/>
+          <a:ext cx="0" cy="0"/>
+          <a:chOff x="0" y="0"/>
+          <a:chExt cx="0" cy="0"/>
+        </a:xfrm>
+      </p:grpSpPr>
+      <p:sp>
+        <p:nvSpPr>
           <p:cNvPr id="2" name="Title 1"/>
           <p:cNvSpPr>
             <a:spLocks noGrp="1"/>
@@ -16130,7 +17326,7 @@
 </p:sld>
 </file>
 
-<file path=ppt/slides/slide28.xml><?xml version="1.0" encoding="utf-8"?>
+<file path=ppt/slides/slide31.xml><?xml version="1.0" encoding="utf-8"?>
 <p:sld xmlns:a="http://schemas.openxmlformats.org/drawingml/2006/main" xmlns:r="http://schemas.openxmlformats.org/officeDocument/2006/relationships" xmlns:p="http://schemas.openxmlformats.org/presentationml/2006/main">
   <p:cSld>
     <p:spTree>
@@ -16251,7 +17447,7 @@
 </p:sld>
 </file>
 
-<file path=ppt/slides/slide29.xml><?xml version="1.0" encoding="utf-8"?>
+<file path=ppt/slides/slide32.xml><?xml version="1.0" encoding="utf-8"?>
 <p:sld xmlns:a="http://schemas.openxmlformats.org/drawingml/2006/main" xmlns:r="http://schemas.openxmlformats.org/officeDocument/2006/relationships" xmlns:p="http://schemas.openxmlformats.org/presentationml/2006/main">
   <p:cSld>
     <p:spTree>
@@ -16490,7 +17686,7 @@
 </p:sld>
 </file>
 
-<file path=ppt/slides/slide3.xml><?xml version="1.0" encoding="utf-8"?>
+<file path=ppt/slides/slide33.xml><?xml version="1.0" encoding="utf-8"?>
 <p:sld xmlns:a="http://schemas.openxmlformats.org/drawingml/2006/main" xmlns:r="http://schemas.openxmlformats.org/officeDocument/2006/relationships" xmlns:p="http://schemas.openxmlformats.org/presentationml/2006/main">
   <p:cSld>
     <p:spTree>
@@ -16524,205 +17720,6 @@
           <a:p>
             <a:r>
               <a:rPr lang="en-US" dirty="0"/>
-              <a:t>Team vs. Work Group</a:t>
-            </a:r>
-          </a:p>
-        </p:txBody>
-      </p:sp>
-      <p:sp>
-        <p:nvSpPr>
-          <p:cNvPr id="3" name="Content Placeholder 2"/>
-          <p:cNvSpPr>
-            <a:spLocks noGrp="1"/>
-          </p:cNvSpPr>
-          <p:nvPr>
-            <p:ph idx="1"/>
-          </p:nvPr>
-        </p:nvSpPr>
-        <p:spPr/>
-        <p:txBody>
-          <a:bodyPr/>
-          <a:lstStyle/>
-          <a:p>
-            <a:r>
-              <a:rPr lang="en-US" dirty="0"/>
-              <a:t>Work Group </a:t>
-            </a:r>
-            <a:r>
-              <a:rPr lang="en-US" altLang="zh-CN" dirty="0"/>
-              <a:t>/ </a:t>
-            </a:r>
-            <a:r>
-              <a:rPr lang="zh-CN" altLang="en-US" dirty="0"/>
-              <a:t>工作组</a:t>
-            </a:r>
-            <a:endParaRPr lang="en-US" dirty="0"/>
-          </a:p>
-          <a:p>
-            <a:pPr lvl="1"/>
-            <a:r>
-              <a:rPr lang="en-US" dirty="0"/>
-              <a:t>A random group of people happen to be together to finish a task</a:t>
-            </a:r>
-          </a:p>
-          <a:p>
-            <a:pPr lvl="1"/>
-            <a:r>
-              <a:rPr lang="en-US" altLang="zh-CN" dirty="0"/>
-              <a:t>M</a:t>
-            </a:r>
-            <a:r>
-              <a:rPr lang="zh-CN" altLang="en-US" dirty="0"/>
-              <a:t>个人</a:t>
-            </a:r>
-            <a:r>
-              <a:rPr lang="en-US" altLang="zh-CN" dirty="0"/>
-              <a:t>, </a:t>
-            </a:r>
-            <a:r>
-              <a:rPr lang="zh-CN" altLang="en-US" dirty="0"/>
-              <a:t>各自把</a:t>
-            </a:r>
-            <a:r>
-              <a:rPr lang="en-US" altLang="zh-CN" dirty="0"/>
-              <a:t>N </a:t>
-            </a:r>
-            <a:r>
-              <a:rPr lang="zh-CN" altLang="en-US" dirty="0"/>
-              <a:t>块砖从</a:t>
-            </a:r>
-            <a:r>
-              <a:rPr lang="en-US" altLang="zh-CN" dirty="0"/>
-              <a:t>A </a:t>
-            </a:r>
-            <a:r>
-              <a:rPr lang="zh-CN" altLang="en-US" dirty="0"/>
-              <a:t>地运到</a:t>
-            </a:r>
-            <a:r>
-              <a:rPr lang="en-US" altLang="zh-CN" dirty="0"/>
-              <a:t>B </a:t>
-            </a:r>
-            <a:r>
-              <a:rPr lang="zh-CN" altLang="en-US" dirty="0"/>
-              <a:t>地。 </a:t>
-            </a:r>
-            <a:endParaRPr lang="en-US" dirty="0"/>
-          </a:p>
-          <a:p>
-            <a:r>
-              <a:rPr lang="en-US" dirty="0"/>
-              <a:t>Team</a:t>
-            </a:r>
-          </a:p>
-          <a:p>
-            <a:pPr lvl="1"/>
-            <a:r>
-              <a:rPr lang="en-US" dirty="0"/>
-              <a:t>Common mission, team members relies on each other</a:t>
-            </a:r>
-          </a:p>
-          <a:p>
-            <a:pPr lvl="1"/>
-            <a:r>
-              <a:rPr lang="en-US" altLang="zh-CN" dirty="0"/>
-              <a:t>M</a:t>
-            </a:r>
-            <a:r>
-              <a:rPr lang="zh-CN" altLang="en-US" dirty="0"/>
-              <a:t>个人</a:t>
-            </a:r>
-            <a:r>
-              <a:rPr lang="en-US" altLang="zh-CN" dirty="0"/>
-              <a:t>, </a:t>
-            </a:r>
-            <a:r>
-              <a:rPr lang="zh-CN" altLang="en-US" dirty="0"/>
-              <a:t>组成人链把</a:t>
-            </a:r>
-            <a:r>
-              <a:rPr lang="en-US" altLang="zh-CN" dirty="0"/>
-              <a:t>N*M </a:t>
-            </a:r>
-            <a:r>
-              <a:rPr lang="zh-CN" altLang="en-US" dirty="0"/>
-              <a:t>块砖从</a:t>
-            </a:r>
-            <a:r>
-              <a:rPr lang="en-US" altLang="zh-CN" dirty="0"/>
-              <a:t>A </a:t>
-            </a:r>
-            <a:r>
-              <a:rPr lang="zh-CN" altLang="en-US" dirty="0"/>
-              <a:t>地运到 </a:t>
-            </a:r>
-            <a:r>
-              <a:rPr lang="en-US" altLang="zh-CN" dirty="0"/>
-              <a:t>B</a:t>
-            </a:r>
-            <a:r>
-              <a:rPr lang="zh-CN" altLang="en-US" dirty="0"/>
-              <a:t>地。</a:t>
-            </a:r>
-            <a:endParaRPr lang="en-US" altLang="zh-CN" dirty="0"/>
-          </a:p>
-          <a:p>
-            <a:pPr lvl="1"/>
-            <a:r>
-              <a:rPr lang="zh-CN" altLang="en-US" dirty="0"/>
-              <a:t>制造工具，更有效地运砖 </a:t>
-            </a:r>
-            <a:endParaRPr lang="en-US" dirty="0"/>
-          </a:p>
-        </p:txBody>
-      </p:sp>
-    </p:spTree>
-    <p:extLst>
-      <p:ext uri="{BB962C8B-B14F-4D97-AF65-F5344CB8AC3E}">
-        <p14:creationId xmlns:p14="http://schemas.microsoft.com/office/powerpoint/2010/main" val="1580964085"/>
-      </p:ext>
-    </p:extLst>
-  </p:cSld>
-  <p:clrMapOvr>
-    <a:masterClrMapping/>
-  </p:clrMapOvr>
-</p:sld>
-</file>
-
-<file path=ppt/slides/slide30.xml><?xml version="1.0" encoding="utf-8"?>
-<p:sld xmlns:a="http://schemas.openxmlformats.org/drawingml/2006/main" xmlns:r="http://schemas.openxmlformats.org/officeDocument/2006/relationships" xmlns:p="http://schemas.openxmlformats.org/presentationml/2006/main">
-  <p:cSld>
-    <p:spTree>
-      <p:nvGrpSpPr>
-        <p:cNvPr id="1" name=""/>
-        <p:cNvGrpSpPr/>
-        <p:nvPr/>
-      </p:nvGrpSpPr>
-      <p:grpSpPr>
-        <a:xfrm>
-          <a:off x="0" y="0"/>
-          <a:ext cx="0" cy="0"/>
-          <a:chOff x="0" y="0"/>
-          <a:chExt cx="0" cy="0"/>
-        </a:xfrm>
-      </p:grpSpPr>
-      <p:sp>
-        <p:nvSpPr>
-          <p:cNvPr id="2" name="Title 1"/>
-          <p:cNvSpPr>
-            <a:spLocks noGrp="1"/>
-          </p:cNvSpPr>
-          <p:nvPr>
-            <p:ph type="title"/>
-          </p:nvPr>
-        </p:nvSpPr>
-        <p:spPr/>
-        <p:txBody>
-          <a:bodyPr/>
-          <a:lstStyle/>
-          <a:p>
-            <a:r>
-              <a:rPr lang="en-US" dirty="0"/>
               <a:t>One Example -</a:t>
             </a:r>
             <a:r>
@@ -17014,7 +18011,7 @@
 </p:sld>
 </file>
 
-<file path=ppt/slides/slide31.xml><?xml version="1.0" encoding="utf-8"?>
+<file path=ppt/slides/slide34.xml><?xml version="1.0" encoding="utf-8"?>
 <p:sld xmlns:a="http://schemas.openxmlformats.org/drawingml/2006/main" xmlns:r="http://schemas.openxmlformats.org/officeDocument/2006/relationships" xmlns:p="http://schemas.openxmlformats.org/presentationml/2006/main">
   <p:cSld>
     <p:spTree>
@@ -17166,7 +18163,7 @@
 </p:sld>
 </file>
 
-<file path=ppt/slides/slide32.xml><?xml version="1.0" encoding="utf-8"?>
+<file path=ppt/slides/slide35.xml><?xml version="1.0" encoding="utf-8"?>
 <p:sld xmlns:a="http://schemas.openxmlformats.org/drawingml/2006/main" xmlns:r="http://schemas.openxmlformats.org/officeDocument/2006/relationships" xmlns:p="http://schemas.openxmlformats.org/presentationml/2006/main">
   <p:cSld>
     <p:spTree>
@@ -17350,7 +18347,7 @@
 </p:sld>
 </file>
 
-<file path=ppt/slides/slide33.xml><?xml version="1.0" encoding="utf-8"?>
+<file path=ppt/slides/slide36.xml><?xml version="1.0" encoding="utf-8"?>
 <p:sld xmlns:a="http://schemas.openxmlformats.org/drawingml/2006/main" xmlns:r="http://schemas.openxmlformats.org/officeDocument/2006/relationships" xmlns:p="http://schemas.openxmlformats.org/presentationml/2006/main">
   <p:cSld>
     <p:spTree>
@@ -17523,7 +18520,7 @@
 </p:sld>
 </file>
 
-<file path=ppt/slides/slide34.xml><?xml version="1.0" encoding="utf-8"?>
+<file path=ppt/slides/slide37.xml><?xml version="1.0" encoding="utf-8"?>
 <p:sld xmlns:a="http://schemas.openxmlformats.org/drawingml/2006/main" xmlns:r="http://schemas.openxmlformats.org/officeDocument/2006/relationships" xmlns:p="http://schemas.openxmlformats.org/presentationml/2006/main">
   <p:cSld>
     <p:spTree>
@@ -17644,7 +18641,7 @@
 </p:sld>
 </file>
 
-<file path=ppt/slides/slide35.xml><?xml version="1.0" encoding="utf-8"?>
+<file path=ppt/slides/slide38.xml><?xml version="1.0" encoding="utf-8"?>
 <p:sld xmlns:a="http://schemas.openxmlformats.org/drawingml/2006/main" xmlns:r="http://schemas.openxmlformats.org/officeDocument/2006/relationships" xmlns:p="http://schemas.openxmlformats.org/presentationml/2006/main">
   <p:cSld>
     <p:spTree>
@@ -17790,7 +18787,7 @@
 </p:sld>
 </file>
 
-<file path=ppt/slides/slide36.xml><?xml version="1.0" encoding="utf-8"?>
+<file path=ppt/slides/slide39.xml><?xml version="1.0" encoding="utf-8"?>
 <p:sld xmlns:a="http://schemas.openxmlformats.org/drawingml/2006/main" xmlns:r="http://schemas.openxmlformats.org/officeDocument/2006/relationships" xmlns:p="http://schemas.openxmlformats.org/presentationml/2006/main">
   <p:cSld>
     <p:spTree>
@@ -17930,7 +18927,122 @@
 </p:sld>
 </file>
 
-<file path=ppt/slides/slide37.xml><?xml version="1.0" encoding="utf-8"?>
+<file path=ppt/slides/slide4.xml><?xml version="1.0" encoding="utf-8"?>
+<p:sld xmlns:a="http://schemas.openxmlformats.org/drawingml/2006/main" xmlns:r="http://schemas.openxmlformats.org/officeDocument/2006/relationships" xmlns:p="http://schemas.openxmlformats.org/presentationml/2006/main">
+  <p:cSld>
+    <p:spTree>
+      <p:nvGrpSpPr>
+        <p:cNvPr id="1" name=""/>
+        <p:cNvGrpSpPr/>
+        <p:nvPr/>
+      </p:nvGrpSpPr>
+      <p:grpSpPr>
+        <a:xfrm>
+          <a:off x="0" y="0"/>
+          <a:ext cx="0" cy="0"/>
+          <a:chOff x="0" y="0"/>
+          <a:chExt cx="0" cy="0"/>
+        </a:xfrm>
+      </p:grpSpPr>
+      <p:sp>
+        <p:nvSpPr>
+          <p:cNvPr id="2" name="标题 1"/>
+          <p:cNvSpPr>
+            <a:spLocks noGrp="1"/>
+          </p:cNvSpPr>
+          <p:nvPr>
+            <p:ph type="title"/>
+          </p:nvPr>
+        </p:nvSpPr>
+        <p:spPr/>
+        <p:txBody>
+          <a:bodyPr/>
+          <a:lstStyle/>
+          <a:p>
+            <a:r>
+              <a:rPr lang="zh-CN" altLang="en-US" dirty="0"/>
+              <a:t>团队 </a:t>
+            </a:r>
+            <a:r>
+              <a:rPr lang="en-US" altLang="zh-CN" dirty="0"/>
+              <a:t>vs </a:t>
+            </a:r>
+            <a:r>
+              <a:rPr lang="zh-CN" altLang="en-US" dirty="0"/>
+              <a:t>非团队</a:t>
+            </a:r>
+            <a:endParaRPr lang="en-US" dirty="0"/>
+          </a:p>
+        </p:txBody>
+      </p:sp>
+      <p:sp>
+        <p:nvSpPr>
+          <p:cNvPr id="3" name="内容占位符 2"/>
+          <p:cNvSpPr>
+            <a:spLocks noGrp="1"/>
+          </p:cNvSpPr>
+          <p:nvPr>
+            <p:ph idx="1"/>
+          </p:nvPr>
+        </p:nvSpPr>
+        <p:spPr/>
+        <p:txBody>
+          <a:bodyPr/>
+          <a:lstStyle/>
+          <a:p>
+            <a:r>
+              <a:rPr lang="zh-CN" altLang="en-US" dirty="0"/>
+              <a:t>即使在开源的社区中，大家也是有一定的团队组织和开发流程</a:t>
+            </a:r>
+            <a:endParaRPr lang="en-US" altLang="zh-CN" dirty="0"/>
+          </a:p>
+          <a:p>
+            <a:r>
+              <a:rPr lang="zh-CN" altLang="en-US" dirty="0"/>
+              <a:t>那么，它和以前的团队模型，开发流程有什么区别呢？</a:t>
+            </a:r>
+            <a:endParaRPr lang="en-US" altLang="zh-CN" dirty="0"/>
+          </a:p>
+          <a:p>
+            <a:endParaRPr lang="en-US" altLang="zh-CN" dirty="0"/>
+          </a:p>
+          <a:p>
+            <a:endParaRPr lang="en-US" altLang="zh-CN" dirty="0"/>
+          </a:p>
+          <a:p>
+            <a:r>
+              <a:rPr lang="zh-CN" altLang="en-US" dirty="0"/>
+              <a:t>问题 </a:t>
+            </a:r>
+            <a:r>
+              <a:rPr lang="en-US" altLang="zh-CN" dirty="0"/>
+              <a:t>– </a:t>
+            </a:r>
+            <a:r>
+              <a:rPr lang="zh-CN" altLang="en-US" dirty="0"/>
+              <a:t>在你之前的经历中，最有团队精神的事情是什么？ 它和其它活动有什么区别？</a:t>
+            </a:r>
+            <a:endParaRPr lang="en-US" altLang="zh-CN" dirty="0"/>
+          </a:p>
+          <a:p>
+            <a:endParaRPr lang="en-US" dirty="0"/>
+          </a:p>
+        </p:txBody>
+      </p:sp>
+    </p:spTree>
+    <p:extLst>
+      <p:ext uri="{BB962C8B-B14F-4D97-AF65-F5344CB8AC3E}">
+        <p14:creationId xmlns:p14="http://schemas.microsoft.com/office/powerpoint/2010/main" val="779054329"/>
+      </p:ext>
+    </p:extLst>
+  </p:cSld>
+  <p:clrMapOvr>
+    <a:masterClrMapping/>
+  </p:clrMapOvr>
+</p:sld>
+</file>
+
+<file path=ppt/slides/slide40.xml><?xml version="1.0" encoding="utf-8"?>
 <p:sld xmlns:a="http://schemas.openxmlformats.org/drawingml/2006/main" xmlns:r="http://schemas.openxmlformats.org/officeDocument/2006/relationships" xmlns:p="http://schemas.openxmlformats.org/presentationml/2006/main">
   <p:cSld>
     <p:spTree>
@@ -18007,7 +19119,7 @@
 </p:sld>
 </file>
 
-<file path=ppt/slides/slide38.xml><?xml version="1.0" encoding="utf-8"?>
+<file path=ppt/slides/slide41.xml><?xml version="1.0" encoding="utf-8"?>
 <p:sld xmlns:a="http://schemas.openxmlformats.org/drawingml/2006/main" xmlns:r="http://schemas.openxmlformats.org/officeDocument/2006/relationships" xmlns:p="http://schemas.openxmlformats.org/presentationml/2006/main">
   <p:cSld>
     <p:spTree>
@@ -18146,7 +19258,7 @@
 </p:sld>
 </file>
 
-<file path=ppt/slides/slide39.xml><?xml version="1.0" encoding="utf-8"?>
+<file path=ppt/slides/slide42.xml><?xml version="1.0" encoding="utf-8"?>
 <p:sld xmlns:a="http://schemas.openxmlformats.org/drawingml/2006/main" xmlns:r="http://schemas.openxmlformats.org/officeDocument/2006/relationships" xmlns:p="http://schemas.openxmlformats.org/presentationml/2006/main">
   <p:cSld>
     <p:spTree>
@@ -18225,7 +19337,7 @@
 </p:sld>
 </file>
 
-<file path=ppt/slides/slide4.xml><?xml version="1.0" encoding="utf-8"?>
+<file path=ppt/slides/slide43.xml><?xml version="1.0" encoding="utf-8"?>
 <p:sld xmlns:a="http://schemas.openxmlformats.org/drawingml/2006/main" xmlns:r="http://schemas.openxmlformats.org/officeDocument/2006/relationships" xmlns:p="http://schemas.openxmlformats.org/presentationml/2006/main">
   <p:cSld>
     <p:spTree>
@@ -18259,7 +19371,7 @@
           <a:p>
             <a:r>
               <a:rPr lang="zh-CN" altLang="en-US" dirty="0"/>
-              <a:t>团队的特点</a:t>
+              <a:t>老板驱动的流程</a:t>
             </a:r>
             <a:endParaRPr lang="en-US" dirty="0"/>
           </a:p>
@@ -18278,52 +19390,84 @@
         <p:spPr/>
         <p:txBody>
           <a:bodyPr>
-            <a:normAutofit/>
+            <a:normAutofit fontScale="77500" lnSpcReduction="20000"/>
           </a:bodyPr>
           <a:lstStyle/>
           <a:p>
-            <a:pPr marL="118872" indent="0" eaLnBrk="0" hangingPunct="0">
+            <a:pPr marL="118872" indent="0">
+              <a:lnSpc>
+                <a:spcPct val="120000"/>
+              </a:lnSpc>
               <a:buNone/>
             </a:pPr>
             <a:r>
               <a:rPr lang="zh-CN" altLang="en-US" dirty="0"/>
-              <a:t>团队有共同的特点：</a:t>
-            </a:r>
-            <a:endParaRPr lang="en-US" dirty="0"/>
-          </a:p>
-          <a:p>
-            <a:pPr eaLnBrk="0" hangingPunct="0"/>
-            <a:r>
-              <a:rPr lang="zh-CN" altLang="en-US" dirty="0"/>
-              <a:t>团队有一致的集体目标，团队要一起完成这目标。 一个团队的成员不一定要同时工作，例如接力赛跑。</a:t>
+              <a:t>什么都是老板说了算</a:t>
+            </a:r>
+            <a:r>
+              <a:rPr lang="en-US" altLang="zh-CN" dirty="0"/>
+              <a:t>,  </a:t>
+            </a:r>
+            <a:r>
+              <a:rPr lang="zh-CN" altLang="en-US" dirty="0"/>
+              <a:t>存在有一定的合理性</a:t>
             </a:r>
             <a:endParaRPr lang="en-US" altLang="zh-CN" dirty="0"/>
           </a:p>
           <a:p>
-            <a:pPr lvl="1" eaLnBrk="0" hangingPunct="0"/>
-            <a:r>
-              <a:rPr lang="zh-CN" altLang="en-US" dirty="0"/>
-              <a:t>（王屋村搬砖的“非 团队”成员则不然，每个人想搬多少就搬多少，不想干了就结算工钱走人。）</a:t>
-            </a:r>
-            <a:endParaRPr lang="en-US" dirty="0"/>
-          </a:p>
-          <a:p>
-            <a:pPr eaLnBrk="0" hangingPunct="0"/>
-            <a:r>
-              <a:rPr lang="zh-CN" altLang="en-US" dirty="0"/>
-              <a:t>团队成员有各自的分工，互相依赖合作，共同完成任务。</a:t>
+            <a:pPr>
+              <a:lnSpc>
+                <a:spcPct val="120000"/>
+              </a:lnSpc>
+            </a:pPr>
+            <a:r>
+              <a:rPr lang="zh-CN" altLang="en-US" dirty="0"/>
+              <a:t>当软件订单的获得不是主要靠技术实力，而是靠个人关系，或者暗箱操作的时候，老 板的能力决定了一个团队是否能获得订单，既然软件的具体功能并不重要（或者哪个 团队做水平都差不多），那么老板说做什么就做什么。 </a:t>
             </a:r>
             <a:endParaRPr lang="en-US" altLang="zh-CN" dirty="0"/>
           </a:p>
           <a:p>
-            <a:pPr lvl="1" eaLnBrk="0" hangingPunct="0"/>
-            <a:r>
-              <a:rPr lang="zh-CN" altLang="en-US" dirty="0"/>
-              <a:t>（王屋村搬砖的 “非团队”成员则是各自行动，独立把任务完成，有人不辞而别，对其 他的搬砖人无实质影响。）</a:t>
-            </a:r>
-            <a:endParaRPr lang="en-US" dirty="0"/>
-          </a:p>
-          <a:p>
+            <a:pPr>
+              <a:lnSpc>
+                <a:spcPct val="120000"/>
+              </a:lnSpc>
+            </a:pPr>
+            <a:r>
+              <a:rPr lang="zh-CN" altLang="en-US" dirty="0"/>
+              <a:t>在大型企业内部，软件功能往往由行政体系来决定。 </a:t>
+            </a:r>
+            <a:endParaRPr lang="en-US" altLang="zh-CN" dirty="0"/>
+          </a:p>
+          <a:p>
+            <a:pPr>
+              <a:lnSpc>
+                <a:spcPct val="120000"/>
+              </a:lnSpc>
+            </a:pPr>
+            <a:r>
+              <a:rPr lang="zh-CN" altLang="en-US" dirty="0"/>
+              <a:t>有些老板比一般技术人员更懂市场和竞争。</a:t>
+            </a:r>
+            <a:endParaRPr lang="en-US" altLang="zh-CN" dirty="0"/>
+          </a:p>
+          <a:p>
+            <a:pPr>
+              <a:lnSpc>
+                <a:spcPct val="120000"/>
+              </a:lnSpc>
+            </a:pPr>
+            <a:r>
+              <a:rPr lang="zh-CN" altLang="en-US" dirty="0"/>
+              <a:t>软件团队尚未成熟，不懂得如何独立地进行需求分析，不懂得如何对行政领导有技巧 地说“不”，也不知道如何说服利益相关者（</a:t>
+            </a:r>
+            <a:r>
+              <a:rPr lang="en-US" altLang="zh-CN" dirty="0"/>
+              <a:t>Stake holder</a:t>
+            </a:r>
+            <a:r>
+              <a:rPr lang="zh-CN" altLang="en-US" dirty="0"/>
+              <a:t>）同意并支持正确的项目方 向。既然不能驱动团队成员，那只能靠外力来驱动了。</a:t>
+            </a:r>
             <a:endParaRPr lang="en-US" dirty="0"/>
           </a:p>
         </p:txBody>
@@ -18331,7 +19475,7 @@
     </p:spTree>
     <p:extLst>
       <p:ext uri="{BB962C8B-B14F-4D97-AF65-F5344CB8AC3E}">
-        <p14:creationId xmlns:p14="http://schemas.microsoft.com/office/powerpoint/2010/main" val="3435014385"/>
+        <p14:creationId xmlns:p14="http://schemas.microsoft.com/office/powerpoint/2010/main" val="2083371263"/>
       </p:ext>
     </p:extLst>
   </p:cSld>
@@ -18341,7 +19485,7 @@
 </p:sld>
 </file>
 
-<file path=ppt/slides/slide40.xml><?xml version="1.0" encoding="utf-8"?>
+<file path=ppt/slides/slide44.xml><?xml version="1.0" encoding="utf-8"?>
 <p:sld xmlns:a="http://schemas.openxmlformats.org/drawingml/2006/main" xmlns:r="http://schemas.openxmlformats.org/officeDocument/2006/relationships" xmlns:p="http://schemas.openxmlformats.org/presentationml/2006/main">
   <p:cSld>
     <p:spTree>
@@ -18370,154 +19514,6 @@
         </p:nvSpPr>
         <p:spPr/>
         <p:txBody>
-          <a:bodyPr/>
-          <a:lstStyle/>
-          <a:p>
-            <a:r>
-              <a:rPr lang="zh-CN" altLang="en-US" dirty="0"/>
-              <a:t>老板驱动的流程</a:t>
-            </a:r>
-            <a:endParaRPr lang="en-US" dirty="0"/>
-          </a:p>
-        </p:txBody>
-      </p:sp>
-      <p:sp>
-        <p:nvSpPr>
-          <p:cNvPr id="3" name="内容占位符 2"/>
-          <p:cNvSpPr>
-            <a:spLocks noGrp="1"/>
-          </p:cNvSpPr>
-          <p:nvPr>
-            <p:ph idx="1"/>
-          </p:nvPr>
-        </p:nvSpPr>
-        <p:spPr/>
-        <p:txBody>
-          <a:bodyPr>
-            <a:normAutofit fontScale="77500" lnSpcReduction="20000"/>
-          </a:bodyPr>
-          <a:lstStyle/>
-          <a:p>
-            <a:pPr marL="118872" indent="0">
-              <a:lnSpc>
-                <a:spcPct val="120000"/>
-              </a:lnSpc>
-              <a:buNone/>
-            </a:pPr>
-            <a:r>
-              <a:rPr lang="zh-CN" altLang="en-US" dirty="0"/>
-              <a:t>什么都是老板说了算</a:t>
-            </a:r>
-            <a:r>
-              <a:rPr lang="en-US" altLang="zh-CN" dirty="0"/>
-              <a:t>,  </a:t>
-            </a:r>
-            <a:r>
-              <a:rPr lang="zh-CN" altLang="en-US" dirty="0"/>
-              <a:t>存在有一定的合理性</a:t>
-            </a:r>
-            <a:endParaRPr lang="en-US" altLang="zh-CN" dirty="0"/>
-          </a:p>
-          <a:p>
-            <a:pPr>
-              <a:lnSpc>
-                <a:spcPct val="120000"/>
-              </a:lnSpc>
-            </a:pPr>
-            <a:r>
-              <a:rPr lang="zh-CN" altLang="en-US" dirty="0"/>
-              <a:t>当软件订单的获得不是主要靠技术实力，而是靠个人关系，或者暗箱操作的时候，老 板的能力决定了一个团队是否能获得订单，既然软件的具体功能并不重要（或者哪个 团队做水平都差不多），那么老板说做什么就做什么。 </a:t>
-            </a:r>
-            <a:endParaRPr lang="en-US" altLang="zh-CN" dirty="0"/>
-          </a:p>
-          <a:p>
-            <a:pPr>
-              <a:lnSpc>
-                <a:spcPct val="120000"/>
-              </a:lnSpc>
-            </a:pPr>
-            <a:r>
-              <a:rPr lang="zh-CN" altLang="en-US" dirty="0"/>
-              <a:t>在大型企业内部，软件功能往往由行政体系来决定。 </a:t>
-            </a:r>
-            <a:endParaRPr lang="en-US" altLang="zh-CN" dirty="0"/>
-          </a:p>
-          <a:p>
-            <a:pPr>
-              <a:lnSpc>
-                <a:spcPct val="120000"/>
-              </a:lnSpc>
-            </a:pPr>
-            <a:r>
-              <a:rPr lang="zh-CN" altLang="en-US" dirty="0"/>
-              <a:t>有些老板比一般技术人员更懂市场和竞争。</a:t>
-            </a:r>
-            <a:endParaRPr lang="en-US" altLang="zh-CN" dirty="0"/>
-          </a:p>
-          <a:p>
-            <a:pPr>
-              <a:lnSpc>
-                <a:spcPct val="120000"/>
-              </a:lnSpc>
-            </a:pPr>
-            <a:r>
-              <a:rPr lang="zh-CN" altLang="en-US" dirty="0"/>
-              <a:t>软件团队尚未成熟，不懂得如何独立地进行需求分析，不懂得如何对行政领导有技巧 地说“不”，也不知道如何说服利益相关者（</a:t>
-            </a:r>
-            <a:r>
-              <a:rPr lang="en-US" altLang="zh-CN" dirty="0"/>
-              <a:t>Stake holder</a:t>
-            </a:r>
-            <a:r>
-              <a:rPr lang="zh-CN" altLang="en-US" dirty="0"/>
-              <a:t>）同意并支持正确的项目方 向。既然不能驱动团队成员，那只能靠外力来驱动了。</a:t>
-            </a:r>
-            <a:endParaRPr lang="en-US" dirty="0"/>
-          </a:p>
-        </p:txBody>
-      </p:sp>
-    </p:spTree>
-    <p:extLst>
-      <p:ext uri="{BB962C8B-B14F-4D97-AF65-F5344CB8AC3E}">
-        <p14:creationId xmlns:p14="http://schemas.microsoft.com/office/powerpoint/2010/main" val="2083371263"/>
-      </p:ext>
-    </p:extLst>
-  </p:cSld>
-  <p:clrMapOvr>
-    <a:masterClrMapping/>
-  </p:clrMapOvr>
-</p:sld>
-</file>
-
-<file path=ppt/slides/slide41.xml><?xml version="1.0" encoding="utf-8"?>
-<p:sld xmlns:a="http://schemas.openxmlformats.org/drawingml/2006/main" xmlns:r="http://schemas.openxmlformats.org/officeDocument/2006/relationships" xmlns:p="http://schemas.openxmlformats.org/presentationml/2006/main">
-  <p:cSld>
-    <p:spTree>
-      <p:nvGrpSpPr>
-        <p:cNvPr id="1" name=""/>
-        <p:cNvGrpSpPr/>
-        <p:nvPr/>
-      </p:nvGrpSpPr>
-      <p:grpSpPr>
-        <a:xfrm>
-          <a:off x="0" y="0"/>
-          <a:ext cx="0" cy="0"/>
-          <a:chOff x="0" y="0"/>
-          <a:chExt cx="0" cy="0"/>
-        </a:xfrm>
-      </p:grpSpPr>
-      <p:sp>
-        <p:nvSpPr>
-          <p:cNvPr id="2" name="标题 1"/>
-          <p:cNvSpPr>
-            <a:spLocks noGrp="1"/>
-          </p:cNvSpPr>
-          <p:nvPr>
-            <p:ph type="title"/>
-          </p:nvPr>
-        </p:nvSpPr>
-        <p:spPr/>
-        <p:txBody>
           <a:bodyPr>
             <a:normAutofit/>
           </a:bodyPr>
@@ -18590,7 +19586,7 @@
 </p:sld>
 </file>
 
-<file path=ppt/slides/slide42.xml><?xml version="1.0" encoding="utf-8"?>
+<file path=ppt/slides/slide45.xml><?xml version="1.0" encoding="utf-8"?>
 <p:sld xmlns:a="http://schemas.openxmlformats.org/drawingml/2006/main" xmlns:r="http://schemas.openxmlformats.org/officeDocument/2006/relationships" xmlns:p="http://schemas.openxmlformats.org/presentationml/2006/main">
   <p:cSld>
     <p:spTree>
@@ -18798,493 +19794,6 @@
 </p:sld>
 </file>
 
-<file path=ppt/slides/slide43.xml><?xml version="1.0" encoding="utf-8"?>
-<p:sld xmlns:a="http://schemas.openxmlformats.org/drawingml/2006/main" xmlns:r="http://schemas.openxmlformats.org/officeDocument/2006/relationships" xmlns:p="http://schemas.openxmlformats.org/presentationml/2006/main">
-  <p:cSld>
-    <p:spTree>
-      <p:nvGrpSpPr>
-        <p:cNvPr id="1" name=""/>
-        <p:cNvGrpSpPr/>
-        <p:nvPr/>
-      </p:nvGrpSpPr>
-      <p:grpSpPr>
-        <a:xfrm>
-          <a:off x="0" y="0"/>
-          <a:ext cx="0" cy="0"/>
-          <a:chOff x="0" y="0"/>
-          <a:chExt cx="0" cy="0"/>
-        </a:xfrm>
-      </p:grpSpPr>
-      <p:sp>
-        <p:nvSpPr>
-          <p:cNvPr id="2" name="标题 1"/>
-          <p:cNvSpPr>
-            <a:spLocks noGrp="1"/>
-          </p:cNvSpPr>
-          <p:nvPr>
-            <p:ph type="title"/>
-          </p:nvPr>
-        </p:nvSpPr>
-        <p:spPr/>
-        <p:txBody>
-          <a:bodyPr/>
-          <a:lstStyle/>
-          <a:p>
-            <a:r>
-              <a:rPr lang="en-US" altLang="zh-CN" dirty="0"/>
-              <a:t>MVP &amp; MBP</a:t>
-            </a:r>
-            <a:endParaRPr lang="en-US" dirty="0"/>
-          </a:p>
-        </p:txBody>
-      </p:sp>
-      <p:sp>
-        <p:nvSpPr>
-          <p:cNvPr id="3" name="内容占位符 2"/>
-          <p:cNvSpPr>
-            <a:spLocks noGrp="1"/>
-          </p:cNvSpPr>
-          <p:nvPr>
-            <p:ph idx="1"/>
-          </p:nvPr>
-        </p:nvSpPr>
-        <p:spPr/>
-        <p:txBody>
-          <a:bodyPr>
-            <a:normAutofit/>
-          </a:bodyPr>
-          <a:lstStyle/>
-          <a:p>
-            <a:r>
-              <a:rPr lang="en-US" dirty="0"/>
-              <a:t>MVP — Minimum Viable Product，</a:t>
-            </a:r>
-          </a:p>
-          <a:p>
-            <a:pPr lvl="1"/>
-            <a:r>
-              <a:rPr lang="zh-CN" altLang="en-US" dirty="0"/>
-              <a:t>最小可行产品，又称为</a:t>
-            </a:r>
-            <a:r>
-              <a:rPr lang="en-US" dirty="0"/>
-              <a:t>Minimal Feature Set，</a:t>
-            </a:r>
-            <a:r>
-              <a:rPr lang="zh-CN" altLang="en-US" dirty="0"/>
-              <a:t>最小功能集。</a:t>
-            </a:r>
-          </a:p>
-          <a:p>
-            <a:pPr lvl="1"/>
-            <a:r>
-              <a:rPr lang="zh-CN" altLang="en-US" dirty="0"/>
-              <a:t>把产品最核心的功能用最小的成本实现出来（或者描绘出来），然后快速征求 用户意见。</a:t>
-            </a:r>
-            <a:endParaRPr lang="en-US" altLang="zh-CN" dirty="0"/>
-          </a:p>
-          <a:p>
-            <a:r>
-              <a:rPr lang="en-US" altLang="zh-CN" dirty="0"/>
-              <a:t>MBP</a:t>
-            </a:r>
-          </a:p>
-          <a:p>
-            <a:pPr lvl="1"/>
-            <a:r>
-              <a:rPr lang="en-US" dirty="0"/>
-              <a:t>Maximal Beautiful Product（</a:t>
-            </a:r>
-            <a:r>
-              <a:rPr lang="zh-CN" altLang="en-US" dirty="0"/>
-              <a:t>最强最美产品）</a:t>
-            </a:r>
-            <a:endParaRPr lang="en-US" altLang="zh-CN" dirty="0"/>
-          </a:p>
-          <a:p>
-            <a:pPr lvl="1"/>
-            <a:r>
-              <a:rPr lang="zh-CN" altLang="en-US" dirty="0"/>
-              <a:t>如果对用户的需求了然于心，或者产品团队比用户 更了解用户的需求，为何不把产品最全、最美的形态展现出来，一举征服用户？</a:t>
-            </a:r>
-            <a:endParaRPr lang="en-US" altLang="zh-CN" dirty="0"/>
-          </a:p>
-          <a:p>
-            <a:r>
-              <a:rPr lang="zh-CN" altLang="en-US" b="1" dirty="0"/>
-              <a:t>讨论</a:t>
-            </a:r>
-            <a:endParaRPr lang="en-US" altLang="zh-CN" b="1" dirty="0"/>
-          </a:p>
-          <a:p>
-            <a:pPr lvl="1"/>
-            <a:r>
-              <a:rPr lang="en-US" dirty="0"/>
-              <a:t>iPhone, iPad </a:t>
-            </a:r>
-            <a:r>
-              <a:rPr lang="zh-CN" altLang="en-US" dirty="0"/>
-              <a:t>的第一版，是</a:t>
-            </a:r>
-            <a:r>
-              <a:rPr lang="en-US" altLang="zh-CN" dirty="0"/>
-              <a:t>MVP </a:t>
-            </a:r>
-            <a:r>
-              <a:rPr lang="zh-CN" altLang="en-US" dirty="0"/>
-              <a:t>还是 </a:t>
-            </a:r>
-            <a:r>
-              <a:rPr lang="en-US" altLang="zh-CN" dirty="0"/>
-              <a:t>MBP</a:t>
-            </a:r>
-            <a:r>
-              <a:rPr lang="zh-CN" altLang="en-US" dirty="0"/>
-              <a:t>？</a:t>
-            </a:r>
-            <a:endParaRPr lang="en-US" dirty="0"/>
-          </a:p>
-        </p:txBody>
-      </p:sp>
-    </p:spTree>
-    <p:extLst>
-      <p:ext uri="{BB962C8B-B14F-4D97-AF65-F5344CB8AC3E}">
-        <p14:creationId xmlns:p14="http://schemas.microsoft.com/office/powerpoint/2010/main" val="2203527375"/>
-      </p:ext>
-    </p:extLst>
-  </p:cSld>
-  <p:clrMapOvr>
-    <a:masterClrMapping/>
-  </p:clrMapOvr>
-</p:sld>
-</file>
-
-<file path=ppt/slides/slide44.xml><?xml version="1.0" encoding="utf-8"?>
-<p:sld xmlns:a="http://schemas.openxmlformats.org/drawingml/2006/main" xmlns:r="http://schemas.openxmlformats.org/officeDocument/2006/relationships" xmlns:p="http://schemas.openxmlformats.org/presentationml/2006/main">
-  <p:cSld>
-    <p:spTree>
-      <p:nvGrpSpPr>
-        <p:cNvPr id="1" name=""/>
-        <p:cNvGrpSpPr/>
-        <p:nvPr/>
-      </p:nvGrpSpPr>
-      <p:grpSpPr>
-        <a:xfrm>
-          <a:off x="0" y="0"/>
-          <a:ext cx="0" cy="0"/>
-          <a:chOff x="0" y="0"/>
-          <a:chExt cx="0" cy="0"/>
-        </a:xfrm>
-      </p:grpSpPr>
-      <p:sp>
-        <p:nvSpPr>
-          <p:cNvPr id="2" name="标题 1"/>
-          <p:cNvSpPr>
-            <a:spLocks noGrp="1"/>
-          </p:cNvSpPr>
-          <p:nvPr>
-            <p:ph type="title"/>
-          </p:nvPr>
-        </p:nvSpPr>
-        <p:spPr/>
-        <p:txBody>
-          <a:bodyPr/>
-          <a:lstStyle/>
-          <a:p>
-            <a:r>
-              <a:rPr lang="en-US" altLang="zh-CN" dirty="0"/>
-              <a:t>Team Software Process</a:t>
-            </a:r>
-            <a:endParaRPr lang="en-US" dirty="0"/>
-          </a:p>
-        </p:txBody>
-      </p:sp>
-      <p:sp>
-        <p:nvSpPr>
-          <p:cNvPr id="3" name="内容占位符 2"/>
-          <p:cNvSpPr>
-            <a:spLocks noGrp="1"/>
-          </p:cNvSpPr>
-          <p:nvPr>
-            <p:ph idx="1"/>
-          </p:nvPr>
-        </p:nvSpPr>
-        <p:spPr/>
-        <p:txBody>
-          <a:bodyPr>
-            <a:normAutofit fontScale="55000" lnSpcReduction="20000"/>
-          </a:bodyPr>
-          <a:lstStyle/>
-          <a:p>
-            <a:pPr marL="118872" indent="0">
-              <a:lnSpc>
-                <a:spcPct val="120000"/>
-              </a:lnSpc>
-              <a:buNone/>
-            </a:pPr>
-            <a:r>
-              <a:rPr lang="zh-CN" altLang="en-US" dirty="0"/>
-              <a:t>优秀的模式和流程有什么共同点呢？</a:t>
-            </a:r>
-            <a:r>
-              <a:rPr lang="en-US" altLang="zh-CN" dirty="0"/>
-              <a:t>Team Software Process </a:t>
-            </a:r>
-            <a:r>
-              <a:rPr lang="zh-CN" altLang="en-US" dirty="0"/>
-              <a:t>（</a:t>
-            </a:r>
-            <a:r>
-              <a:rPr lang="en-US" altLang="zh-CN" dirty="0"/>
-              <a:t>TSP</a:t>
-            </a:r>
-            <a:r>
-              <a:rPr lang="zh-CN" altLang="en-US" dirty="0"/>
-              <a:t>）的原则： </a:t>
-            </a:r>
-            <a:endParaRPr lang="en-US" altLang="zh-CN" dirty="0"/>
-          </a:p>
-          <a:p>
-            <a:pPr>
-              <a:lnSpc>
-                <a:spcPct val="120000"/>
-              </a:lnSpc>
-            </a:pPr>
-            <a:r>
-              <a:rPr lang="en-US" altLang="zh-CN" dirty="0"/>
-              <a:t>1.  </a:t>
-            </a:r>
-            <a:r>
-              <a:rPr lang="zh-CN" altLang="en-US" dirty="0"/>
-              <a:t>使用妥善定义的流程，流程中的每一步都是可以重复、可以衡量结果的。</a:t>
-            </a:r>
-          </a:p>
-          <a:p>
-            <a:pPr>
-              <a:lnSpc>
-                <a:spcPct val="120000"/>
-              </a:lnSpc>
-            </a:pPr>
-            <a:r>
-              <a:rPr lang="en-US" altLang="zh-CN" dirty="0"/>
-              <a:t>2.  </a:t>
-            </a:r>
-            <a:r>
-              <a:rPr lang="zh-CN" altLang="en-US" dirty="0"/>
-              <a:t>团队的各个成员对团队的目标，角色，产品都有统一的理解。 </a:t>
-            </a:r>
-            <a:endParaRPr lang="en-US" altLang="zh-CN" dirty="0"/>
-          </a:p>
-          <a:p>
-            <a:pPr>
-              <a:lnSpc>
-                <a:spcPct val="120000"/>
-              </a:lnSpc>
-            </a:pPr>
-            <a:r>
-              <a:rPr lang="en-US" altLang="zh-CN" dirty="0"/>
-              <a:t>3.  </a:t>
-            </a:r>
-            <a:r>
-              <a:rPr lang="zh-CN" altLang="en-US" dirty="0"/>
-              <a:t>尽量使用成熟的技术和做法。 </a:t>
-            </a:r>
-            <a:endParaRPr lang="en-US" altLang="zh-CN" dirty="0"/>
-          </a:p>
-          <a:p>
-            <a:pPr>
-              <a:lnSpc>
-                <a:spcPct val="120000"/>
-              </a:lnSpc>
-            </a:pPr>
-            <a:r>
-              <a:rPr lang="en-US" altLang="zh-CN" dirty="0"/>
-              <a:t>4.  </a:t>
-            </a:r>
-            <a:r>
-              <a:rPr lang="zh-CN" altLang="en-US" dirty="0"/>
-              <a:t>尽量多地收集数据（也包括对团队不利的数据），并用数据来帮助团队做出理性的决定。 </a:t>
-            </a:r>
-            <a:endParaRPr lang="en-US" altLang="zh-CN" dirty="0"/>
-          </a:p>
-          <a:p>
-            <a:pPr>
-              <a:lnSpc>
-                <a:spcPct val="120000"/>
-              </a:lnSpc>
-            </a:pPr>
-            <a:r>
-              <a:rPr lang="en-US" altLang="zh-CN" dirty="0"/>
-              <a:t>5.  </a:t>
-            </a:r>
-            <a:r>
-              <a:rPr lang="zh-CN" altLang="en-US" dirty="0"/>
-              <a:t>制定切合实际的计划和承诺，团队计划要由负责具体执行的的角色来制定（而不是从上级而来）。 </a:t>
-            </a:r>
-            <a:endParaRPr lang="en-US" altLang="zh-CN" dirty="0"/>
-          </a:p>
-          <a:p>
-            <a:pPr>
-              <a:lnSpc>
-                <a:spcPct val="120000"/>
-              </a:lnSpc>
-            </a:pPr>
-            <a:r>
-              <a:rPr lang="en-US" altLang="zh-CN" dirty="0"/>
-              <a:t>6.  </a:t>
-            </a:r>
-            <a:r>
-              <a:rPr lang="zh-CN" altLang="en-US" dirty="0"/>
-              <a:t>增加团队的自我管理能力。 </a:t>
-            </a:r>
-            <a:endParaRPr lang="en-US" altLang="zh-CN" dirty="0"/>
-          </a:p>
-          <a:p>
-            <a:pPr>
-              <a:lnSpc>
-                <a:spcPct val="120000"/>
-              </a:lnSpc>
-            </a:pPr>
-            <a:r>
-              <a:rPr lang="en-US" altLang="zh-CN" dirty="0"/>
-              <a:t>7.  </a:t>
-            </a:r>
-            <a:r>
-              <a:rPr lang="zh-CN" altLang="en-US" dirty="0"/>
-              <a:t>专注于提高质量，争取在软件生命周期的早期发现问题。最有效提高质量的办法是做全面而细致的设计工作（而不是在后期匆忙修复问题）</a:t>
-            </a:r>
-            <a:endParaRPr lang="en-US" altLang="zh-CN" dirty="0"/>
-          </a:p>
-          <a:p>
-            <a:pPr marL="118872" indent="0">
-              <a:lnSpc>
-                <a:spcPct val="120000"/>
-              </a:lnSpc>
-              <a:buNone/>
-            </a:pPr>
-            <a:r>
-              <a:rPr lang="zh-CN" altLang="en-US" b="1" dirty="0"/>
-              <a:t>讨论：</a:t>
-            </a:r>
-            <a:endParaRPr lang="en-US" altLang="zh-CN" b="1" dirty="0"/>
-          </a:p>
-          <a:p>
-            <a:pPr lvl="1">
-              <a:lnSpc>
-                <a:spcPct val="120000"/>
-              </a:lnSpc>
-            </a:pPr>
-            <a:r>
-              <a:rPr lang="zh-CN" altLang="en-US" dirty="0"/>
-              <a:t>你们小组的开发模式，流程有这些特点么？（</a:t>
-            </a:r>
-            <a:r>
-              <a:rPr lang="en-US" altLang="zh-CN" dirty="0"/>
-              <a:t>10 </a:t>
-            </a:r>
-            <a:r>
-              <a:rPr lang="zh-CN" altLang="en-US" dirty="0"/>
-              <a:t>分钟）</a:t>
-            </a:r>
-          </a:p>
-          <a:p>
-            <a:pPr marL="118872" indent="0">
-              <a:lnSpc>
-                <a:spcPct val="120000"/>
-              </a:lnSpc>
-              <a:buNone/>
-            </a:pPr>
-            <a:endParaRPr lang="en-US" dirty="0"/>
-          </a:p>
-        </p:txBody>
-      </p:sp>
-    </p:spTree>
-    <p:extLst>
-      <p:ext uri="{BB962C8B-B14F-4D97-AF65-F5344CB8AC3E}">
-        <p14:creationId xmlns:p14="http://schemas.microsoft.com/office/powerpoint/2010/main" val="2856180883"/>
-      </p:ext>
-    </p:extLst>
-  </p:cSld>
-  <p:clrMapOvr>
-    <a:masterClrMapping/>
-  </p:clrMapOvr>
-</p:sld>
-</file>
-
-<file path=ppt/slides/slide45.xml><?xml version="1.0" encoding="utf-8"?>
-<p:sld xmlns:a="http://schemas.openxmlformats.org/drawingml/2006/main" xmlns:r="http://schemas.openxmlformats.org/officeDocument/2006/relationships" xmlns:p="http://schemas.openxmlformats.org/presentationml/2006/main" show="0">
-  <p:cSld>
-    <p:spTree>
-      <p:nvGrpSpPr>
-        <p:cNvPr id="1" name=""/>
-        <p:cNvGrpSpPr/>
-        <p:nvPr/>
-      </p:nvGrpSpPr>
-      <p:grpSpPr>
-        <a:xfrm>
-          <a:off x="0" y="0"/>
-          <a:ext cx="0" cy="0"/>
-          <a:chOff x="0" y="0"/>
-          <a:chExt cx="0" cy="0"/>
-        </a:xfrm>
-      </p:grpSpPr>
-      <p:sp>
-        <p:nvSpPr>
-          <p:cNvPr id="2" name="Title 1"/>
-          <p:cNvSpPr>
-            <a:spLocks noGrp="1"/>
-          </p:cNvSpPr>
-          <p:nvPr>
-            <p:ph type="title"/>
-          </p:nvPr>
-        </p:nvSpPr>
-        <p:spPr/>
-        <p:txBody>
-          <a:bodyPr/>
-          <a:lstStyle/>
-          <a:p>
-            <a:r>
-              <a:rPr lang="en-US" dirty="0"/>
-              <a:t>Reading material</a:t>
-            </a:r>
-          </a:p>
-        </p:txBody>
-      </p:sp>
-      <p:sp>
-        <p:nvSpPr>
-          <p:cNvPr id="3" name="Content Placeholder 2"/>
-          <p:cNvSpPr>
-            <a:spLocks noGrp="1"/>
-          </p:cNvSpPr>
-          <p:nvPr>
-            <p:ph idx="1"/>
-          </p:nvPr>
-        </p:nvSpPr>
-        <p:spPr/>
-        <p:txBody>
-          <a:bodyPr/>
-          <a:lstStyle/>
-          <a:p>
-            <a:r>
-              <a:rPr lang="en-US" dirty="0"/>
-              <a:t>Rapid Development, Chapter 7, “Lifecycle Planning” (p. 133)</a:t>
-            </a:r>
-          </a:p>
-        </p:txBody>
-      </p:sp>
-    </p:spTree>
-    <p:extLst>
-      <p:ext uri="{BB962C8B-B14F-4D97-AF65-F5344CB8AC3E}">
-        <p14:creationId xmlns:p14="http://schemas.microsoft.com/office/powerpoint/2010/main" val="966694093"/>
-      </p:ext>
-    </p:extLst>
-  </p:cSld>
-  <p:clrMapOvr>
-    <a:masterClrMapping/>
-  </p:clrMapOvr>
-</p:sld>
-</file>
-
 <file path=ppt/slides/slide46.xml><?xml version="1.0" encoding="utf-8"?>
 <p:sld xmlns:a="http://schemas.openxmlformats.org/drawingml/2006/main" xmlns:r="http://schemas.openxmlformats.org/officeDocument/2006/relationships" xmlns:p="http://schemas.openxmlformats.org/presentationml/2006/main">
   <p:cSld>
@@ -19304,7 +19813,7 @@
       </p:grpSpPr>
       <p:sp>
         <p:nvSpPr>
-          <p:cNvPr id="2" name="Title 1"/>
+          <p:cNvPr id="2" name="标题 1"/>
           <p:cNvSpPr>
             <a:spLocks noGrp="1"/>
           </p:cNvSpPr>
@@ -19318,8 +19827,8 @@
           <a:lstStyle/>
           <a:p>
             <a:r>
-              <a:rPr lang="zh-CN" altLang="en-US" dirty="0"/>
-              <a:t>讨论：会有新的软件开发流程么？</a:t>
+              <a:rPr lang="en-US" altLang="zh-CN" dirty="0"/>
+              <a:t>MVP &amp; MBP</a:t>
             </a:r>
             <a:endParaRPr lang="en-US" dirty="0"/>
           </a:p>
@@ -19327,7 +19836,7 @@
       </p:sp>
       <p:sp>
         <p:nvSpPr>
-          <p:cNvPr id="3" name="Content Placeholder 2"/>
+          <p:cNvPr id="3" name="内容占位符 2"/>
           <p:cNvSpPr>
             <a:spLocks noGrp="1"/>
           </p:cNvSpPr>
@@ -19343,111 +19852,92 @@
           <a:lstStyle/>
           <a:p>
             <a:r>
-              <a:rPr lang="zh-CN" altLang="en-US" dirty="0"/>
-              <a:t>环境在变化</a:t>
+              <a:rPr lang="en-US" dirty="0"/>
+              <a:t>MVP — Minimum Viable Product，</a:t>
+            </a:r>
+          </a:p>
+          <a:p>
+            <a:pPr lvl="1"/>
+            <a:r>
+              <a:rPr lang="zh-CN" altLang="en-US" dirty="0"/>
+              <a:t>最小可行产品，又称为</a:t>
+            </a:r>
+            <a:r>
+              <a:rPr lang="en-US" dirty="0"/>
+              <a:t>Minimal Feature Set，</a:t>
+            </a:r>
+            <a:r>
+              <a:rPr lang="zh-CN" altLang="en-US" dirty="0"/>
+              <a:t>最小功能集。</a:t>
+            </a:r>
+          </a:p>
+          <a:p>
+            <a:pPr lvl="1"/>
+            <a:r>
+              <a:rPr lang="zh-CN" altLang="en-US" dirty="0"/>
+              <a:t>把产品最核心的功能用最小的成本实现出来（或者描绘出来），然后快速征求 用户意见。</a:t>
             </a:r>
             <a:endParaRPr lang="en-US" altLang="zh-CN" dirty="0"/>
           </a:p>
           <a:p>
+            <a:r>
+              <a:rPr lang="en-US" altLang="zh-CN" dirty="0"/>
+              <a:t>MBP</a:t>
+            </a:r>
+          </a:p>
+          <a:p>
             <a:pPr lvl="1"/>
             <a:r>
-              <a:rPr lang="zh-CN" altLang="en-US" dirty="0"/>
-              <a:t>任何人都可以在任何地方</a:t>
-            </a:r>
-            <a:r>
-              <a:rPr lang="en-US" altLang="zh-CN" dirty="0"/>
-              <a:t>, </a:t>
-            </a:r>
-            <a:r>
-              <a:rPr lang="zh-CN" altLang="en-US" dirty="0"/>
-              <a:t>通过各种设备上网签入代码</a:t>
-            </a:r>
-            <a:endParaRPr lang="en-US" dirty="0"/>
-          </a:p>
-          <a:p>
-            <a:r>
-              <a:rPr lang="zh-CN" altLang="en-US" dirty="0"/>
-              <a:t>互联网</a:t>
-            </a:r>
-            <a:r>
-              <a:rPr lang="en-US" altLang="zh-CN" dirty="0"/>
-              <a:t>+</a:t>
-            </a:r>
-            <a:r>
-              <a:rPr lang="zh-CN" altLang="en-US" dirty="0"/>
-              <a:t>， </a:t>
-            </a:r>
-            <a:r>
-              <a:rPr lang="en-US" altLang="zh-CN" dirty="0"/>
-              <a:t>AI+</a:t>
-            </a:r>
-            <a:r>
-              <a:rPr lang="zh-CN" altLang="en-US" dirty="0"/>
-              <a:t>， 移动</a:t>
-            </a:r>
-            <a:r>
-              <a:rPr lang="en-US" altLang="zh-CN" dirty="0"/>
-              <a:t>+</a:t>
-            </a:r>
-            <a:endParaRPr lang="en-US" dirty="0"/>
+              <a:rPr lang="en-US" dirty="0"/>
+              <a:t>Maximal Beautiful Product（</a:t>
+            </a:r>
+            <a:r>
+              <a:rPr lang="zh-CN" altLang="en-US" dirty="0"/>
+              <a:t>最强最美产品）</a:t>
+            </a:r>
+            <a:endParaRPr lang="en-US" altLang="zh-CN" dirty="0"/>
           </a:p>
           <a:p>
             <a:pPr lvl="1"/>
             <a:r>
               <a:rPr lang="zh-CN" altLang="en-US" dirty="0"/>
-              <a:t>新的技术和商业模式</a:t>
-            </a:r>
-            <a:endParaRPr lang="en-US" dirty="0"/>
-          </a:p>
-          <a:p>
-            <a:pPr lvl="1"/>
-            <a:r>
-              <a:rPr lang="zh-CN" altLang="en-US" dirty="0"/>
-              <a:t>信息传播的速度很快</a:t>
-            </a:r>
-            <a:endParaRPr lang="en-US" dirty="0"/>
-          </a:p>
-          <a:p>
-            <a:r>
-              <a:rPr lang="zh-CN" altLang="en-US" dirty="0"/>
-              <a:t>会有新的开发模式么</a:t>
-            </a:r>
-            <a:r>
-              <a:rPr lang="en-US" altLang="zh-CN" dirty="0"/>
-              <a:t>?</a:t>
-            </a:r>
+              <a:t>如果对用户的需求了然于心，或者产品团队比用户 更了解用户的需求，为何不把产品最全、最美的形态展现出来，一举征服用户？</a:t>
+            </a:r>
+            <a:endParaRPr lang="en-US" altLang="zh-CN" dirty="0"/>
           </a:p>
           <a:p>
             <a:r>
               <a:rPr lang="zh-CN" altLang="en-US" b="1" dirty="0"/>
               <a:t>讨论</a:t>
             </a:r>
-            <a:r>
-              <a:rPr lang="en-US" altLang="zh-CN" b="1" dirty="0"/>
-              <a:t>+</a:t>
-            </a:r>
-            <a:r>
-              <a:rPr lang="zh-CN" altLang="en-US" b="1" dirty="0"/>
-              <a:t>作业</a:t>
-            </a:r>
-            <a:r>
-              <a:rPr lang="zh-CN" altLang="en-US" dirty="0"/>
-              <a:t>：</a:t>
+            <a:endParaRPr lang="en-US" altLang="zh-CN" b="1" dirty="0"/>
+          </a:p>
+          <a:p>
+            <a:pPr lvl="1"/>
+            <a:r>
+              <a:rPr lang="en-US" dirty="0"/>
+              <a:t>iPhone, iPad </a:t>
+            </a:r>
+            <a:r>
+              <a:rPr lang="zh-CN" altLang="en-US" dirty="0"/>
+              <a:t>的第一版，是</a:t>
             </a:r>
             <a:r>
               <a:rPr lang="en-US" altLang="zh-CN" dirty="0"/>
-              <a:t>10</a:t>
-            </a:r>
-            <a:r>
-              <a:rPr lang="zh-CN" altLang="en-US" dirty="0"/>
-              <a:t>年后会有什么新的开发模式？</a:t>
-            </a:r>
-            <a:endParaRPr lang="en-US" altLang="zh-CN" dirty="0"/>
-          </a:p>
-          <a:p>
-            <a:pPr marL="118872" indent="0">
-              <a:buNone/>
-            </a:pPr>
+              <a:t>MVP </a:t>
+            </a:r>
+            <a:r>
+              <a:rPr lang="zh-CN" altLang="en-US" dirty="0"/>
+              <a:t>还是 </a:t>
+            </a:r>
+            <a:r>
+              <a:rPr lang="en-US" altLang="zh-CN" dirty="0"/>
+              <a:t>MBP</a:t>
+            </a:r>
+            <a:r>
+              <a:rPr lang="zh-CN" altLang="en-US" dirty="0"/>
+              <a:t>？</a:t>
+            </a:r>
             <a:endParaRPr lang="en-US" dirty="0"/>
           </a:p>
         </p:txBody>
@@ -19455,7 +19945,7 @@
     </p:spTree>
     <p:extLst>
       <p:ext uri="{BB962C8B-B14F-4D97-AF65-F5344CB8AC3E}">
-        <p14:creationId xmlns:p14="http://schemas.microsoft.com/office/powerpoint/2010/main" val="1999221925"/>
+        <p14:creationId xmlns:p14="http://schemas.microsoft.com/office/powerpoint/2010/main" val="2203527375"/>
       </p:ext>
     </p:extLst>
   </p:cSld>
@@ -19484,6 +19974,701 @@
       </p:grpSpPr>
       <p:sp>
         <p:nvSpPr>
+          <p:cNvPr id="2" name="标题 1"/>
+          <p:cNvSpPr>
+            <a:spLocks noGrp="1"/>
+          </p:cNvSpPr>
+          <p:nvPr>
+            <p:ph type="title"/>
+          </p:nvPr>
+        </p:nvSpPr>
+        <p:spPr/>
+        <p:txBody>
+          <a:bodyPr/>
+          <a:lstStyle/>
+          <a:p>
+            <a:r>
+              <a:rPr lang="en-US" altLang="zh-CN" dirty="0"/>
+              <a:t>Team Software Process</a:t>
+            </a:r>
+            <a:endParaRPr lang="en-US" dirty="0"/>
+          </a:p>
+        </p:txBody>
+      </p:sp>
+      <p:sp>
+        <p:nvSpPr>
+          <p:cNvPr id="3" name="内容占位符 2"/>
+          <p:cNvSpPr>
+            <a:spLocks noGrp="1"/>
+          </p:cNvSpPr>
+          <p:nvPr>
+            <p:ph idx="1"/>
+          </p:nvPr>
+        </p:nvSpPr>
+        <p:spPr/>
+        <p:txBody>
+          <a:bodyPr>
+            <a:normAutofit fontScale="55000" lnSpcReduction="20000"/>
+          </a:bodyPr>
+          <a:lstStyle/>
+          <a:p>
+            <a:pPr marL="118872" indent="0">
+              <a:lnSpc>
+                <a:spcPct val="120000"/>
+              </a:lnSpc>
+              <a:buNone/>
+            </a:pPr>
+            <a:r>
+              <a:rPr lang="zh-CN" altLang="en-US" dirty="0"/>
+              <a:t>优秀的模式和流程有什么共同点呢？</a:t>
+            </a:r>
+            <a:r>
+              <a:rPr lang="en-US" altLang="zh-CN" dirty="0"/>
+              <a:t>Team Software Process </a:t>
+            </a:r>
+            <a:r>
+              <a:rPr lang="zh-CN" altLang="en-US" dirty="0"/>
+              <a:t>（</a:t>
+            </a:r>
+            <a:r>
+              <a:rPr lang="en-US" altLang="zh-CN" dirty="0"/>
+              <a:t>TSP</a:t>
+            </a:r>
+            <a:r>
+              <a:rPr lang="zh-CN" altLang="en-US" dirty="0"/>
+              <a:t>）的原则： </a:t>
+            </a:r>
+            <a:endParaRPr lang="en-US" altLang="zh-CN" dirty="0"/>
+          </a:p>
+          <a:p>
+            <a:pPr>
+              <a:lnSpc>
+                <a:spcPct val="120000"/>
+              </a:lnSpc>
+            </a:pPr>
+            <a:r>
+              <a:rPr lang="en-US" altLang="zh-CN" dirty="0"/>
+              <a:t>1.  </a:t>
+            </a:r>
+            <a:r>
+              <a:rPr lang="zh-CN" altLang="en-US" dirty="0"/>
+              <a:t>使用妥善定义的流程，流程中的每一步都是可以重复、可以衡量结果的。</a:t>
+            </a:r>
+          </a:p>
+          <a:p>
+            <a:pPr>
+              <a:lnSpc>
+                <a:spcPct val="120000"/>
+              </a:lnSpc>
+            </a:pPr>
+            <a:r>
+              <a:rPr lang="en-US" altLang="zh-CN" dirty="0"/>
+              <a:t>2.  </a:t>
+            </a:r>
+            <a:r>
+              <a:rPr lang="zh-CN" altLang="en-US" dirty="0"/>
+              <a:t>团队的各个成员对团队的目标，角色，产品都有统一的理解。 </a:t>
+            </a:r>
+            <a:endParaRPr lang="en-US" altLang="zh-CN" dirty="0"/>
+          </a:p>
+          <a:p>
+            <a:pPr>
+              <a:lnSpc>
+                <a:spcPct val="120000"/>
+              </a:lnSpc>
+            </a:pPr>
+            <a:r>
+              <a:rPr lang="en-US" altLang="zh-CN" dirty="0"/>
+              <a:t>3.  </a:t>
+            </a:r>
+            <a:r>
+              <a:rPr lang="zh-CN" altLang="en-US" dirty="0"/>
+              <a:t>尽量使用成熟的技术和做法。 </a:t>
+            </a:r>
+            <a:endParaRPr lang="en-US" altLang="zh-CN" dirty="0"/>
+          </a:p>
+          <a:p>
+            <a:pPr>
+              <a:lnSpc>
+                <a:spcPct val="120000"/>
+              </a:lnSpc>
+            </a:pPr>
+            <a:r>
+              <a:rPr lang="en-US" altLang="zh-CN" dirty="0"/>
+              <a:t>4.  </a:t>
+            </a:r>
+            <a:r>
+              <a:rPr lang="zh-CN" altLang="en-US" dirty="0"/>
+              <a:t>尽量多地收集数据（也包括对团队不利的数据），并用数据来帮助团队做出理性的决定。 </a:t>
+            </a:r>
+            <a:endParaRPr lang="en-US" altLang="zh-CN" dirty="0"/>
+          </a:p>
+          <a:p>
+            <a:pPr>
+              <a:lnSpc>
+                <a:spcPct val="120000"/>
+              </a:lnSpc>
+            </a:pPr>
+            <a:r>
+              <a:rPr lang="en-US" altLang="zh-CN" dirty="0"/>
+              <a:t>5.  </a:t>
+            </a:r>
+            <a:r>
+              <a:rPr lang="zh-CN" altLang="en-US" dirty="0"/>
+              <a:t>制定切合实际的计划和承诺，团队计划要由负责具体执行的的角色来制定（而不是从上级而来）。 </a:t>
+            </a:r>
+            <a:endParaRPr lang="en-US" altLang="zh-CN" dirty="0"/>
+          </a:p>
+          <a:p>
+            <a:pPr>
+              <a:lnSpc>
+                <a:spcPct val="120000"/>
+              </a:lnSpc>
+            </a:pPr>
+            <a:r>
+              <a:rPr lang="en-US" altLang="zh-CN" dirty="0"/>
+              <a:t>6.  </a:t>
+            </a:r>
+            <a:r>
+              <a:rPr lang="zh-CN" altLang="en-US" dirty="0"/>
+              <a:t>增加团队的自我管理能力。 </a:t>
+            </a:r>
+            <a:endParaRPr lang="en-US" altLang="zh-CN" dirty="0"/>
+          </a:p>
+          <a:p>
+            <a:pPr>
+              <a:lnSpc>
+                <a:spcPct val="120000"/>
+              </a:lnSpc>
+            </a:pPr>
+            <a:r>
+              <a:rPr lang="en-US" altLang="zh-CN" dirty="0"/>
+              <a:t>7.  </a:t>
+            </a:r>
+            <a:r>
+              <a:rPr lang="zh-CN" altLang="en-US" dirty="0"/>
+              <a:t>专注于提高质量，争取在软件生命周期的早期发现问题。最有效提高质量的办法是做全面而细致的设计工作（而不是在后期匆忙修复问题）</a:t>
+            </a:r>
+            <a:endParaRPr lang="en-US" altLang="zh-CN" dirty="0"/>
+          </a:p>
+          <a:p>
+            <a:pPr marL="118872" indent="0">
+              <a:lnSpc>
+                <a:spcPct val="120000"/>
+              </a:lnSpc>
+              <a:buNone/>
+            </a:pPr>
+            <a:r>
+              <a:rPr lang="zh-CN" altLang="en-US" b="1" dirty="0"/>
+              <a:t>讨论：</a:t>
+            </a:r>
+            <a:endParaRPr lang="en-US" altLang="zh-CN" b="1" dirty="0"/>
+          </a:p>
+          <a:p>
+            <a:pPr lvl="1">
+              <a:lnSpc>
+                <a:spcPct val="120000"/>
+              </a:lnSpc>
+            </a:pPr>
+            <a:r>
+              <a:rPr lang="zh-CN" altLang="en-US" dirty="0"/>
+              <a:t>你们小组的开发模式，流程有这些特点么？（</a:t>
+            </a:r>
+            <a:r>
+              <a:rPr lang="en-US" altLang="zh-CN" dirty="0"/>
+              <a:t>10 </a:t>
+            </a:r>
+            <a:r>
+              <a:rPr lang="zh-CN" altLang="en-US" dirty="0"/>
+              <a:t>分钟）</a:t>
+            </a:r>
+          </a:p>
+          <a:p>
+            <a:pPr marL="118872" indent="0">
+              <a:lnSpc>
+                <a:spcPct val="120000"/>
+              </a:lnSpc>
+              <a:buNone/>
+            </a:pPr>
+            <a:endParaRPr lang="en-US" dirty="0"/>
+          </a:p>
+        </p:txBody>
+      </p:sp>
+    </p:spTree>
+    <p:extLst>
+      <p:ext uri="{BB962C8B-B14F-4D97-AF65-F5344CB8AC3E}">
+        <p14:creationId xmlns:p14="http://schemas.microsoft.com/office/powerpoint/2010/main" val="2856180883"/>
+      </p:ext>
+    </p:extLst>
+  </p:cSld>
+  <p:clrMapOvr>
+    <a:masterClrMapping/>
+  </p:clrMapOvr>
+</p:sld>
+</file>
+
+<file path=ppt/slides/slide48.xml><?xml version="1.0" encoding="utf-8"?>
+<p:sld xmlns:a="http://schemas.openxmlformats.org/drawingml/2006/main" xmlns:r="http://schemas.openxmlformats.org/officeDocument/2006/relationships" xmlns:p="http://schemas.openxmlformats.org/presentationml/2006/main" show="0">
+  <p:cSld>
+    <p:spTree>
+      <p:nvGrpSpPr>
+        <p:cNvPr id="1" name=""/>
+        <p:cNvGrpSpPr/>
+        <p:nvPr/>
+      </p:nvGrpSpPr>
+      <p:grpSpPr>
+        <a:xfrm>
+          <a:off x="0" y="0"/>
+          <a:ext cx="0" cy="0"/>
+          <a:chOff x="0" y="0"/>
+          <a:chExt cx="0" cy="0"/>
+        </a:xfrm>
+      </p:grpSpPr>
+      <p:sp>
+        <p:nvSpPr>
+          <p:cNvPr id="2" name="Title 1"/>
+          <p:cNvSpPr>
+            <a:spLocks noGrp="1"/>
+          </p:cNvSpPr>
+          <p:nvPr>
+            <p:ph type="title"/>
+          </p:nvPr>
+        </p:nvSpPr>
+        <p:spPr/>
+        <p:txBody>
+          <a:bodyPr/>
+          <a:lstStyle/>
+          <a:p>
+            <a:r>
+              <a:rPr lang="en-US" dirty="0"/>
+              <a:t>Reading material</a:t>
+            </a:r>
+          </a:p>
+        </p:txBody>
+      </p:sp>
+      <p:sp>
+        <p:nvSpPr>
+          <p:cNvPr id="3" name="Content Placeholder 2"/>
+          <p:cNvSpPr>
+            <a:spLocks noGrp="1"/>
+          </p:cNvSpPr>
+          <p:nvPr>
+            <p:ph idx="1"/>
+          </p:nvPr>
+        </p:nvSpPr>
+        <p:spPr/>
+        <p:txBody>
+          <a:bodyPr/>
+          <a:lstStyle/>
+          <a:p>
+            <a:r>
+              <a:rPr lang="en-US" dirty="0"/>
+              <a:t>Rapid Development, Chapter 7, “Lifecycle Planning” (p. 133)</a:t>
+            </a:r>
+          </a:p>
+        </p:txBody>
+      </p:sp>
+    </p:spTree>
+    <p:extLst>
+      <p:ext uri="{BB962C8B-B14F-4D97-AF65-F5344CB8AC3E}">
+        <p14:creationId xmlns:p14="http://schemas.microsoft.com/office/powerpoint/2010/main" val="966694093"/>
+      </p:ext>
+    </p:extLst>
+  </p:cSld>
+  <p:clrMapOvr>
+    <a:masterClrMapping/>
+  </p:clrMapOvr>
+</p:sld>
+</file>
+
+<file path=ppt/slides/slide49.xml><?xml version="1.0" encoding="utf-8"?>
+<p:sld xmlns:a="http://schemas.openxmlformats.org/drawingml/2006/main" xmlns:r="http://schemas.openxmlformats.org/officeDocument/2006/relationships" xmlns:p="http://schemas.openxmlformats.org/presentationml/2006/main">
+  <p:cSld>
+    <p:spTree>
+      <p:nvGrpSpPr>
+        <p:cNvPr id="1" name=""/>
+        <p:cNvGrpSpPr/>
+        <p:nvPr/>
+      </p:nvGrpSpPr>
+      <p:grpSpPr>
+        <a:xfrm>
+          <a:off x="0" y="0"/>
+          <a:ext cx="0" cy="0"/>
+          <a:chOff x="0" y="0"/>
+          <a:chExt cx="0" cy="0"/>
+        </a:xfrm>
+      </p:grpSpPr>
+      <p:sp>
+        <p:nvSpPr>
+          <p:cNvPr id="2" name="Title 1"/>
+          <p:cNvSpPr>
+            <a:spLocks noGrp="1"/>
+          </p:cNvSpPr>
+          <p:nvPr>
+            <p:ph type="title"/>
+          </p:nvPr>
+        </p:nvSpPr>
+        <p:spPr/>
+        <p:txBody>
+          <a:bodyPr/>
+          <a:lstStyle/>
+          <a:p>
+            <a:r>
+              <a:rPr lang="zh-CN" altLang="en-US" dirty="0"/>
+              <a:t>讨论：会有新的软件开发流程么？</a:t>
+            </a:r>
+            <a:endParaRPr lang="en-US" dirty="0"/>
+          </a:p>
+        </p:txBody>
+      </p:sp>
+      <p:sp>
+        <p:nvSpPr>
+          <p:cNvPr id="3" name="Content Placeholder 2"/>
+          <p:cNvSpPr>
+            <a:spLocks noGrp="1"/>
+          </p:cNvSpPr>
+          <p:nvPr>
+            <p:ph idx="1"/>
+          </p:nvPr>
+        </p:nvSpPr>
+        <p:spPr/>
+        <p:txBody>
+          <a:bodyPr>
+            <a:normAutofit/>
+          </a:bodyPr>
+          <a:lstStyle/>
+          <a:p>
+            <a:r>
+              <a:rPr lang="zh-CN" altLang="en-US" dirty="0"/>
+              <a:t>环境在变化</a:t>
+            </a:r>
+            <a:endParaRPr lang="en-US" altLang="zh-CN" dirty="0"/>
+          </a:p>
+          <a:p>
+            <a:pPr lvl="1"/>
+            <a:r>
+              <a:rPr lang="zh-CN" altLang="en-US" dirty="0"/>
+              <a:t>任何人都可以在任何地方</a:t>
+            </a:r>
+            <a:r>
+              <a:rPr lang="en-US" altLang="zh-CN" dirty="0"/>
+              <a:t>, </a:t>
+            </a:r>
+            <a:r>
+              <a:rPr lang="zh-CN" altLang="en-US" dirty="0"/>
+              <a:t>通过各种设备上网签入代码</a:t>
+            </a:r>
+            <a:endParaRPr lang="en-US" dirty="0"/>
+          </a:p>
+          <a:p>
+            <a:r>
+              <a:rPr lang="zh-CN" altLang="en-US" dirty="0"/>
+              <a:t>互联网</a:t>
+            </a:r>
+            <a:r>
+              <a:rPr lang="en-US" altLang="zh-CN" dirty="0"/>
+              <a:t>+</a:t>
+            </a:r>
+            <a:r>
+              <a:rPr lang="zh-CN" altLang="en-US" dirty="0"/>
+              <a:t>， </a:t>
+            </a:r>
+            <a:r>
+              <a:rPr lang="en-US" altLang="zh-CN" dirty="0"/>
+              <a:t>AI+</a:t>
+            </a:r>
+            <a:r>
+              <a:rPr lang="zh-CN" altLang="en-US" dirty="0"/>
+              <a:t>， 移动</a:t>
+            </a:r>
+            <a:r>
+              <a:rPr lang="en-US" altLang="zh-CN" dirty="0"/>
+              <a:t>+</a:t>
+            </a:r>
+            <a:endParaRPr lang="en-US" dirty="0"/>
+          </a:p>
+          <a:p>
+            <a:pPr lvl="1"/>
+            <a:r>
+              <a:rPr lang="zh-CN" altLang="en-US" dirty="0"/>
+              <a:t>新的技术和商业模式</a:t>
+            </a:r>
+            <a:endParaRPr lang="en-US" dirty="0"/>
+          </a:p>
+          <a:p>
+            <a:pPr lvl="1"/>
+            <a:r>
+              <a:rPr lang="zh-CN" altLang="en-US" dirty="0"/>
+              <a:t>信息传播的速度很快</a:t>
+            </a:r>
+            <a:endParaRPr lang="en-US" dirty="0"/>
+          </a:p>
+          <a:p>
+            <a:r>
+              <a:rPr lang="zh-CN" altLang="en-US" dirty="0"/>
+              <a:t>会有新的开发模式么</a:t>
+            </a:r>
+            <a:r>
+              <a:rPr lang="en-US" altLang="zh-CN" dirty="0"/>
+              <a:t>?</a:t>
+            </a:r>
+          </a:p>
+          <a:p>
+            <a:endParaRPr lang="en-US" altLang="zh-CN" dirty="0"/>
+          </a:p>
+          <a:p>
+            <a:r>
+              <a:rPr lang="zh-CN" altLang="en-US" b="1" dirty="0"/>
+              <a:t>讨论</a:t>
+            </a:r>
+            <a:r>
+              <a:rPr lang="zh-CN" altLang="en-US" dirty="0"/>
+              <a:t>：在开源的社区中，会有什么新的开发模式？</a:t>
+            </a:r>
+            <a:endParaRPr lang="en-US" altLang="zh-CN" dirty="0"/>
+          </a:p>
+          <a:p>
+            <a:pPr marL="118872" indent="0">
+              <a:buNone/>
+            </a:pPr>
+            <a:endParaRPr lang="en-US" dirty="0"/>
+          </a:p>
+        </p:txBody>
+      </p:sp>
+    </p:spTree>
+    <p:extLst>
+      <p:ext uri="{BB962C8B-B14F-4D97-AF65-F5344CB8AC3E}">
+        <p14:creationId xmlns:p14="http://schemas.microsoft.com/office/powerpoint/2010/main" val="1999221925"/>
+      </p:ext>
+    </p:extLst>
+  </p:cSld>
+  <p:clrMapOvr>
+    <a:masterClrMapping/>
+  </p:clrMapOvr>
+</p:sld>
+</file>
+
+<file path=ppt/slides/slide5.xml><?xml version="1.0" encoding="utf-8"?>
+<p:sld xmlns:a="http://schemas.openxmlformats.org/drawingml/2006/main" xmlns:r="http://schemas.openxmlformats.org/officeDocument/2006/relationships" xmlns:p="http://schemas.openxmlformats.org/presentationml/2006/main">
+  <p:cSld>
+    <p:spTree>
+      <p:nvGrpSpPr>
+        <p:cNvPr id="1" name=""/>
+        <p:cNvGrpSpPr/>
+        <p:nvPr/>
+      </p:nvGrpSpPr>
+      <p:grpSpPr>
+        <a:xfrm>
+          <a:off x="0" y="0"/>
+          <a:ext cx="0" cy="0"/>
+          <a:chOff x="0" y="0"/>
+          <a:chExt cx="0" cy="0"/>
+        </a:xfrm>
+      </p:grpSpPr>
+      <p:sp>
+        <p:nvSpPr>
+          <p:cNvPr id="2" name="Title 1"/>
+          <p:cNvSpPr>
+            <a:spLocks noGrp="1"/>
+          </p:cNvSpPr>
+          <p:nvPr>
+            <p:ph type="title"/>
+          </p:nvPr>
+        </p:nvSpPr>
+        <p:spPr/>
+        <p:txBody>
+          <a:bodyPr/>
+          <a:lstStyle/>
+          <a:p>
+            <a:r>
+              <a:rPr lang="en-US" dirty="0"/>
+              <a:t>Team vs. Work Group</a:t>
+            </a:r>
+          </a:p>
+        </p:txBody>
+      </p:sp>
+      <p:sp>
+        <p:nvSpPr>
+          <p:cNvPr id="3" name="Content Placeholder 2"/>
+          <p:cNvSpPr>
+            <a:spLocks noGrp="1"/>
+          </p:cNvSpPr>
+          <p:nvPr>
+            <p:ph idx="1"/>
+          </p:nvPr>
+        </p:nvSpPr>
+        <p:spPr/>
+        <p:txBody>
+          <a:bodyPr/>
+          <a:lstStyle/>
+          <a:p>
+            <a:r>
+              <a:rPr lang="en-US" dirty="0"/>
+              <a:t>Work Group </a:t>
+            </a:r>
+            <a:r>
+              <a:rPr lang="en-US" altLang="zh-CN" dirty="0"/>
+              <a:t>/ </a:t>
+            </a:r>
+            <a:r>
+              <a:rPr lang="zh-CN" altLang="en-US" dirty="0"/>
+              <a:t>工作组</a:t>
+            </a:r>
+            <a:endParaRPr lang="en-US" dirty="0"/>
+          </a:p>
+          <a:p>
+            <a:pPr lvl="1"/>
+            <a:r>
+              <a:rPr lang="en-US" dirty="0"/>
+              <a:t>A random group of people happen to be together to finish a task</a:t>
+            </a:r>
+          </a:p>
+          <a:p>
+            <a:pPr lvl="1"/>
+            <a:r>
+              <a:rPr lang="en-US" altLang="zh-CN" dirty="0"/>
+              <a:t>M</a:t>
+            </a:r>
+            <a:r>
+              <a:rPr lang="zh-CN" altLang="en-US" dirty="0"/>
+              <a:t>个人</a:t>
+            </a:r>
+            <a:r>
+              <a:rPr lang="en-US" altLang="zh-CN" dirty="0"/>
+              <a:t>, </a:t>
+            </a:r>
+            <a:r>
+              <a:rPr lang="zh-CN" altLang="en-US" dirty="0"/>
+              <a:t>各自把 </a:t>
+            </a:r>
+            <a:r>
+              <a:rPr lang="en-US" altLang="zh-CN" dirty="0"/>
+              <a:t>N </a:t>
+            </a:r>
+            <a:r>
+              <a:rPr lang="zh-CN" altLang="en-US" dirty="0"/>
+              <a:t>块砖从 </a:t>
+            </a:r>
+            <a:r>
+              <a:rPr lang="en-US" altLang="zh-CN" dirty="0"/>
+              <a:t>A </a:t>
+            </a:r>
+            <a:r>
+              <a:rPr lang="zh-CN" altLang="en-US" dirty="0"/>
+              <a:t>地运到 </a:t>
+            </a:r>
+            <a:r>
+              <a:rPr lang="en-US" altLang="zh-CN" dirty="0"/>
+              <a:t>B </a:t>
+            </a:r>
+            <a:r>
+              <a:rPr lang="zh-CN" altLang="en-US" dirty="0"/>
+              <a:t>地。 </a:t>
+            </a:r>
+            <a:endParaRPr lang="en-US" dirty="0"/>
+          </a:p>
+          <a:p>
+            <a:endParaRPr lang="en-US" dirty="0"/>
+          </a:p>
+          <a:p>
+            <a:r>
+              <a:rPr lang="en-US" dirty="0"/>
+              <a:t>Team</a:t>
+            </a:r>
+          </a:p>
+          <a:p>
+            <a:pPr lvl="1"/>
+            <a:r>
+              <a:rPr lang="en-US" dirty="0"/>
+              <a:t>Common mission, team members relies on each other</a:t>
+            </a:r>
+          </a:p>
+          <a:p>
+            <a:pPr lvl="1"/>
+            <a:r>
+              <a:rPr lang="en-US" altLang="zh-CN" dirty="0"/>
+              <a:t>M</a:t>
+            </a:r>
+            <a:r>
+              <a:rPr lang="zh-CN" altLang="en-US" dirty="0"/>
+              <a:t>个人</a:t>
+            </a:r>
+            <a:r>
+              <a:rPr lang="en-US" altLang="zh-CN" dirty="0"/>
+              <a:t>, </a:t>
+            </a:r>
+            <a:r>
+              <a:rPr lang="zh-CN" altLang="en-US" dirty="0"/>
+              <a:t>组成人链把 </a:t>
+            </a:r>
+            <a:r>
+              <a:rPr lang="en-US" altLang="zh-CN" dirty="0"/>
+              <a:t>N*M </a:t>
+            </a:r>
+            <a:r>
+              <a:rPr lang="zh-CN" altLang="en-US" dirty="0"/>
+              <a:t>块砖从 </a:t>
+            </a:r>
+            <a:r>
+              <a:rPr lang="en-US" altLang="zh-CN" dirty="0"/>
+              <a:t>A </a:t>
+            </a:r>
+            <a:r>
+              <a:rPr lang="zh-CN" altLang="en-US" dirty="0"/>
+              <a:t>地运到 </a:t>
+            </a:r>
+            <a:r>
+              <a:rPr lang="en-US" altLang="zh-CN" dirty="0"/>
+              <a:t>B</a:t>
+            </a:r>
+            <a:r>
+              <a:rPr lang="zh-CN" altLang="en-US" dirty="0"/>
+              <a:t> 地。</a:t>
+            </a:r>
+            <a:endParaRPr lang="en-US" altLang="zh-CN" dirty="0"/>
+          </a:p>
+          <a:p>
+            <a:pPr lvl="1"/>
+            <a:r>
+              <a:rPr lang="zh-CN" altLang="en-US" dirty="0"/>
+              <a:t>制造工具，更有效地运砖 </a:t>
+            </a:r>
+            <a:endParaRPr lang="en-US" dirty="0"/>
+          </a:p>
+        </p:txBody>
+      </p:sp>
+    </p:spTree>
+    <p:extLst>
+      <p:ext uri="{BB962C8B-B14F-4D97-AF65-F5344CB8AC3E}">
+        <p14:creationId xmlns:p14="http://schemas.microsoft.com/office/powerpoint/2010/main" val="1580964085"/>
+      </p:ext>
+    </p:extLst>
+  </p:cSld>
+  <p:clrMapOvr>
+    <a:masterClrMapping/>
+  </p:clrMapOvr>
+</p:sld>
+</file>
+
+<file path=ppt/slides/slide50.xml><?xml version="1.0" encoding="utf-8"?>
+<p:sld xmlns:a="http://schemas.openxmlformats.org/drawingml/2006/main" xmlns:r="http://schemas.openxmlformats.org/officeDocument/2006/relationships" xmlns:p="http://schemas.openxmlformats.org/presentationml/2006/main">
+  <p:cSld>
+    <p:spTree>
+      <p:nvGrpSpPr>
+        <p:cNvPr id="1" name=""/>
+        <p:cNvGrpSpPr/>
+        <p:nvPr/>
+      </p:nvGrpSpPr>
+      <p:grpSpPr>
+        <a:xfrm>
+          <a:off x="0" y="0"/>
+          <a:ext cx="0" cy="0"/>
+          <a:chOff x="0" y="0"/>
+          <a:chExt cx="0" cy="0"/>
+        </a:xfrm>
+      </p:grpSpPr>
+      <p:sp>
+        <p:nvSpPr>
           <p:cNvPr id="2" name="Title 1"/>
           <p:cNvSpPr>
             <a:spLocks noGrp="1"/>
@@ -19557,7 +20742,7 @@
 </p:sld>
 </file>
 
-<file path=ppt/slides/slide48.xml><?xml version="1.0" encoding="utf-8"?>
+<file path=ppt/slides/slide51.xml><?xml version="1.0" encoding="utf-8"?>
 <p:sld xmlns:a="http://schemas.openxmlformats.org/drawingml/2006/main" xmlns:r="http://schemas.openxmlformats.org/officeDocument/2006/relationships" xmlns:p="http://schemas.openxmlformats.org/presentationml/2006/main">
   <p:cSld>
     <p:spTree>
@@ -19689,7 +20874,7 @@
 </p:sld>
 </file>
 
-<file path=ppt/slides/slide49.xml><?xml version="1.0" encoding="utf-8"?>
+<file path=ppt/slides/slide52.xml><?xml version="1.0" encoding="utf-8"?>
 <p:sld xmlns:a="http://schemas.openxmlformats.org/drawingml/2006/main" xmlns:r="http://schemas.openxmlformats.org/officeDocument/2006/relationships" xmlns:p="http://schemas.openxmlformats.org/presentationml/2006/main">
   <p:cSld>
     <p:spTree>
@@ -19832,7 +21017,375 @@
 </p:sld>
 </file>
 
-<file path=ppt/slides/slide5.xml><?xml version="1.0" encoding="utf-8"?>
+<file path=ppt/slides/slide53.xml><?xml version="1.0" encoding="utf-8"?>
+<p:sld xmlns:a="http://schemas.openxmlformats.org/drawingml/2006/main" xmlns:r="http://schemas.openxmlformats.org/officeDocument/2006/relationships" xmlns:p="http://schemas.openxmlformats.org/presentationml/2006/main">
+  <p:cSld>
+    <p:spTree>
+      <p:nvGrpSpPr>
+        <p:cNvPr id="1" name=""/>
+        <p:cNvGrpSpPr/>
+        <p:nvPr/>
+      </p:nvGrpSpPr>
+      <p:grpSpPr>
+        <a:xfrm>
+          <a:off x="0" y="0"/>
+          <a:ext cx="0" cy="0"/>
+          <a:chOff x="0" y="0"/>
+          <a:chExt cx="0" cy="0"/>
+        </a:xfrm>
+      </p:grpSpPr>
+      <p:sp>
+        <p:nvSpPr>
+          <p:cNvPr id="2" name="Title 1"/>
+          <p:cNvSpPr>
+            <a:spLocks noGrp="1"/>
+          </p:cNvSpPr>
+          <p:nvPr>
+            <p:ph type="title"/>
+          </p:nvPr>
+        </p:nvSpPr>
+        <p:spPr/>
+        <p:txBody>
+          <a:bodyPr/>
+          <a:lstStyle/>
+          <a:p>
+            <a:r>
+              <a:rPr lang="zh-CN" altLang="en-US" dirty="0"/>
+              <a:t>课后作业</a:t>
+            </a:r>
+            <a:endParaRPr lang="en-US" dirty="0"/>
+          </a:p>
+        </p:txBody>
+      </p:sp>
+      <p:sp>
+        <p:nvSpPr>
+          <p:cNvPr id="3" name="Content Placeholder 2"/>
+          <p:cNvSpPr>
+            <a:spLocks noGrp="1"/>
+          </p:cNvSpPr>
+          <p:nvPr>
+            <p:ph idx="1"/>
+          </p:nvPr>
+        </p:nvSpPr>
+        <p:spPr/>
+        <p:txBody>
+          <a:bodyPr/>
+          <a:lstStyle/>
+          <a:p>
+            <a:r>
+              <a:rPr lang="zh-CN" altLang="en-US" dirty="0"/>
+              <a:t>课后作业</a:t>
+            </a:r>
+            <a:endParaRPr lang="en-US" altLang="zh-CN" dirty="0"/>
+          </a:p>
+          <a:p>
+            <a:pPr lvl="1"/>
+            <a:r>
+              <a:rPr lang="zh-CN" altLang="en-US" dirty="0"/>
+              <a:t>采访工业界的软件团队（通过邮件，微博，微信，阅读博客等方式），询问他们的软件开发流程</a:t>
+            </a:r>
+            <a:endParaRPr lang="en-US" altLang="zh-CN"/>
+          </a:p>
+          <a:p>
+            <a:pPr lvl="1"/>
+            <a:endParaRPr lang="en-US" dirty="0"/>
+          </a:p>
+        </p:txBody>
+      </p:sp>
+    </p:spTree>
+    <p:extLst>
+      <p:ext uri="{BB962C8B-B14F-4D97-AF65-F5344CB8AC3E}">
+        <p14:creationId xmlns:p14="http://schemas.microsoft.com/office/powerpoint/2010/main" val="2509694523"/>
+      </p:ext>
+    </p:extLst>
+  </p:cSld>
+  <p:clrMapOvr>
+    <a:masterClrMapping/>
+  </p:clrMapOvr>
+</p:sld>
+</file>
+
+<file path=ppt/slides/slide54.xml><?xml version="1.0" encoding="utf-8"?>
+<p:sld xmlns:a="http://schemas.openxmlformats.org/drawingml/2006/main" xmlns:r="http://schemas.openxmlformats.org/officeDocument/2006/relationships" xmlns:p="http://schemas.openxmlformats.org/presentationml/2006/main">
+  <p:cSld>
+    <p:spTree>
+      <p:nvGrpSpPr>
+        <p:cNvPr id="1" name=""/>
+        <p:cNvGrpSpPr/>
+        <p:nvPr/>
+      </p:nvGrpSpPr>
+      <p:grpSpPr>
+        <a:xfrm>
+          <a:off x="0" y="0"/>
+          <a:ext cx="0" cy="0"/>
+          <a:chOff x="0" y="0"/>
+          <a:chExt cx="0" cy="0"/>
+        </a:xfrm>
+      </p:grpSpPr>
+      <p:sp>
+        <p:nvSpPr>
+          <p:cNvPr id="2" name="标题 1"/>
+          <p:cNvSpPr>
+            <a:spLocks noGrp="1"/>
+          </p:cNvSpPr>
+          <p:nvPr>
+            <p:ph type="title"/>
+          </p:nvPr>
+        </p:nvSpPr>
+        <p:spPr/>
+        <p:txBody>
+          <a:bodyPr/>
+          <a:lstStyle/>
+          <a:p>
+            <a:r>
+              <a:rPr lang="zh-CN" altLang="en-US" dirty="0"/>
+              <a:t>练习和讨论</a:t>
+            </a:r>
+            <a:endParaRPr lang="en-US" dirty="0"/>
+          </a:p>
+        </p:txBody>
+      </p:sp>
+      <p:sp>
+        <p:nvSpPr>
+          <p:cNvPr id="3" name="内容占位符 2"/>
+          <p:cNvSpPr>
+            <a:spLocks noGrp="1"/>
+          </p:cNvSpPr>
+          <p:nvPr>
+            <p:ph idx="1"/>
+          </p:nvPr>
+        </p:nvSpPr>
+        <p:spPr/>
+        <p:txBody>
+          <a:bodyPr/>
+          <a:lstStyle/>
+          <a:p>
+            <a:r>
+              <a:rPr lang="en-US" dirty="0">
+                <a:hlinkClick r:id="rId2"/>
+              </a:rPr>
+              <a:t>http://www.cnblogs.com/xinz/p/3852332.html</a:t>
+            </a:r>
+            <a:r>
+              <a:rPr lang="en-US" dirty="0"/>
+              <a:t> </a:t>
+            </a:r>
+          </a:p>
+        </p:txBody>
+      </p:sp>
+    </p:spTree>
+    <p:extLst>
+      <p:ext uri="{BB962C8B-B14F-4D97-AF65-F5344CB8AC3E}">
+        <p14:creationId xmlns:p14="http://schemas.microsoft.com/office/powerpoint/2010/main" val="3643588990"/>
+      </p:ext>
+    </p:extLst>
+  </p:cSld>
+  <p:clrMapOvr>
+    <a:masterClrMapping/>
+  </p:clrMapOvr>
+</p:sld>
+</file>
+
+<file path=ppt/slides/slide55.xml><?xml version="1.0" encoding="utf-8"?>
+<p:sld xmlns:a="http://schemas.openxmlformats.org/drawingml/2006/main" xmlns:r="http://schemas.openxmlformats.org/officeDocument/2006/relationships" xmlns:p="http://schemas.openxmlformats.org/presentationml/2006/main">
+  <p:cSld>
+    <p:spTree>
+      <p:nvGrpSpPr>
+        <p:cNvPr id="1" name=""/>
+        <p:cNvGrpSpPr/>
+        <p:nvPr/>
+      </p:nvGrpSpPr>
+      <p:grpSpPr>
+        <a:xfrm>
+          <a:off x="0" y="0"/>
+          <a:ext cx="0" cy="0"/>
+          <a:chOff x="0" y="0"/>
+          <a:chExt cx="0" cy="0"/>
+        </a:xfrm>
+      </p:grpSpPr>
+      <p:sp>
+        <p:nvSpPr>
+          <p:cNvPr id="2" name="Title 1">
+            <a:extLst>
+              <a:ext uri="{FF2B5EF4-FFF2-40B4-BE49-F238E27FC236}">
+                <a16:creationId xmlns:a16="http://schemas.microsoft.com/office/drawing/2014/main" id="{24577D88-E090-464B-BC87-D60EE9128A0F}"/>
+              </a:ext>
+            </a:extLst>
+          </p:cNvPr>
+          <p:cNvSpPr>
+            <a:spLocks noGrp="1"/>
+          </p:cNvSpPr>
+          <p:nvPr>
+            <p:ph type="title"/>
+          </p:nvPr>
+        </p:nvSpPr>
+        <p:spPr/>
+        <p:txBody>
+          <a:bodyPr/>
+          <a:lstStyle/>
+          <a:p>
+            <a:r>
+              <a:rPr lang="en-US" dirty="0"/>
+              <a:t>appendix</a:t>
+            </a:r>
+          </a:p>
+        </p:txBody>
+      </p:sp>
+      <p:sp>
+        <p:nvSpPr>
+          <p:cNvPr id="3" name="Content Placeholder 2">
+            <a:extLst>
+              <a:ext uri="{FF2B5EF4-FFF2-40B4-BE49-F238E27FC236}">
+                <a16:creationId xmlns:a16="http://schemas.microsoft.com/office/drawing/2014/main" id="{3402149D-B9D8-49F7-8135-09433B6F86C7}"/>
+              </a:ext>
+            </a:extLst>
+          </p:cNvPr>
+          <p:cNvSpPr>
+            <a:spLocks noGrp="1"/>
+          </p:cNvSpPr>
+          <p:nvPr>
+            <p:ph idx="1"/>
+          </p:nvPr>
+        </p:nvSpPr>
+        <p:spPr/>
+        <p:txBody>
+          <a:bodyPr/>
+          <a:lstStyle/>
+          <a:p>
+            <a:endParaRPr lang="en-US"/>
+          </a:p>
+        </p:txBody>
+      </p:sp>
+    </p:spTree>
+    <p:extLst>
+      <p:ext uri="{BB962C8B-B14F-4D97-AF65-F5344CB8AC3E}">
+        <p14:creationId xmlns:p14="http://schemas.microsoft.com/office/powerpoint/2010/main" val="161325156"/>
+      </p:ext>
+    </p:extLst>
+  </p:cSld>
+  <p:clrMapOvr>
+    <a:masterClrMapping/>
+  </p:clrMapOvr>
+</p:sld>
+</file>
+
+<file path=ppt/slides/slide6.xml><?xml version="1.0" encoding="utf-8"?>
+<p:sld xmlns:a="http://schemas.openxmlformats.org/drawingml/2006/main" xmlns:r="http://schemas.openxmlformats.org/officeDocument/2006/relationships" xmlns:p="http://schemas.openxmlformats.org/presentationml/2006/main">
+  <p:cSld>
+    <p:spTree>
+      <p:nvGrpSpPr>
+        <p:cNvPr id="1" name=""/>
+        <p:cNvGrpSpPr/>
+        <p:nvPr/>
+      </p:nvGrpSpPr>
+      <p:grpSpPr>
+        <a:xfrm>
+          <a:off x="0" y="0"/>
+          <a:ext cx="0" cy="0"/>
+          <a:chOff x="0" y="0"/>
+          <a:chExt cx="0" cy="0"/>
+        </a:xfrm>
+      </p:grpSpPr>
+      <p:sp>
+        <p:nvSpPr>
+          <p:cNvPr id="2" name="标题 1"/>
+          <p:cNvSpPr>
+            <a:spLocks noGrp="1"/>
+          </p:cNvSpPr>
+          <p:nvPr>
+            <p:ph type="title"/>
+          </p:nvPr>
+        </p:nvSpPr>
+        <p:spPr/>
+        <p:txBody>
+          <a:bodyPr/>
+          <a:lstStyle/>
+          <a:p>
+            <a:r>
+              <a:rPr lang="zh-CN" altLang="en-US" dirty="0"/>
+              <a:t>团队的特点</a:t>
+            </a:r>
+            <a:endParaRPr lang="en-US" dirty="0"/>
+          </a:p>
+        </p:txBody>
+      </p:sp>
+      <p:sp>
+        <p:nvSpPr>
+          <p:cNvPr id="3" name="内容占位符 2"/>
+          <p:cNvSpPr>
+            <a:spLocks noGrp="1"/>
+          </p:cNvSpPr>
+          <p:nvPr>
+            <p:ph idx="1"/>
+          </p:nvPr>
+        </p:nvSpPr>
+        <p:spPr/>
+        <p:txBody>
+          <a:bodyPr>
+            <a:normAutofit/>
+          </a:bodyPr>
+          <a:lstStyle/>
+          <a:p>
+            <a:pPr marL="118872" indent="0" eaLnBrk="0" hangingPunct="0">
+              <a:buNone/>
+            </a:pPr>
+            <a:r>
+              <a:rPr lang="zh-CN" altLang="en-US" dirty="0"/>
+              <a:t>团队有共同的特点：</a:t>
+            </a:r>
+            <a:endParaRPr lang="en-US" dirty="0"/>
+          </a:p>
+          <a:p>
+            <a:pPr eaLnBrk="0" hangingPunct="0"/>
+            <a:r>
+              <a:rPr lang="zh-CN" altLang="en-US" dirty="0"/>
+              <a:t>团队有一致的集体目标，团队要一起完成这目标。 一个团队的成员不一定要同时工作，例如接力赛跑。</a:t>
+            </a:r>
+            <a:endParaRPr lang="en-US" altLang="zh-CN" dirty="0"/>
+          </a:p>
+          <a:p>
+            <a:pPr lvl="1" eaLnBrk="0" hangingPunct="0"/>
+            <a:r>
+              <a:rPr lang="zh-CN" altLang="en-US" dirty="0"/>
+              <a:t>（王屋村搬砖的“非 团队”成员则不然，每个人想搬多少就搬多少，不想干了就结算工钱走人。）</a:t>
+            </a:r>
+            <a:endParaRPr lang="en-US" dirty="0"/>
+          </a:p>
+          <a:p>
+            <a:pPr eaLnBrk="0" hangingPunct="0"/>
+            <a:r>
+              <a:rPr lang="zh-CN" altLang="en-US" dirty="0"/>
+              <a:t>团队成员有各自的分工，互相依赖合作，共同完成任务。</a:t>
+            </a:r>
+            <a:endParaRPr lang="en-US" altLang="zh-CN" dirty="0"/>
+          </a:p>
+          <a:p>
+            <a:pPr lvl="1" eaLnBrk="0" hangingPunct="0"/>
+            <a:r>
+              <a:rPr lang="zh-CN" altLang="en-US" dirty="0"/>
+              <a:t>（王屋村搬砖的 “非团队”成员则是各自行动，独立把任务完成，有人不辞而别，对其 他的搬砖人无实质影响。）</a:t>
+            </a:r>
+            <a:endParaRPr lang="en-US" dirty="0"/>
+          </a:p>
+          <a:p>
+            <a:endParaRPr lang="en-US" dirty="0"/>
+          </a:p>
+        </p:txBody>
+      </p:sp>
+    </p:spTree>
+    <p:extLst>
+      <p:ext uri="{BB962C8B-B14F-4D97-AF65-F5344CB8AC3E}">
+        <p14:creationId xmlns:p14="http://schemas.microsoft.com/office/powerpoint/2010/main" val="3435014385"/>
+      </p:ext>
+    </p:extLst>
+  </p:cSld>
+  <p:clrMapOvr>
+    <a:masterClrMapping/>
+  </p:clrMapOvr>
+</p:sld>
+</file>
+
+<file path=ppt/slides/slide7.xml><?xml version="1.0" encoding="utf-8"?>
 <p:sld xmlns:a="http://schemas.openxmlformats.org/drawingml/2006/main" xmlns:r="http://schemas.openxmlformats.org/officeDocument/2006/relationships" xmlns:p="http://schemas.openxmlformats.org/presentationml/2006/main" showMasterSp="0">
   <p:cSld>
     <p:spTree>
@@ -19926,259 +21479,7 @@
 </p:sld>
 </file>
 
-<file path=ppt/slides/slide50.xml><?xml version="1.0" encoding="utf-8"?>
-<p:sld xmlns:a="http://schemas.openxmlformats.org/drawingml/2006/main" xmlns:r="http://schemas.openxmlformats.org/officeDocument/2006/relationships" xmlns:p="http://schemas.openxmlformats.org/presentationml/2006/main">
-  <p:cSld>
-    <p:spTree>
-      <p:nvGrpSpPr>
-        <p:cNvPr id="1" name=""/>
-        <p:cNvGrpSpPr/>
-        <p:nvPr/>
-      </p:nvGrpSpPr>
-      <p:grpSpPr>
-        <a:xfrm>
-          <a:off x="0" y="0"/>
-          <a:ext cx="0" cy="0"/>
-          <a:chOff x="0" y="0"/>
-          <a:chExt cx="0" cy="0"/>
-        </a:xfrm>
-      </p:grpSpPr>
-      <p:sp>
-        <p:nvSpPr>
-          <p:cNvPr id="2" name="Title 1"/>
-          <p:cNvSpPr>
-            <a:spLocks noGrp="1"/>
-          </p:cNvSpPr>
-          <p:nvPr>
-            <p:ph type="title"/>
-          </p:nvPr>
-        </p:nvSpPr>
-        <p:spPr/>
-        <p:txBody>
-          <a:bodyPr/>
-          <a:lstStyle/>
-          <a:p>
-            <a:r>
-              <a:rPr lang="zh-CN" altLang="en-US" dirty="0"/>
-              <a:t>课后作业</a:t>
-            </a:r>
-            <a:endParaRPr lang="en-US" dirty="0"/>
-          </a:p>
-        </p:txBody>
-      </p:sp>
-      <p:sp>
-        <p:nvSpPr>
-          <p:cNvPr id="3" name="Content Placeholder 2"/>
-          <p:cNvSpPr>
-            <a:spLocks noGrp="1"/>
-          </p:cNvSpPr>
-          <p:nvPr>
-            <p:ph idx="1"/>
-          </p:nvPr>
-        </p:nvSpPr>
-        <p:spPr/>
-        <p:txBody>
-          <a:bodyPr/>
-          <a:lstStyle/>
-          <a:p>
-            <a:r>
-              <a:rPr lang="zh-CN" altLang="en-US" dirty="0"/>
-              <a:t>课后作业</a:t>
-            </a:r>
-            <a:endParaRPr lang="en-US" altLang="zh-CN" dirty="0"/>
-          </a:p>
-          <a:p>
-            <a:pPr lvl="1"/>
-            <a:r>
-              <a:rPr lang="zh-CN" altLang="en-US" dirty="0"/>
-              <a:t>采访工业界的软件团队（通过邮件，微博，微信，阅读博客等方式），询问他们的软件开发流程</a:t>
-            </a:r>
-            <a:endParaRPr lang="en-US" altLang="zh-CN"/>
-          </a:p>
-          <a:p>
-            <a:pPr lvl="1"/>
-            <a:endParaRPr lang="en-US" dirty="0"/>
-          </a:p>
-        </p:txBody>
-      </p:sp>
-    </p:spTree>
-    <p:extLst>
-      <p:ext uri="{BB962C8B-B14F-4D97-AF65-F5344CB8AC3E}">
-        <p14:creationId xmlns:p14="http://schemas.microsoft.com/office/powerpoint/2010/main" val="2509694523"/>
-      </p:ext>
-    </p:extLst>
-  </p:cSld>
-  <p:clrMapOvr>
-    <a:masterClrMapping/>
-  </p:clrMapOvr>
-</p:sld>
-</file>
-
-<file path=ppt/slides/slide51.xml><?xml version="1.0" encoding="utf-8"?>
-<p:sld xmlns:a="http://schemas.openxmlformats.org/drawingml/2006/main" xmlns:r="http://schemas.openxmlformats.org/officeDocument/2006/relationships" xmlns:p="http://schemas.openxmlformats.org/presentationml/2006/main">
-  <p:cSld>
-    <p:spTree>
-      <p:nvGrpSpPr>
-        <p:cNvPr id="1" name=""/>
-        <p:cNvGrpSpPr/>
-        <p:nvPr/>
-      </p:nvGrpSpPr>
-      <p:grpSpPr>
-        <a:xfrm>
-          <a:off x="0" y="0"/>
-          <a:ext cx="0" cy="0"/>
-          <a:chOff x="0" y="0"/>
-          <a:chExt cx="0" cy="0"/>
-        </a:xfrm>
-      </p:grpSpPr>
-      <p:sp>
-        <p:nvSpPr>
-          <p:cNvPr id="2" name="标题 1"/>
-          <p:cNvSpPr>
-            <a:spLocks noGrp="1"/>
-          </p:cNvSpPr>
-          <p:nvPr>
-            <p:ph type="title"/>
-          </p:nvPr>
-        </p:nvSpPr>
-        <p:spPr/>
-        <p:txBody>
-          <a:bodyPr/>
-          <a:lstStyle/>
-          <a:p>
-            <a:r>
-              <a:rPr lang="zh-CN" altLang="en-US" dirty="0"/>
-              <a:t>练习和讨论</a:t>
-            </a:r>
-            <a:endParaRPr lang="en-US" dirty="0"/>
-          </a:p>
-        </p:txBody>
-      </p:sp>
-      <p:sp>
-        <p:nvSpPr>
-          <p:cNvPr id="3" name="内容占位符 2"/>
-          <p:cNvSpPr>
-            <a:spLocks noGrp="1"/>
-          </p:cNvSpPr>
-          <p:nvPr>
-            <p:ph idx="1"/>
-          </p:nvPr>
-        </p:nvSpPr>
-        <p:spPr/>
-        <p:txBody>
-          <a:bodyPr/>
-          <a:lstStyle/>
-          <a:p>
-            <a:r>
-              <a:rPr lang="en-US" dirty="0">
-                <a:hlinkClick r:id="rId2"/>
-              </a:rPr>
-              <a:t>http://www.cnblogs.com/xinz/p/3852332.html</a:t>
-            </a:r>
-            <a:r>
-              <a:rPr lang="en-US" dirty="0"/>
-              <a:t> </a:t>
-            </a:r>
-          </a:p>
-        </p:txBody>
-      </p:sp>
-    </p:spTree>
-    <p:extLst>
-      <p:ext uri="{BB962C8B-B14F-4D97-AF65-F5344CB8AC3E}">
-        <p14:creationId xmlns:p14="http://schemas.microsoft.com/office/powerpoint/2010/main" val="3643588990"/>
-      </p:ext>
-    </p:extLst>
-  </p:cSld>
-  <p:clrMapOvr>
-    <a:masterClrMapping/>
-  </p:clrMapOvr>
-</p:sld>
-</file>
-
-<file path=ppt/slides/slide52.xml><?xml version="1.0" encoding="utf-8"?>
-<p:sld xmlns:a="http://schemas.openxmlformats.org/drawingml/2006/main" xmlns:r="http://schemas.openxmlformats.org/officeDocument/2006/relationships" xmlns:p="http://schemas.openxmlformats.org/presentationml/2006/main">
-  <p:cSld>
-    <p:spTree>
-      <p:nvGrpSpPr>
-        <p:cNvPr id="1" name=""/>
-        <p:cNvGrpSpPr/>
-        <p:nvPr/>
-      </p:nvGrpSpPr>
-      <p:grpSpPr>
-        <a:xfrm>
-          <a:off x="0" y="0"/>
-          <a:ext cx="0" cy="0"/>
-          <a:chOff x="0" y="0"/>
-          <a:chExt cx="0" cy="0"/>
-        </a:xfrm>
-      </p:grpSpPr>
-      <p:sp>
-        <p:nvSpPr>
-          <p:cNvPr id="2" name="Title 1">
-            <a:extLst>
-              <a:ext uri="{FF2B5EF4-FFF2-40B4-BE49-F238E27FC236}">
-                <a16:creationId xmlns:a16="http://schemas.microsoft.com/office/drawing/2014/main" id="{24577D88-E090-464B-BC87-D60EE9128A0F}"/>
-              </a:ext>
-            </a:extLst>
-          </p:cNvPr>
-          <p:cNvSpPr>
-            <a:spLocks noGrp="1"/>
-          </p:cNvSpPr>
-          <p:nvPr>
-            <p:ph type="title"/>
-          </p:nvPr>
-        </p:nvSpPr>
-        <p:spPr/>
-        <p:txBody>
-          <a:bodyPr/>
-          <a:lstStyle/>
-          <a:p>
-            <a:r>
-              <a:rPr lang="en-US" dirty="0"/>
-              <a:t>appendix</a:t>
-            </a:r>
-          </a:p>
-        </p:txBody>
-      </p:sp>
-      <p:sp>
-        <p:nvSpPr>
-          <p:cNvPr id="3" name="Content Placeholder 2">
-            <a:extLst>
-              <a:ext uri="{FF2B5EF4-FFF2-40B4-BE49-F238E27FC236}">
-                <a16:creationId xmlns:a16="http://schemas.microsoft.com/office/drawing/2014/main" id="{3402149D-B9D8-49F7-8135-09433B6F86C7}"/>
-              </a:ext>
-            </a:extLst>
-          </p:cNvPr>
-          <p:cNvSpPr>
-            <a:spLocks noGrp="1"/>
-          </p:cNvSpPr>
-          <p:nvPr>
-            <p:ph idx="1"/>
-          </p:nvPr>
-        </p:nvSpPr>
-        <p:spPr/>
-        <p:txBody>
-          <a:bodyPr/>
-          <a:lstStyle/>
-          <a:p>
-            <a:endParaRPr lang="en-US"/>
-          </a:p>
-        </p:txBody>
-      </p:sp>
-    </p:spTree>
-    <p:extLst>
-      <p:ext uri="{BB962C8B-B14F-4D97-AF65-F5344CB8AC3E}">
-        <p14:creationId xmlns:p14="http://schemas.microsoft.com/office/powerpoint/2010/main" val="161325156"/>
-      </p:ext>
-    </p:extLst>
-  </p:cSld>
-  <p:clrMapOvr>
-    <a:masterClrMapping/>
-  </p:clrMapOvr>
-</p:sld>
-</file>
-
-<file path=ppt/slides/slide6.xml><?xml version="1.0" encoding="utf-8"?>
+<file path=ppt/slides/slide8.xml><?xml version="1.0" encoding="utf-8"?>
 <p:sld xmlns:a="http://schemas.openxmlformats.org/drawingml/2006/main" xmlns:r="http://schemas.openxmlformats.org/officeDocument/2006/relationships" xmlns:p="http://schemas.openxmlformats.org/presentationml/2006/main">
   <p:cSld>
     <p:spTree>
@@ -20306,223 +21607,6 @@
 </p:sld>
 </file>
 
-<file path=ppt/slides/slide7.xml><?xml version="1.0" encoding="utf-8"?>
-<p:sld xmlns:a="http://schemas.openxmlformats.org/drawingml/2006/main" xmlns:r="http://schemas.openxmlformats.org/officeDocument/2006/relationships" xmlns:p="http://schemas.openxmlformats.org/presentationml/2006/main">
-  <p:cSld>
-    <p:spTree>
-      <p:nvGrpSpPr>
-        <p:cNvPr id="1" name=""/>
-        <p:cNvGrpSpPr/>
-        <p:nvPr/>
-      </p:nvGrpSpPr>
-      <p:grpSpPr>
-        <a:xfrm>
-          <a:off x="0" y="0"/>
-          <a:ext cx="0" cy="0"/>
-          <a:chOff x="0" y="0"/>
-          <a:chExt cx="0" cy="0"/>
-        </a:xfrm>
-      </p:grpSpPr>
-      <p:sp>
-        <p:nvSpPr>
-          <p:cNvPr id="2" name="Title 1"/>
-          <p:cNvSpPr>
-            <a:spLocks noGrp="1"/>
-          </p:cNvSpPr>
-          <p:nvPr>
-            <p:ph type="title"/>
-          </p:nvPr>
-        </p:nvSpPr>
-        <p:spPr/>
-        <p:txBody>
-          <a:bodyPr/>
-          <a:lstStyle/>
-          <a:p>
-            <a:r>
-              <a:rPr lang="zh-CN" altLang="en-US" dirty="0"/>
-              <a:t>团队的不同形式</a:t>
-            </a:r>
-            <a:endParaRPr lang="en-US" dirty="0"/>
-          </a:p>
-        </p:txBody>
-      </p:sp>
-      <p:sp>
-        <p:nvSpPr>
-          <p:cNvPr id="3" name="Content Placeholder 2"/>
-          <p:cNvSpPr>
-            <a:spLocks noGrp="1"/>
-          </p:cNvSpPr>
-          <p:nvPr>
-            <p:ph idx="1"/>
-          </p:nvPr>
-        </p:nvSpPr>
-        <p:spPr/>
-        <p:txBody>
-          <a:bodyPr>
-            <a:normAutofit/>
-          </a:bodyPr>
-          <a:lstStyle/>
-          <a:p>
-            <a:pPr fontAlgn="ctr"/>
-            <a:r>
-              <a:rPr lang="en-US" dirty="0"/>
-              <a:t>Business Team </a:t>
-            </a:r>
-            <a:r>
-              <a:rPr lang="zh-CN" altLang="en-US" dirty="0"/>
-              <a:t>（商业开发团队）</a:t>
-            </a:r>
-            <a:endParaRPr lang="en-US" dirty="0"/>
-          </a:p>
-          <a:p>
-            <a:pPr lvl="1"/>
-            <a:r>
-              <a:rPr lang="en-US" dirty="0"/>
-              <a:t>Generic,  hierarchical structure,  lead + equal peers,  stable, work</a:t>
-            </a:r>
-          </a:p>
-          <a:p>
-            <a:pPr lvl="1"/>
-            <a:r>
-              <a:rPr lang="zh-CN" altLang="en-US" dirty="0"/>
-              <a:t>例如开发商业软件的团队</a:t>
-            </a:r>
-            <a:endParaRPr lang="en-US" dirty="0"/>
-          </a:p>
-          <a:p>
-            <a:pPr fontAlgn="ctr"/>
-            <a:r>
-              <a:rPr lang="en-US" dirty="0"/>
-              <a:t>Feature Team</a:t>
-            </a:r>
-          </a:p>
-          <a:p>
-            <a:pPr lvl="1"/>
-            <a:r>
-              <a:rPr lang="en-US" dirty="0"/>
-              <a:t>Dev/test/pm/</a:t>
-            </a:r>
-            <a:r>
-              <a:rPr lang="en-US" dirty="0" err="1"/>
-              <a:t>etc</a:t>
-            </a:r>
-            <a:r>
-              <a:rPr lang="en-US" dirty="0"/>
-              <a:t>,  give responsibility to own a part of the product</a:t>
-            </a:r>
-          </a:p>
-          <a:p>
-            <a:pPr lvl="1"/>
-            <a:r>
-              <a:rPr lang="en-US" altLang="zh-CN" dirty="0"/>
-              <a:t>Feature Crew </a:t>
-            </a:r>
-            <a:r>
-              <a:rPr lang="zh-CN" altLang="en-US" dirty="0"/>
-              <a:t>（功能小组）</a:t>
-            </a:r>
-            <a:endParaRPr lang="en-US" dirty="0"/>
-          </a:p>
-          <a:p>
-            <a:pPr marL="118872" indent="0">
-              <a:buNone/>
-            </a:pPr>
-            <a:endParaRPr lang="en-US" dirty="0"/>
-          </a:p>
-        </p:txBody>
-      </p:sp>
-    </p:spTree>
-    <p:extLst>
-      <p:ext uri="{BB962C8B-B14F-4D97-AF65-F5344CB8AC3E}">
-        <p14:creationId xmlns:p14="http://schemas.microsoft.com/office/powerpoint/2010/main" val="2200019481"/>
-      </p:ext>
-    </p:extLst>
-  </p:cSld>
-  <p:clrMapOvr>
-    <a:masterClrMapping/>
-  </p:clrMapOvr>
-</p:sld>
-</file>
-
-<file path=ppt/slides/slide8.xml><?xml version="1.0" encoding="utf-8"?>
-<p:sld xmlns:a="http://schemas.openxmlformats.org/drawingml/2006/main" xmlns:r="http://schemas.openxmlformats.org/officeDocument/2006/relationships" xmlns:p="http://schemas.openxmlformats.org/presentationml/2006/main" showMasterSp="0">
-  <p:cSld>
-    <p:spTree>
-      <p:nvGrpSpPr>
-        <p:cNvPr id="1" name=""/>
-        <p:cNvGrpSpPr/>
-        <p:nvPr/>
-      </p:nvGrpSpPr>
-      <p:grpSpPr>
-        <a:xfrm>
-          <a:off x="0" y="0"/>
-          <a:ext cx="0" cy="0"/>
-          <a:chOff x="0" y="0"/>
-          <a:chExt cx="0" cy="0"/>
-        </a:xfrm>
-      </p:grpSpPr>
-      <p:pic>
-        <p:nvPicPr>
-          <p:cNvPr id="2050" name="Picture 2" descr="image032"/>
-          <p:cNvPicPr>
-            <a:picLocks noChangeAspect="1" noChangeArrowheads="1"/>
-          </p:cNvPicPr>
-          <p:nvPr/>
-        </p:nvPicPr>
-        <p:blipFill>
-          <a:blip r:embed="rId2" cstate="print">
-            <a:extLst>
-              <a:ext uri="{28A0092B-C50C-407E-A947-70E740481C1C}">
-                <a14:useLocalDpi xmlns:a14="http://schemas.microsoft.com/office/drawing/2010/main" val="0"/>
-              </a:ext>
-            </a:extLst>
-          </a:blip>
-          <a:srcRect/>
-          <a:stretch>
-            <a:fillRect/>
-          </a:stretch>
-        </p:blipFill>
-        <p:spPr bwMode="auto">
-          <a:xfrm>
-            <a:off x="2959100" y="44128"/>
-            <a:ext cx="6184900" cy="6813872"/>
-          </a:xfrm>
-          <a:prstGeom prst="rect">
-            <a:avLst/>
-          </a:prstGeom>
-          <a:noFill/>
-          <a:ln w="9525">
-            <a:solidFill>
-              <a:srgbClr val="000000"/>
-            </a:solidFill>
-            <a:miter lim="800000"/>
-            <a:headEnd/>
-            <a:tailEnd/>
-          </a:ln>
-          <a:extLst>
-            <a:ext uri="{909E8E84-426E-40DD-AFC4-6F175D3DCCD1}">
-              <a14:hiddenFill xmlns:a14="http://schemas.microsoft.com/office/drawing/2010/main">
-                <a:solidFill>
-                  <a:srgbClr val="FFFFFF"/>
-                </a:solidFill>
-              </a14:hiddenFill>
-            </a:ext>
-          </a:extLst>
-        </p:spPr>
-      </p:pic>
-    </p:spTree>
-    <p:extLst>
-      <p:ext uri="{BB962C8B-B14F-4D97-AF65-F5344CB8AC3E}">
-        <p14:creationId xmlns:p14="http://schemas.microsoft.com/office/powerpoint/2010/main" val="4213188873"/>
-      </p:ext>
-    </p:extLst>
-  </p:cSld>
-  <p:clrMapOvr>
-    <a:masterClrMapping/>
-  </p:clrMapOvr>
-</p:sld>
-</file>
-
 <file path=ppt/slides/slide9.xml><?xml version="1.0" encoding="utf-8"?>
 <p:sld xmlns:a="http://schemas.openxmlformats.org/drawingml/2006/main" xmlns:r="http://schemas.openxmlformats.org/officeDocument/2006/relationships" xmlns:p="http://schemas.openxmlformats.org/presentationml/2006/main">
   <p:cSld>
@@ -20557,7 +21641,7 @@
           <a:p>
             <a:r>
               <a:rPr lang="zh-CN" altLang="en-US" dirty="0"/>
-              <a:t>不同的团队类型</a:t>
+              <a:t>团队的不同形式</a:t>
             </a:r>
             <a:endParaRPr lang="en-US" dirty="0"/>
           </a:p>
@@ -20583,56 +21667,67 @@
             <a:pPr fontAlgn="ctr"/>
             <a:r>
               <a:rPr lang="en-US" dirty="0"/>
-              <a:t>Theater Team </a:t>
-            </a:r>
-            <a:r>
-              <a:rPr lang="zh-CN" altLang="en-US" dirty="0"/>
-              <a:t>剧院团队</a:t>
-            </a:r>
-            <a:endParaRPr lang="en-US" altLang="zh-CN" dirty="0"/>
+              <a:t>Business Team </a:t>
+            </a:r>
+            <a:r>
+              <a:rPr lang="zh-CN" altLang="en-US" dirty="0"/>
+              <a:t>（商业开发团队）</a:t>
+            </a:r>
+            <a:endParaRPr lang="en-US" dirty="0"/>
+          </a:p>
+          <a:p>
+            <a:pPr lvl="1"/>
+            <a:r>
+              <a:rPr lang="en-US" dirty="0"/>
+              <a:t>Generic,  hierarchical structure,  lead + equal peers,  stable, work</a:t>
+            </a:r>
+          </a:p>
+          <a:p>
+            <a:pPr lvl="1"/>
+            <a:r>
+              <a:rPr lang="zh-CN" altLang="en-US" dirty="0"/>
+              <a:t>例如开发商业软件的团队</a:t>
+            </a:r>
+            <a:endParaRPr lang="en-US" dirty="0"/>
           </a:p>
           <a:p>
             <a:pPr fontAlgn="ctr"/>
             <a:r>
-              <a:rPr lang="zh-CN" altLang="en-US" dirty="0"/>
-              <a:t>一群有天赋的演员在剧院里演话剧，他们是如何分配角色的？</a:t>
+              <a:rPr lang="en-US" dirty="0"/>
+              <a:t>Feature Team</a:t>
+            </a:r>
+          </a:p>
+          <a:p>
+            <a:pPr lvl="1"/>
+            <a:r>
+              <a:rPr lang="en-US" dirty="0"/>
+              <a:t>Dev/test/pm/</a:t>
+            </a:r>
+            <a:r>
+              <a:rPr lang="en-US" dirty="0" err="1"/>
+              <a:t>etc</a:t>
+            </a:r>
+            <a:r>
+              <a:rPr lang="en-US" dirty="0"/>
+              <a:t>,  give responsibility to own a part of the product</a:t>
+            </a:r>
+          </a:p>
+          <a:p>
+            <a:pPr lvl="1"/>
+            <a:r>
+              <a:rPr lang="en-US" altLang="zh-CN" dirty="0"/>
+              <a:t>Feature Crew </a:t>
+            </a:r>
+            <a:r>
+              <a:rPr lang="zh-CN" altLang="en-US" dirty="0"/>
+              <a:t>（功能小组）</a:t>
             </a:r>
             <a:endParaRPr lang="en-US" dirty="0"/>
           </a:p>
           <a:p>
-            <a:pPr lvl="1"/>
-            <a:r>
-              <a:rPr lang="en-US" dirty="0"/>
-              <a:t>Strong direction,  team member negotiate for roles,   </a:t>
-            </a:r>
-          </a:p>
-          <a:p>
-            <a:pPr lvl="1"/>
-            <a:r>
-              <a:rPr lang="zh-CN" altLang="en-US" dirty="0"/>
-              <a:t>适用于</a:t>
-            </a:r>
-            <a:r>
-              <a:rPr lang="en-US" dirty="0"/>
-              <a:t>: </a:t>
-            </a:r>
-          </a:p>
-          <a:p>
-            <a:pPr lvl="2"/>
-            <a:r>
-              <a:rPr lang="en-US" dirty="0"/>
-              <a:t>training project, volunteer project  </a:t>
-            </a:r>
-          </a:p>
-          <a:p>
-            <a:pPr lvl="2"/>
-            <a:r>
-              <a:rPr lang="zh-CN" altLang="en-US" dirty="0"/>
-              <a:t>大学生的软件工程项目</a:t>
-            </a:r>
-            <a:endParaRPr lang="en-US" dirty="0"/>
-          </a:p>
-          <a:p>
+            <a:pPr marL="118872" indent="0">
+              <a:buNone/>
+            </a:pPr>
             <a:endParaRPr lang="en-US" dirty="0"/>
           </a:p>
         </p:txBody>
@@ -20640,7 +21735,7 @@
     </p:spTree>
     <p:extLst>
       <p:ext uri="{BB962C8B-B14F-4D97-AF65-F5344CB8AC3E}">
-        <p14:creationId xmlns:p14="http://schemas.microsoft.com/office/powerpoint/2010/main" val="1142539797"/>
+        <p14:creationId xmlns:p14="http://schemas.microsoft.com/office/powerpoint/2010/main" val="2200019481"/>
       </p:ext>
     </p:extLst>
   </p:cSld>
@@ -21137,6 +22232,15 @@
 </file>
 
 <file path=customXml/item1.xml><?xml version="1.0" encoding="utf-8"?>
+<?mso-contentType ?>
+<FormTemplates xmlns="http://schemas.microsoft.com/sharepoint/v3/contenttype/forms">
+  <Display>DocumentLibraryForm</Display>
+  <Edit>DocumentLibraryForm</Edit>
+  <New>DocumentLibraryForm</New>
+</FormTemplates>
+</file>
+
+<file path=customXml/item2.xml><?xml version="1.0" encoding="utf-8"?>
 <ct:contentTypeSchema xmlns:ct="http://schemas.microsoft.com/office/2006/metadata/contentType" xmlns:ma="http://schemas.microsoft.com/office/2006/metadata/properties/metaAttributes" ct:_="" ma:_="" ma:contentTypeName="Document" ma:contentTypeID="0x0101006371182FA640024E8A2815D490E1EF25" ma:contentTypeVersion="0" ma:contentTypeDescription="Create a new document." ma:contentTypeScope="" ma:versionID="3591aab47f172a2900f307f59d422227">
   <xsd:schema xmlns:xsd="http://www.w3.org/2001/XMLSchema" xmlns:xs="http://www.w3.org/2001/XMLSchema" xmlns:p="http://schemas.microsoft.com/office/2006/metadata/properties" targetNamespace="http://schemas.microsoft.com/office/2006/metadata/properties" ma:root="true" ma:fieldsID="1f28ea01430cdfb20a10736313f817e3">
     <xsd:element name="properties">
@@ -21250,22 +22354,21 @@
 </ct:contentTypeSchema>
 </file>
 
-<file path=customXml/item2.xml><?xml version="1.0" encoding="utf-8"?>
+<file path=customXml/item3.xml><?xml version="1.0" encoding="utf-8"?>
 <p:properties xmlns:p="http://schemas.microsoft.com/office/2006/metadata/properties" xmlns:xsi="http://www.w3.org/2001/XMLSchema-instance" xmlns:pc="http://schemas.microsoft.com/office/infopath/2007/PartnerControls">
   <documentManagement/>
 </p:properties>
 </file>
 
-<file path=customXml/item3.xml><?xml version="1.0" encoding="utf-8"?>
-<?mso-contentType ?>
-<FormTemplates xmlns="http://schemas.microsoft.com/sharepoint/v3/contenttype/forms">
-  <Display>DocumentLibraryForm</Display>
-  <Edit>DocumentLibraryForm</Edit>
-  <New>DocumentLibraryForm</New>
-</FormTemplates>
+<file path=customXml/itemProps1.xml><?xml version="1.0" encoding="utf-8"?>
+<ds:datastoreItem xmlns:ds="http://schemas.openxmlformats.org/officeDocument/2006/customXml" ds:itemID="{5E60DA82-F298-4C61-A5B5-247E3F9E524D}">
+  <ds:schemaRefs>
+    <ds:schemaRef ds:uri="http://schemas.microsoft.com/sharepoint/v3/contenttype/forms"/>
+  </ds:schemaRefs>
+</ds:datastoreItem>
 </file>
 
-<file path=customXml/itemProps1.xml><?xml version="1.0" encoding="utf-8"?>
+<file path=customXml/itemProps2.xml><?xml version="1.0" encoding="utf-8"?>
 <ds:datastoreItem xmlns:ds="http://schemas.openxmlformats.org/officeDocument/2006/customXml" ds:itemID="{B140E8CF-1284-42B5-AE63-5DAA305DEF64}">
   <ds:schemaRefs>
     <ds:schemaRef ds:uri="http://schemas.microsoft.com/office/2006/metadata/contentType"/>
@@ -21281,19 +22384,11 @@
 </ds:datastoreItem>
 </file>
 
-<file path=customXml/itemProps2.xml><?xml version="1.0" encoding="utf-8"?>
+<file path=customXml/itemProps3.xml><?xml version="1.0" encoding="utf-8"?>
 <ds:datastoreItem xmlns:ds="http://schemas.openxmlformats.org/officeDocument/2006/customXml" ds:itemID="{9AC1766B-B3F5-4F42-8D20-7E7B2DE9B786}">
   <ds:schemaRefs>
     <ds:schemaRef ds:uri="http://schemas.microsoft.com/office/2006/metadata/properties"/>
     <ds:schemaRef ds:uri="http://schemas.microsoft.com/office/infopath/2007/PartnerControls"/>
   </ds:schemaRefs>
 </ds:datastoreItem>
-</file>
-
-<file path=customXml/itemProps3.xml><?xml version="1.0" encoding="utf-8"?>
-<ds:datastoreItem xmlns:ds="http://schemas.openxmlformats.org/officeDocument/2006/customXml" ds:itemID="{5E60DA82-F298-4C61-A5B5-247E3F9E524D}">
-  <ds:schemaRefs>
-    <ds:schemaRef ds:uri="http://schemas.microsoft.com/sharepoint/v3/contenttype/forms"/>
-  </ds:schemaRefs>
-</ds:datastoreItem>
 </file>